--- a/需求分析汇报/期末周别慌_需求分析汇报.pptx
+++ b/需求分析汇报/期末周别慌_需求分析汇报.pptx
@@ -5,24 +5,24 @@
     <p:sldMasterId id="2147483648" r:id="rId1"/>
   </p:sldMasterIdLst>
   <p:sldIdLst>
-    <p:sldId id="256" r:id="rId2"/>
-    <p:sldId id="257" r:id="rId3"/>
-    <p:sldId id="258" r:id="rId4"/>
-    <p:sldId id="259" r:id="rId5"/>
-    <p:sldId id="260" r:id="rId6"/>
-    <p:sldId id="261" r:id="rId7"/>
-    <p:sldId id="262" r:id="rId8"/>
-    <p:sldId id="263" r:id="rId9"/>
-    <p:sldId id="264" r:id="rId10"/>
-    <p:sldId id="265" r:id="rId11"/>
-    <p:sldId id="266" r:id="rId12"/>
-    <p:sldId id="267" r:id="rId13"/>
-    <p:sldId id="268" r:id="rId14"/>
-    <p:sldId id="269" r:id="rId15"/>
-    <p:sldId id="270" r:id="rId16"/>
-    <p:sldId id="271" r:id="rId17"/>
+    <p:sldId id="256" r:id="rId7"/>
+    <p:sldId id="257" r:id="rId8"/>
+    <p:sldId id="258" r:id="rId9"/>
+    <p:sldId id="259" r:id="rId10"/>
+    <p:sldId id="260" r:id="rId11"/>
+    <p:sldId id="261" r:id="rId12"/>
+    <p:sldId id="262" r:id="rId13"/>
+    <p:sldId id="263" r:id="rId14"/>
+    <p:sldId id="264" r:id="rId15"/>
+    <p:sldId id="265" r:id="rId16"/>
+    <p:sldId id="266" r:id="rId17"/>
+    <p:sldId id="267" r:id="rId18"/>
+    <p:sldId id="268" r:id="rId19"/>
+    <p:sldId id="269" r:id="rId20"/>
+    <p:sldId id="270" r:id="rId21"/>
+    <p:sldId id="271" r:id="rId22"/>
   </p:sldIdLst>
-  <p:sldSz cx="12192000" cy="6858000"/>
+  <p:sldSz cx="12191695" cy="6858000" type="screen4x3"/>
   <p:notesSz cx="6858000" cy="9144000"/>
   <p:defaultTextStyle>
     <a:defPPr>
@@ -119,22 +119,6 @@
       </a:defRPr>
     </a:lvl9pPr>
   </p:defaultTextStyle>
-  <p:extLst>
-    <p:ext uri="{EFAFB233-063F-42B5-8137-9DF3F51BA10A}">
-      <p15:sldGuideLst xmlns:p15="http://schemas.microsoft.com/office/powerpoint/2012/main">
-        <p15:guide id="1" orient="horz" pos="2160">
-          <p15:clr>
-            <a:srgbClr val="A4A3A4"/>
-          </p15:clr>
-        </p15:guide>
-        <p15:guide id="2" pos="2880">
-          <p15:clr>
-            <a:srgbClr val="A4A3A4"/>
-          </p15:clr>
-        </p15:guide>
-      </p15:sldGuideLst>
-    </p:ext>
-  </p:extLst>
 </p:presentation>
 </file>
 
@@ -176,9 +160,10 @@
           <a:lstStyle/>
           <a:p>
             <a:r>
-              <a:rPr lang="en-US"/>
+              <a:rPr lang="en-US" smtClean="0"/>
               <a:t>Click to edit Master title style</a:t>
             </a:r>
+            <a:endParaRPr lang="en-US"/>
           </a:p>
         </p:txBody>
       </p:sp>
@@ -294,9 +279,10 @@
           </a:lstStyle>
           <a:p>
             <a:r>
-              <a:rPr lang="en-US"/>
+              <a:rPr lang="en-US" smtClean="0"/>
               <a:t>Click to edit Master subtitle style</a:t>
             </a:r>
+            <a:endParaRPr lang="en-US"/>
           </a:p>
         </p:txBody>
       </p:sp>
@@ -317,7 +303,7 @@
           <a:p>
             <a:fld id="{5BCAD085-E8A6-8845-BD4E-CB4CCA059FC4}" type="datetimeFigureOut">
               <a:rPr lang="en-US" smtClean="0"/>
-              <a:t>9/22/2026</a:t>
+              <a:t>1/27/13</a:t>
             </a:fld>
             <a:endParaRPr lang="en-US"/>
           </a:p>
@@ -411,9 +397,10 @@
           <a:lstStyle/>
           <a:p>
             <a:r>
-              <a:rPr lang="en-US"/>
+              <a:rPr lang="en-US" smtClean="0"/>
               <a:t>Click to edit Master title style</a:t>
             </a:r>
+            <a:endParaRPr lang="en-US"/>
           </a:p>
         </p:txBody>
       </p:sp>
@@ -434,37 +421,38 @@
           <a:p>
             <a:pPr lvl="0"/>
             <a:r>
-              <a:rPr lang="en-US"/>
+              <a:rPr lang="en-US" smtClean="0"/>
               <a:t>Click to edit Master text styles</a:t>
             </a:r>
           </a:p>
           <a:p>
             <a:pPr lvl="1"/>
             <a:r>
-              <a:rPr lang="en-US"/>
+              <a:rPr lang="en-US" smtClean="0"/>
               <a:t>Second level</a:t>
             </a:r>
           </a:p>
           <a:p>
             <a:pPr lvl="2"/>
             <a:r>
-              <a:rPr lang="en-US"/>
+              <a:rPr lang="en-US" smtClean="0"/>
               <a:t>Third level</a:t>
             </a:r>
           </a:p>
           <a:p>
             <a:pPr lvl="3"/>
             <a:r>
-              <a:rPr lang="en-US"/>
+              <a:rPr lang="en-US" smtClean="0"/>
               <a:t>Fourth level</a:t>
             </a:r>
           </a:p>
           <a:p>
             <a:pPr lvl="4"/>
             <a:r>
-              <a:rPr lang="en-US"/>
+              <a:rPr lang="en-US" smtClean="0"/>
               <a:t>Fifth level</a:t>
             </a:r>
+            <a:endParaRPr lang="en-US"/>
           </a:p>
         </p:txBody>
       </p:sp>
@@ -485,7 +473,7 @@
           <a:p>
             <a:fld id="{5BCAD085-E8A6-8845-BD4E-CB4CCA059FC4}" type="datetimeFigureOut">
               <a:rPr lang="en-US" smtClean="0"/>
-              <a:t>9/22/2026</a:t>
+              <a:t>1/27/13</a:t>
             </a:fld>
             <a:endParaRPr lang="en-US"/>
           </a:p>
@@ -584,9 +572,10 @@
           <a:lstStyle/>
           <a:p>
             <a:r>
-              <a:rPr lang="en-US"/>
+              <a:rPr lang="en-US" smtClean="0"/>
               <a:t>Click to edit Master title style</a:t>
             </a:r>
+            <a:endParaRPr lang="en-US"/>
           </a:p>
         </p:txBody>
       </p:sp>
@@ -612,37 +601,38 @@
           <a:p>
             <a:pPr lvl="0"/>
             <a:r>
-              <a:rPr lang="en-US"/>
+              <a:rPr lang="en-US" smtClean="0"/>
               <a:t>Click to edit Master text styles</a:t>
             </a:r>
           </a:p>
           <a:p>
             <a:pPr lvl="1"/>
             <a:r>
-              <a:rPr lang="en-US"/>
+              <a:rPr lang="en-US" smtClean="0"/>
               <a:t>Second level</a:t>
             </a:r>
           </a:p>
           <a:p>
             <a:pPr lvl="2"/>
             <a:r>
-              <a:rPr lang="en-US"/>
+              <a:rPr lang="en-US" smtClean="0"/>
               <a:t>Third level</a:t>
             </a:r>
           </a:p>
           <a:p>
             <a:pPr lvl="3"/>
             <a:r>
-              <a:rPr lang="en-US"/>
+              <a:rPr lang="en-US" smtClean="0"/>
               <a:t>Fourth level</a:t>
             </a:r>
           </a:p>
           <a:p>
             <a:pPr lvl="4"/>
             <a:r>
-              <a:rPr lang="en-US"/>
+              <a:rPr lang="en-US" smtClean="0"/>
               <a:t>Fifth level</a:t>
             </a:r>
+            <a:endParaRPr lang="en-US"/>
           </a:p>
         </p:txBody>
       </p:sp>
@@ -663,7 +653,7 @@
           <a:p>
             <a:fld id="{5BCAD085-E8A6-8845-BD4E-CB4CCA059FC4}" type="datetimeFigureOut">
               <a:rPr lang="en-US" smtClean="0"/>
-              <a:t>9/22/2026</a:t>
+              <a:t>1/27/13</a:t>
             </a:fld>
             <a:endParaRPr lang="en-US"/>
           </a:p>
@@ -757,9 +747,10 @@
           <a:lstStyle/>
           <a:p>
             <a:r>
-              <a:rPr lang="en-US"/>
+              <a:rPr lang="en-US" smtClean="0"/>
               <a:t>Click to edit Master title style</a:t>
             </a:r>
+            <a:endParaRPr lang="en-US"/>
           </a:p>
         </p:txBody>
       </p:sp>
@@ -780,37 +771,38 @@
           <a:p>
             <a:pPr lvl="0"/>
             <a:r>
-              <a:rPr lang="en-US"/>
+              <a:rPr lang="en-US" smtClean="0"/>
               <a:t>Click to edit Master text styles</a:t>
             </a:r>
           </a:p>
           <a:p>
             <a:pPr lvl="1"/>
             <a:r>
-              <a:rPr lang="en-US"/>
+              <a:rPr lang="en-US" smtClean="0"/>
               <a:t>Second level</a:t>
             </a:r>
           </a:p>
           <a:p>
             <a:pPr lvl="2"/>
             <a:r>
-              <a:rPr lang="en-US"/>
+              <a:rPr lang="en-US" smtClean="0"/>
               <a:t>Third level</a:t>
             </a:r>
           </a:p>
           <a:p>
             <a:pPr lvl="3"/>
             <a:r>
-              <a:rPr lang="en-US"/>
+              <a:rPr lang="en-US" smtClean="0"/>
               <a:t>Fourth level</a:t>
             </a:r>
           </a:p>
           <a:p>
             <a:pPr lvl="4"/>
             <a:r>
-              <a:rPr lang="en-US"/>
+              <a:rPr lang="en-US" smtClean="0"/>
               <a:t>Fifth level</a:t>
             </a:r>
+            <a:endParaRPr lang="en-US"/>
           </a:p>
         </p:txBody>
       </p:sp>
@@ -831,7 +823,7 @@
           <a:p>
             <a:fld id="{5BCAD085-E8A6-8845-BD4E-CB4CCA059FC4}" type="datetimeFigureOut">
               <a:rPr lang="en-US" smtClean="0"/>
-              <a:t>9/22/2026</a:t>
+              <a:t>1/27/13</a:t>
             </a:fld>
             <a:endParaRPr lang="en-US"/>
           </a:p>
@@ -934,9 +926,10 @@
           </a:lstStyle>
           <a:p>
             <a:r>
-              <a:rPr lang="en-US"/>
+              <a:rPr lang="en-US" smtClean="0"/>
               <a:t>Click to edit Master title style</a:t>
             </a:r>
+            <a:endParaRPr lang="en-US"/>
           </a:p>
         </p:txBody>
       </p:sp>
@@ -1053,7 +1046,7 @@
           <a:p>
             <a:pPr lvl="0"/>
             <a:r>
-              <a:rPr lang="en-US"/>
+              <a:rPr lang="en-US" smtClean="0"/>
               <a:t>Click to edit Master text styles</a:t>
             </a:r>
           </a:p>
@@ -1076,7 +1069,7 @@
           <a:p>
             <a:fld id="{5BCAD085-E8A6-8845-BD4E-CB4CCA059FC4}" type="datetimeFigureOut">
               <a:rPr lang="en-US" smtClean="0"/>
-              <a:t>9/22/2026</a:t>
+              <a:t>1/27/13</a:t>
             </a:fld>
             <a:endParaRPr lang="en-US"/>
           </a:p>
@@ -1170,9 +1163,10 @@
           <a:lstStyle/>
           <a:p>
             <a:r>
-              <a:rPr lang="en-US"/>
+              <a:rPr lang="en-US" smtClean="0"/>
               <a:t>Click to edit Master title style</a:t>
             </a:r>
+            <a:endParaRPr lang="en-US"/>
           </a:p>
         </p:txBody>
       </p:sp>
@@ -1226,37 +1220,38 @@
           <a:p>
             <a:pPr lvl="0"/>
             <a:r>
-              <a:rPr lang="en-US"/>
+              <a:rPr lang="en-US" smtClean="0"/>
               <a:t>Click to edit Master text styles</a:t>
             </a:r>
           </a:p>
           <a:p>
             <a:pPr lvl="1"/>
             <a:r>
-              <a:rPr lang="en-US"/>
+              <a:rPr lang="en-US" smtClean="0"/>
               <a:t>Second level</a:t>
             </a:r>
           </a:p>
           <a:p>
             <a:pPr lvl="2"/>
             <a:r>
-              <a:rPr lang="en-US"/>
+              <a:rPr lang="en-US" smtClean="0"/>
               <a:t>Third level</a:t>
             </a:r>
           </a:p>
           <a:p>
             <a:pPr lvl="3"/>
             <a:r>
-              <a:rPr lang="en-US"/>
+              <a:rPr lang="en-US" smtClean="0"/>
               <a:t>Fourth level</a:t>
             </a:r>
           </a:p>
           <a:p>
             <a:pPr lvl="4"/>
             <a:r>
-              <a:rPr lang="en-US"/>
+              <a:rPr lang="en-US" smtClean="0"/>
               <a:t>Fifth level</a:t>
             </a:r>
+            <a:endParaRPr lang="en-US"/>
           </a:p>
         </p:txBody>
       </p:sp>
@@ -1310,37 +1305,38 @@
           <a:p>
             <a:pPr lvl="0"/>
             <a:r>
-              <a:rPr lang="en-US"/>
+              <a:rPr lang="en-US" smtClean="0"/>
               <a:t>Click to edit Master text styles</a:t>
             </a:r>
           </a:p>
           <a:p>
             <a:pPr lvl="1"/>
             <a:r>
-              <a:rPr lang="en-US"/>
+              <a:rPr lang="en-US" smtClean="0"/>
               <a:t>Second level</a:t>
             </a:r>
           </a:p>
           <a:p>
             <a:pPr lvl="2"/>
             <a:r>
-              <a:rPr lang="en-US"/>
+              <a:rPr lang="en-US" smtClean="0"/>
               <a:t>Third level</a:t>
             </a:r>
           </a:p>
           <a:p>
             <a:pPr lvl="3"/>
             <a:r>
-              <a:rPr lang="en-US"/>
+              <a:rPr lang="en-US" smtClean="0"/>
               <a:t>Fourth level</a:t>
             </a:r>
           </a:p>
           <a:p>
             <a:pPr lvl="4"/>
             <a:r>
-              <a:rPr lang="en-US"/>
+              <a:rPr lang="en-US" smtClean="0"/>
               <a:t>Fifth level</a:t>
             </a:r>
+            <a:endParaRPr lang="en-US"/>
           </a:p>
         </p:txBody>
       </p:sp>
@@ -1361,7 +1357,7 @@
           <a:p>
             <a:fld id="{5BCAD085-E8A6-8845-BD4E-CB4CCA059FC4}" type="datetimeFigureOut">
               <a:rPr lang="en-US" smtClean="0"/>
-              <a:t>9/22/2026</a:t>
+              <a:t>1/27/13</a:t>
             </a:fld>
             <a:endParaRPr lang="en-US"/>
           </a:p>
@@ -1459,9 +1455,10 @@
           </a:lstStyle>
           <a:p>
             <a:r>
-              <a:rPr lang="en-US"/>
+              <a:rPr lang="en-US" smtClean="0"/>
               <a:t>Click to edit Master title style</a:t>
             </a:r>
+            <a:endParaRPr lang="en-US"/>
           </a:p>
         </p:txBody>
       </p:sp>
@@ -1524,7 +1521,7 @@
           <a:p>
             <a:pPr lvl="0"/>
             <a:r>
-              <a:rPr lang="en-US"/>
+              <a:rPr lang="en-US" smtClean="0"/>
               <a:t>Click to edit Master text styles</a:t>
             </a:r>
           </a:p>
@@ -1580,37 +1577,38 @@
           <a:p>
             <a:pPr lvl="0"/>
             <a:r>
-              <a:rPr lang="en-US"/>
+              <a:rPr lang="en-US" smtClean="0"/>
               <a:t>Click to edit Master text styles</a:t>
             </a:r>
           </a:p>
           <a:p>
             <a:pPr lvl="1"/>
             <a:r>
-              <a:rPr lang="en-US"/>
+              <a:rPr lang="en-US" smtClean="0"/>
               <a:t>Second level</a:t>
             </a:r>
           </a:p>
           <a:p>
             <a:pPr lvl="2"/>
             <a:r>
-              <a:rPr lang="en-US"/>
+              <a:rPr lang="en-US" smtClean="0"/>
               <a:t>Third level</a:t>
             </a:r>
           </a:p>
           <a:p>
             <a:pPr lvl="3"/>
             <a:r>
-              <a:rPr lang="en-US"/>
+              <a:rPr lang="en-US" smtClean="0"/>
               <a:t>Fourth level</a:t>
             </a:r>
           </a:p>
           <a:p>
             <a:pPr lvl="4"/>
             <a:r>
-              <a:rPr lang="en-US"/>
+              <a:rPr lang="en-US" smtClean="0"/>
               <a:t>Fifth level</a:t>
             </a:r>
+            <a:endParaRPr lang="en-US"/>
           </a:p>
         </p:txBody>
       </p:sp>
@@ -1673,7 +1671,7 @@
           <a:p>
             <a:pPr lvl="0"/>
             <a:r>
-              <a:rPr lang="en-US"/>
+              <a:rPr lang="en-US" smtClean="0"/>
               <a:t>Click to edit Master text styles</a:t>
             </a:r>
           </a:p>
@@ -1729,37 +1727,38 @@
           <a:p>
             <a:pPr lvl="0"/>
             <a:r>
-              <a:rPr lang="en-US"/>
+              <a:rPr lang="en-US" smtClean="0"/>
               <a:t>Click to edit Master text styles</a:t>
             </a:r>
           </a:p>
           <a:p>
             <a:pPr lvl="1"/>
             <a:r>
-              <a:rPr lang="en-US"/>
+              <a:rPr lang="en-US" smtClean="0"/>
               <a:t>Second level</a:t>
             </a:r>
           </a:p>
           <a:p>
             <a:pPr lvl="2"/>
             <a:r>
-              <a:rPr lang="en-US"/>
+              <a:rPr lang="en-US" smtClean="0"/>
               <a:t>Third level</a:t>
             </a:r>
           </a:p>
           <a:p>
             <a:pPr lvl="3"/>
             <a:r>
-              <a:rPr lang="en-US"/>
+              <a:rPr lang="en-US" smtClean="0"/>
               <a:t>Fourth level</a:t>
             </a:r>
           </a:p>
           <a:p>
             <a:pPr lvl="4"/>
             <a:r>
-              <a:rPr lang="en-US"/>
+              <a:rPr lang="en-US" smtClean="0"/>
               <a:t>Fifth level</a:t>
             </a:r>
+            <a:endParaRPr lang="en-US"/>
           </a:p>
         </p:txBody>
       </p:sp>
@@ -1780,7 +1779,7 @@
           <a:p>
             <a:fld id="{5BCAD085-E8A6-8845-BD4E-CB4CCA059FC4}" type="datetimeFigureOut">
               <a:rPr lang="en-US" smtClean="0"/>
-              <a:t>9/22/2026</a:t>
+              <a:t>1/27/13</a:t>
             </a:fld>
             <a:endParaRPr lang="en-US"/>
           </a:p>
@@ -1874,9 +1873,10 @@
           <a:lstStyle/>
           <a:p>
             <a:r>
-              <a:rPr lang="en-US"/>
+              <a:rPr lang="en-US" smtClean="0"/>
               <a:t>Click to edit Master title style</a:t>
             </a:r>
+            <a:endParaRPr lang="en-US"/>
           </a:p>
         </p:txBody>
       </p:sp>
@@ -1897,7 +1897,7 @@
           <a:p>
             <a:fld id="{5BCAD085-E8A6-8845-BD4E-CB4CCA059FC4}" type="datetimeFigureOut">
               <a:rPr lang="en-US" smtClean="0"/>
-              <a:t>9/22/2026</a:t>
+              <a:t>1/27/13</a:t>
             </a:fld>
             <a:endParaRPr lang="en-US"/>
           </a:p>
@@ -1992,7 +1992,7 @@
           <a:p>
             <a:fld id="{5BCAD085-E8A6-8845-BD4E-CB4CCA059FC4}" type="datetimeFigureOut">
               <a:rPr lang="en-US" smtClean="0"/>
-              <a:t>9/22/2026</a:t>
+              <a:t>1/27/13</a:t>
             </a:fld>
             <a:endParaRPr lang="en-US"/>
           </a:p>
@@ -2095,9 +2095,10 @@
           </a:lstStyle>
           <a:p>
             <a:r>
-              <a:rPr lang="en-US"/>
+              <a:rPr lang="en-US" smtClean="0"/>
               <a:t>Click to edit Master title style</a:t>
             </a:r>
+            <a:endParaRPr lang="en-US"/>
           </a:p>
         </p:txBody>
       </p:sp>
@@ -2151,37 +2152,38 @@
           <a:p>
             <a:pPr lvl="0"/>
             <a:r>
-              <a:rPr lang="en-US"/>
+              <a:rPr lang="en-US" smtClean="0"/>
               <a:t>Click to edit Master text styles</a:t>
             </a:r>
           </a:p>
           <a:p>
             <a:pPr lvl="1"/>
             <a:r>
-              <a:rPr lang="en-US"/>
+              <a:rPr lang="en-US" smtClean="0"/>
               <a:t>Second level</a:t>
             </a:r>
           </a:p>
           <a:p>
             <a:pPr lvl="2"/>
             <a:r>
-              <a:rPr lang="en-US"/>
+              <a:rPr lang="en-US" smtClean="0"/>
               <a:t>Third level</a:t>
             </a:r>
           </a:p>
           <a:p>
             <a:pPr lvl="3"/>
             <a:r>
-              <a:rPr lang="en-US"/>
+              <a:rPr lang="en-US" smtClean="0"/>
               <a:t>Fourth level</a:t>
             </a:r>
           </a:p>
           <a:p>
             <a:pPr lvl="4"/>
             <a:r>
-              <a:rPr lang="en-US"/>
+              <a:rPr lang="en-US" smtClean="0"/>
               <a:t>Fifth level</a:t>
             </a:r>
+            <a:endParaRPr lang="en-US"/>
           </a:p>
         </p:txBody>
       </p:sp>
@@ -2244,7 +2246,7 @@
           <a:p>
             <a:pPr lvl="0"/>
             <a:r>
-              <a:rPr lang="en-US"/>
+              <a:rPr lang="en-US" smtClean="0"/>
               <a:t>Click to edit Master text styles</a:t>
             </a:r>
           </a:p>
@@ -2267,7 +2269,7 @@
           <a:p>
             <a:fld id="{5BCAD085-E8A6-8845-BD4E-CB4CCA059FC4}" type="datetimeFigureOut">
               <a:rPr lang="en-US" smtClean="0"/>
-              <a:t>9/22/2026</a:t>
+              <a:t>1/27/13</a:t>
             </a:fld>
             <a:endParaRPr lang="en-US"/>
           </a:p>
@@ -2370,9 +2372,10 @@
           </a:lstStyle>
           <a:p>
             <a:r>
-              <a:rPr lang="en-US"/>
+              <a:rPr lang="en-US" smtClean="0"/>
               <a:t>Click to edit Master title style</a:t>
             </a:r>
+            <a:endParaRPr lang="en-US"/>
           </a:p>
         </p:txBody>
       </p:sp>
@@ -2496,7 +2499,7 @@
           <a:p>
             <a:pPr lvl="0"/>
             <a:r>
-              <a:rPr lang="en-US"/>
+              <a:rPr lang="en-US" smtClean="0"/>
               <a:t>Click to edit Master text styles</a:t>
             </a:r>
           </a:p>
@@ -2519,7 +2522,7 @@
           <a:p>
             <a:fld id="{5BCAD085-E8A6-8845-BD4E-CB4CCA059FC4}" type="datetimeFigureOut">
               <a:rPr lang="en-US" smtClean="0"/>
-              <a:t>9/22/2026</a:t>
+              <a:t>1/27/13</a:t>
             </a:fld>
             <a:endParaRPr lang="en-US"/>
           </a:p>
@@ -2628,9 +2631,10 @@
           <a:lstStyle/>
           <a:p>
             <a:r>
-              <a:rPr lang="en-US"/>
+              <a:rPr lang="en-US" smtClean="0"/>
               <a:t>Click to edit Master title style</a:t>
             </a:r>
+            <a:endParaRPr lang="en-US"/>
           </a:p>
         </p:txBody>
       </p:sp>
@@ -2661,37 +2665,38 @@
           <a:p>
             <a:pPr lvl="0"/>
             <a:r>
-              <a:rPr lang="en-US"/>
+              <a:rPr lang="en-US" smtClean="0"/>
               <a:t>Click to edit Master text styles</a:t>
             </a:r>
           </a:p>
           <a:p>
             <a:pPr lvl="1"/>
             <a:r>
-              <a:rPr lang="en-US"/>
+              <a:rPr lang="en-US" smtClean="0"/>
               <a:t>Second level</a:t>
             </a:r>
           </a:p>
           <a:p>
             <a:pPr lvl="2"/>
             <a:r>
-              <a:rPr lang="en-US"/>
+              <a:rPr lang="en-US" smtClean="0"/>
               <a:t>Third level</a:t>
             </a:r>
           </a:p>
           <a:p>
             <a:pPr lvl="3"/>
             <a:r>
-              <a:rPr lang="en-US"/>
+              <a:rPr lang="en-US" smtClean="0"/>
               <a:t>Fourth level</a:t>
             </a:r>
           </a:p>
           <a:p>
             <a:pPr lvl="4"/>
             <a:r>
-              <a:rPr lang="en-US"/>
+              <a:rPr lang="en-US" smtClean="0"/>
               <a:t>Fifth level</a:t>
             </a:r>
+            <a:endParaRPr lang="en-US"/>
           </a:p>
         </p:txBody>
       </p:sp>
@@ -2730,7 +2735,7 @@
           <a:p>
             <a:fld id="{5BCAD085-E8A6-8845-BD4E-CB4CCA059FC4}" type="datetimeFigureOut">
               <a:rPr lang="en-US" smtClean="0"/>
-              <a:t>9/22/2026</a:t>
+              <a:t>1/27/13</a:t>
             </a:fld>
             <a:endParaRPr lang="en-US"/>
           </a:p>
@@ -3089,7 +3094,7 @@
 </file>
 
 <file path=ppt/slides/slide1.xml><?xml version="1.0" encoding="utf-8"?>
-<p:sld xmlns:a="http://schemas.openxmlformats.org/drawingml/2006/main" xmlns:r="http://schemas.openxmlformats.org/officeDocument/2006/relationships" xmlns:p="http://schemas.openxmlformats.org/presentationml/2006/main">
+<p:sld xmlns:a="http://schemas.openxmlformats.org/drawingml/2006/main" xmlns:p="http://schemas.openxmlformats.org/presentationml/2006/main" xmlns:r="http://schemas.openxmlformats.org/officeDocument/2006/relationships">
   <p:cSld>
     <p:bg>
       <p:bgPr>
@@ -3105,14 +3110,7 @@
         <p:cNvGrpSpPr/>
         <p:nvPr/>
       </p:nvGrpSpPr>
-      <p:grpSpPr>
-        <a:xfrm>
-          <a:off x="0" y="0"/>
-          <a:ext cx="0" cy="0"/>
-          <a:chOff x="0" y="0"/>
-          <a:chExt cx="0" cy="0"/>
-        </a:xfrm>
-      </p:grpSpPr>
+      <p:grpSpPr/>
       <p:cxnSp>
         <p:nvCxnSpPr>
           <p:cNvPr id="2" name="Connector 1"/>
@@ -3190,7 +3188,6 @@
           <a:lstStyle/>
           <a:p>
             <a:pPr algn="ctr"/>
-            <a:endParaRPr/>
           </a:p>
         </p:txBody>
       </p:sp>
@@ -3211,7 +3208,7 @@
           <a:noFill/>
         </p:spPr>
         <p:txBody>
-          <a:bodyPr wrap="square" lIns="0" tIns="0" rIns="0" bIns="0" anchor="t">
+          <a:bodyPr wrap="square" anchor="t" lIns="0" rIns="0" tIns="0" bIns="0">
             <a:spAutoFit/>
           </a:bodyPr>
           <a:lstStyle/>
@@ -3247,7 +3244,7 @@
           <a:noFill/>
         </p:spPr>
         <p:txBody>
-          <a:bodyPr wrap="square" lIns="0" tIns="0" rIns="0" bIns="0" anchor="t">
+          <a:bodyPr wrap="square" anchor="t" lIns="0" rIns="0" tIns="0" bIns="0">
             <a:spAutoFit/>
           </a:bodyPr>
           <a:lstStyle/>
@@ -3309,7 +3306,6 @@
           <a:lstStyle/>
           <a:p>
             <a:pPr algn="ctr"/>
-            <a:endParaRPr/>
           </a:p>
         </p:txBody>
       </p:sp>
@@ -3358,7 +3354,6 @@
           <a:lstStyle/>
           <a:p>
             <a:pPr algn="ctr"/>
-            <a:endParaRPr/>
           </a:p>
         </p:txBody>
       </p:sp>
@@ -3379,7 +3374,7 @@
           <a:noFill/>
         </p:spPr>
         <p:txBody>
-          <a:bodyPr wrap="square" lIns="0" tIns="0" rIns="0" bIns="0" anchor="t">
+          <a:bodyPr wrap="square" anchor="t" lIns="0" rIns="0" tIns="0" bIns="0">
             <a:spAutoFit/>
           </a:bodyPr>
           <a:lstStyle/>
@@ -3415,7 +3410,7 @@
           <a:noFill/>
         </p:spPr>
         <p:txBody>
-          <a:bodyPr wrap="square" lIns="0" tIns="0" rIns="0" bIns="0" anchor="t">
+          <a:bodyPr wrap="square" anchor="t" lIns="0" rIns="0" tIns="0" bIns="0">
             <a:spAutoFit/>
           </a:bodyPr>
           <a:lstStyle/>
@@ -3451,7 +3446,7 @@
           <a:noFill/>
         </p:spPr>
         <p:txBody>
-          <a:bodyPr wrap="square" lIns="0" tIns="0" rIns="0" bIns="0" anchor="t">
+          <a:bodyPr wrap="square" anchor="t" lIns="0" rIns="0" tIns="0" bIns="0">
             <a:spAutoFit/>
           </a:bodyPr>
           <a:lstStyle/>
@@ -3513,7 +3508,6 @@
           <a:lstStyle/>
           <a:p>
             <a:pPr algn="ctr"/>
-            <a:endParaRPr/>
           </a:p>
         </p:txBody>
       </p:sp>
@@ -3556,7 +3550,7 @@
           </a:fontRef>
         </p:style>
         <p:txBody>
-          <a:bodyPr wrap="none" lIns="45720" tIns="0" rIns="45720" bIns="0" rtlCol="0" anchor="ctr"/>
+          <a:bodyPr rtlCol="0" anchor="ctr" wrap="none" lIns="45720" rIns="45720" tIns="0" bIns="0"/>
           <a:lstStyle/>
           <a:p>
             <a:pPr algn="ctr"/>
@@ -3590,7 +3584,7 @@
           <a:noFill/>
         </p:spPr>
         <p:txBody>
-          <a:bodyPr wrap="square" lIns="0" tIns="0" rIns="0" bIns="0" anchor="t">
+          <a:bodyPr wrap="square" anchor="t" lIns="0" rIns="0" tIns="0" bIns="0">
             <a:spAutoFit/>
           </a:bodyPr>
           <a:lstStyle/>
@@ -3636,7 +3630,7 @@
           <a:noFill/>
         </p:spPr>
         <p:txBody>
-          <a:bodyPr wrap="square" lIns="0" tIns="0" rIns="0" bIns="0" anchor="t">
+          <a:bodyPr wrap="square" anchor="t" lIns="0" rIns="0" tIns="0" bIns="0">
             <a:spAutoFit/>
           </a:bodyPr>
           <a:lstStyle/>
@@ -3708,7 +3702,7 @@
           <a:noFill/>
         </p:spPr>
         <p:txBody>
-          <a:bodyPr wrap="square" lIns="0" tIns="0" rIns="0" bIns="0" anchor="t">
+          <a:bodyPr wrap="square" anchor="t" lIns="0" rIns="0" tIns="0" bIns="0">
             <a:spAutoFit/>
           </a:bodyPr>
           <a:lstStyle/>
@@ -3763,7 +3757,7 @@
 </file>
 
 <file path=ppt/slides/slide10.xml><?xml version="1.0" encoding="utf-8"?>
-<p:sld xmlns:a="http://schemas.openxmlformats.org/drawingml/2006/main" xmlns:r="http://schemas.openxmlformats.org/officeDocument/2006/relationships" xmlns:p="http://schemas.openxmlformats.org/presentationml/2006/main">
+<p:sld xmlns:a="http://schemas.openxmlformats.org/drawingml/2006/main" xmlns:p="http://schemas.openxmlformats.org/presentationml/2006/main" xmlns:r="http://schemas.openxmlformats.org/officeDocument/2006/relationships">
   <p:cSld>
     <p:bg>
       <p:bgPr>
@@ -3779,14 +3773,7 @@
         <p:cNvGrpSpPr/>
         <p:nvPr/>
       </p:nvGrpSpPr>
-      <p:grpSpPr>
-        <a:xfrm>
-          <a:off x="0" y="0"/>
-          <a:ext cx="0" cy="0"/>
-          <a:chOff x="0" y="0"/>
-          <a:chExt cx="0" cy="0"/>
-        </a:xfrm>
-      </p:grpSpPr>
+      <p:grpSpPr/>
       <p:sp>
         <p:nvSpPr>
           <p:cNvPr id="2" name="Rounded Rectangle 1"/>
@@ -3826,7 +3813,7 @@
           </a:fontRef>
         </p:style>
         <p:txBody>
-          <a:bodyPr wrap="none" lIns="45720" tIns="0" rIns="45720" bIns="0" rtlCol="0" anchor="ctr"/>
+          <a:bodyPr rtlCol="0" anchor="ctr" wrap="none" lIns="45720" rIns="45720" tIns="0" bIns="0"/>
           <a:lstStyle/>
           <a:p>
             <a:pPr algn="ctr"/>
@@ -3860,7 +3847,7 @@
           <a:noFill/>
         </p:spPr>
         <p:txBody>
-          <a:bodyPr wrap="square" lIns="0" tIns="0" rIns="0" bIns="0" anchor="ctr">
+          <a:bodyPr wrap="square" anchor="ctr" lIns="0" rIns="0" tIns="0" bIns="0">
             <a:spAutoFit/>
           </a:bodyPr>
           <a:lstStyle/>
@@ -3932,7 +3919,7 @@
           <a:noFill/>
         </p:spPr>
         <p:txBody>
-          <a:bodyPr wrap="square" lIns="0" tIns="0" rIns="0" bIns="0" anchor="t">
+          <a:bodyPr wrap="square" anchor="t" lIns="0" rIns="0" tIns="0" bIns="0">
             <a:spAutoFit/>
           </a:bodyPr>
           <a:lstStyle/>
@@ -3994,7 +3981,6 @@
           <a:lstStyle/>
           <a:p>
             <a:pPr algn="ctr"/>
-            <a:endParaRPr/>
           </a:p>
         </p:txBody>
       </p:sp>
@@ -4043,7 +4029,6 @@
           <a:lstStyle/>
           <a:p>
             <a:pPr algn="ctr"/>
-            <a:endParaRPr/>
           </a:p>
         </p:txBody>
       </p:sp>
@@ -4064,7 +4049,7 @@
           <a:noFill/>
         </p:spPr>
         <p:txBody>
-          <a:bodyPr wrap="square" lIns="0" tIns="0" rIns="0" bIns="0" anchor="t">
+          <a:bodyPr wrap="square" anchor="t" lIns="0" rIns="0" tIns="0" bIns="0">
             <a:spAutoFit/>
           </a:bodyPr>
           <a:lstStyle/>
@@ -4110,7 +4095,7 @@
           <a:noFill/>
         </p:spPr>
         <p:txBody>
-          <a:bodyPr wrap="square" lIns="0" tIns="0" rIns="0" bIns="0" anchor="t">
+          <a:bodyPr wrap="square" anchor="t" lIns="0" rIns="0" tIns="0" bIns="0">
             <a:spAutoFit/>
           </a:bodyPr>
           <a:lstStyle/>
@@ -4176,7 +4161,6 @@
           <a:lstStyle/>
           <a:p>
             <a:pPr algn="ctr"/>
-            <a:endParaRPr/>
           </a:p>
         </p:txBody>
       </p:sp>
@@ -4225,7 +4209,6 @@
           <a:lstStyle/>
           <a:p>
             <a:pPr algn="ctr"/>
-            <a:endParaRPr/>
           </a:p>
         </p:txBody>
       </p:sp>
@@ -4246,7 +4229,7 @@
           <a:noFill/>
         </p:spPr>
         <p:txBody>
-          <a:bodyPr wrap="square" lIns="0" tIns="0" rIns="0" bIns="0" anchor="t">
+          <a:bodyPr wrap="square" anchor="t" lIns="0" rIns="0" tIns="0" bIns="0">
             <a:spAutoFit/>
           </a:bodyPr>
           <a:lstStyle/>
@@ -4292,7 +4275,7 @@
           <a:noFill/>
         </p:spPr>
         <p:txBody>
-          <a:bodyPr wrap="square" lIns="0" tIns="0" rIns="0" bIns="0" anchor="t">
+          <a:bodyPr wrap="square" anchor="t" lIns="0" rIns="0" tIns="0" bIns="0">
             <a:spAutoFit/>
           </a:bodyPr>
           <a:lstStyle/>
@@ -4358,7 +4341,6 @@
           <a:lstStyle/>
           <a:p>
             <a:pPr algn="ctr"/>
-            <a:endParaRPr/>
           </a:p>
         </p:txBody>
       </p:sp>
@@ -4407,7 +4389,6 @@
           <a:lstStyle/>
           <a:p>
             <a:pPr algn="ctr"/>
-            <a:endParaRPr/>
           </a:p>
         </p:txBody>
       </p:sp>
@@ -4428,7 +4409,7 @@
           <a:noFill/>
         </p:spPr>
         <p:txBody>
-          <a:bodyPr wrap="square" lIns="0" tIns="0" rIns="0" bIns="0" anchor="t">
+          <a:bodyPr wrap="square" anchor="t" lIns="0" rIns="0" tIns="0" bIns="0">
             <a:spAutoFit/>
           </a:bodyPr>
           <a:lstStyle/>
@@ -4474,7 +4455,7 @@
           <a:noFill/>
         </p:spPr>
         <p:txBody>
-          <a:bodyPr wrap="square" lIns="0" tIns="0" rIns="0" bIns="0" anchor="t">
+          <a:bodyPr wrap="square" anchor="t" lIns="0" rIns="0" tIns="0" bIns="0">
             <a:spAutoFit/>
           </a:bodyPr>
           <a:lstStyle/>
@@ -4540,7 +4521,6 @@
           <a:lstStyle/>
           <a:p>
             <a:pPr algn="ctr"/>
-            <a:endParaRPr/>
           </a:p>
         </p:txBody>
       </p:sp>
@@ -4589,7 +4569,6 @@
           <a:lstStyle/>
           <a:p>
             <a:pPr algn="ctr"/>
-            <a:endParaRPr/>
           </a:p>
         </p:txBody>
       </p:sp>
@@ -4610,7 +4589,7 @@
           <a:noFill/>
         </p:spPr>
         <p:txBody>
-          <a:bodyPr wrap="square" lIns="0" tIns="0" rIns="0" bIns="0" anchor="t">
+          <a:bodyPr wrap="square" anchor="t" lIns="0" rIns="0" tIns="0" bIns="0">
             <a:spAutoFit/>
           </a:bodyPr>
           <a:lstStyle/>
@@ -4656,7 +4635,7 @@
           <a:noFill/>
         </p:spPr>
         <p:txBody>
-          <a:bodyPr wrap="square" lIns="0" tIns="0" rIns="0" bIns="0" anchor="t">
+          <a:bodyPr wrap="square" anchor="t" lIns="0" rIns="0" tIns="0" bIns="0">
             <a:spAutoFit/>
           </a:bodyPr>
           <a:lstStyle/>
@@ -4722,7 +4701,6 @@
           <a:lstStyle/>
           <a:p>
             <a:pPr algn="ctr"/>
-            <a:endParaRPr/>
           </a:p>
         </p:txBody>
       </p:sp>
@@ -4771,7 +4749,6 @@
           <a:lstStyle/>
           <a:p>
             <a:pPr algn="ctr"/>
-            <a:endParaRPr/>
           </a:p>
         </p:txBody>
       </p:sp>
@@ -4792,7 +4769,7 @@
           <a:noFill/>
         </p:spPr>
         <p:txBody>
-          <a:bodyPr wrap="square" lIns="0" tIns="0" rIns="0" bIns="0" anchor="t">
+          <a:bodyPr wrap="square" anchor="t" lIns="0" rIns="0" tIns="0" bIns="0">
             <a:spAutoFit/>
           </a:bodyPr>
           <a:lstStyle/>
@@ -4838,7 +4815,7 @@
           <a:noFill/>
         </p:spPr>
         <p:txBody>
-          <a:bodyPr wrap="square" lIns="0" tIns="0" rIns="0" bIns="0" anchor="t">
+          <a:bodyPr wrap="square" anchor="t" lIns="0" rIns="0" tIns="0" bIns="0">
             <a:spAutoFit/>
           </a:bodyPr>
           <a:lstStyle/>
@@ -4904,7 +4881,6 @@
           <a:lstStyle/>
           <a:p>
             <a:pPr algn="ctr"/>
-            <a:endParaRPr/>
           </a:p>
         </p:txBody>
       </p:sp>
@@ -4953,7 +4929,6 @@
           <a:lstStyle/>
           <a:p>
             <a:pPr algn="ctr"/>
-            <a:endParaRPr/>
           </a:p>
         </p:txBody>
       </p:sp>
@@ -4974,7 +4949,7 @@
           <a:noFill/>
         </p:spPr>
         <p:txBody>
-          <a:bodyPr wrap="square" lIns="0" tIns="0" rIns="0" bIns="0" anchor="t">
+          <a:bodyPr wrap="square" anchor="t" lIns="0" rIns="0" tIns="0" bIns="0">
             <a:spAutoFit/>
           </a:bodyPr>
           <a:lstStyle/>
@@ -5020,7 +4995,7 @@
           <a:noFill/>
         </p:spPr>
         <p:txBody>
-          <a:bodyPr wrap="square" lIns="0" tIns="0" rIns="0" bIns="0" anchor="t">
+          <a:bodyPr wrap="square" anchor="t" lIns="0" rIns="0" tIns="0" bIns="0">
             <a:spAutoFit/>
           </a:bodyPr>
           <a:lstStyle/>
@@ -5086,7 +5061,6 @@
           <a:lstStyle/>
           <a:p>
             <a:pPr algn="ctr"/>
-            <a:endParaRPr/>
           </a:p>
         </p:txBody>
       </p:sp>
@@ -5133,7 +5107,6 @@
           <a:lstStyle/>
           <a:p>
             <a:pPr algn="ctr"/>
-            <a:endParaRPr/>
           </a:p>
         </p:txBody>
       </p:sp>
@@ -5154,7 +5127,7 @@
           <a:noFill/>
         </p:spPr>
         <p:txBody>
-          <a:bodyPr wrap="square" lIns="0" tIns="0" rIns="0" bIns="0" anchor="ctr">
+          <a:bodyPr wrap="square" anchor="ctr" lIns="0" rIns="0" tIns="0" bIns="0">
             <a:spAutoFit/>
           </a:bodyPr>
           <a:lstStyle/>
@@ -5196,7 +5169,7 @@
 </file>
 
 <file path=ppt/slides/slide11.xml><?xml version="1.0" encoding="utf-8"?>
-<p:sld xmlns:a="http://schemas.openxmlformats.org/drawingml/2006/main" xmlns:r="http://schemas.openxmlformats.org/officeDocument/2006/relationships" xmlns:p="http://schemas.openxmlformats.org/presentationml/2006/main">
+<p:sld xmlns:a="http://schemas.openxmlformats.org/drawingml/2006/main" xmlns:p="http://schemas.openxmlformats.org/presentationml/2006/main" xmlns:r="http://schemas.openxmlformats.org/officeDocument/2006/relationships">
   <p:cSld>
     <p:bg>
       <p:bgPr>
@@ -5212,14 +5185,7 @@
         <p:cNvGrpSpPr/>
         <p:nvPr/>
       </p:nvGrpSpPr>
-      <p:grpSpPr>
-        <a:xfrm>
-          <a:off x="0" y="0"/>
-          <a:ext cx="0" cy="0"/>
-          <a:chOff x="0" y="0"/>
-          <a:chExt cx="0" cy="0"/>
-        </a:xfrm>
-      </p:grpSpPr>
+      <p:grpSpPr/>
       <p:sp>
         <p:nvSpPr>
           <p:cNvPr id="2" name="Rounded Rectangle 1"/>
@@ -5259,7 +5225,7 @@
           </a:fontRef>
         </p:style>
         <p:txBody>
-          <a:bodyPr wrap="none" lIns="45720" tIns="0" rIns="45720" bIns="0" rtlCol="0" anchor="ctr"/>
+          <a:bodyPr rtlCol="0" anchor="ctr" wrap="none" lIns="45720" rIns="45720" tIns="0" bIns="0"/>
           <a:lstStyle/>
           <a:p>
             <a:pPr algn="ctr"/>
@@ -5293,7 +5259,7 @@
           <a:noFill/>
         </p:spPr>
         <p:txBody>
-          <a:bodyPr wrap="square" lIns="0" tIns="0" rIns="0" bIns="0" anchor="ctr">
+          <a:bodyPr wrap="square" anchor="ctr" lIns="0" rIns="0" tIns="0" bIns="0">
             <a:spAutoFit/>
           </a:bodyPr>
           <a:lstStyle/>
@@ -5365,7 +5331,7 @@
           <a:noFill/>
         </p:spPr>
         <p:txBody>
-          <a:bodyPr wrap="square" lIns="0" tIns="0" rIns="0" bIns="0" anchor="t">
+          <a:bodyPr wrap="square" anchor="t" lIns="0" rIns="0" tIns="0" bIns="0">
             <a:spAutoFit/>
           </a:bodyPr>
           <a:lstStyle/>
@@ -5427,7 +5393,6 @@
           <a:lstStyle/>
           <a:p>
             <a:pPr algn="ctr"/>
-            <a:endParaRPr/>
           </a:p>
         </p:txBody>
       </p:sp>
@@ -5476,7 +5441,6 @@
           <a:lstStyle/>
           <a:p>
             <a:pPr algn="ctr"/>
-            <a:endParaRPr/>
           </a:p>
         </p:txBody>
       </p:sp>
@@ -5497,7 +5461,7 @@
           <a:noFill/>
         </p:spPr>
         <p:txBody>
-          <a:bodyPr wrap="square" lIns="0" tIns="0" rIns="0" bIns="0" anchor="t">
+          <a:bodyPr wrap="square" anchor="t" lIns="0" rIns="0" tIns="0" bIns="0">
             <a:spAutoFit/>
           </a:bodyPr>
           <a:lstStyle/>
@@ -5533,7 +5497,7 @@
           <a:noFill/>
         </p:spPr>
         <p:txBody>
-          <a:bodyPr wrap="square" lIns="0" tIns="0" rIns="0" bIns="0" anchor="t">
+          <a:bodyPr wrap="square" anchor="t" lIns="0" rIns="0" tIns="0" bIns="0">
             <a:spAutoFit/>
           </a:bodyPr>
           <a:lstStyle/>
@@ -5569,7 +5533,7 @@
           <a:noFill/>
         </p:spPr>
         <p:txBody>
-          <a:bodyPr wrap="square" lIns="0" tIns="0" rIns="0" bIns="0" anchor="t">
+          <a:bodyPr wrap="square" anchor="t" lIns="0" rIns="0" tIns="0" bIns="0">
             <a:spAutoFit/>
           </a:bodyPr>
           <a:lstStyle/>
@@ -5635,7 +5599,6 @@
           <a:lstStyle/>
           <a:p>
             <a:pPr algn="ctr"/>
-            <a:endParaRPr/>
           </a:p>
         </p:txBody>
       </p:sp>
@@ -5684,7 +5647,6 @@
           <a:lstStyle/>
           <a:p>
             <a:pPr algn="ctr"/>
-            <a:endParaRPr/>
           </a:p>
         </p:txBody>
       </p:sp>
@@ -5705,7 +5667,7 @@
           <a:noFill/>
         </p:spPr>
         <p:txBody>
-          <a:bodyPr wrap="square" lIns="0" tIns="0" rIns="0" bIns="0" anchor="t">
+          <a:bodyPr wrap="square" anchor="t" lIns="0" rIns="0" tIns="0" bIns="0">
             <a:spAutoFit/>
           </a:bodyPr>
           <a:lstStyle/>
@@ -5741,7 +5703,7 @@
           <a:noFill/>
         </p:spPr>
         <p:txBody>
-          <a:bodyPr wrap="square" lIns="0" tIns="0" rIns="0" bIns="0" anchor="t">
+          <a:bodyPr wrap="square" anchor="t" lIns="0" rIns="0" tIns="0" bIns="0">
             <a:spAutoFit/>
           </a:bodyPr>
           <a:lstStyle/>
@@ -5777,7 +5739,7 @@
           <a:noFill/>
         </p:spPr>
         <p:txBody>
-          <a:bodyPr wrap="square" lIns="0" tIns="0" rIns="0" bIns="0" anchor="t">
+          <a:bodyPr wrap="square" anchor="t" lIns="0" rIns="0" tIns="0" bIns="0">
             <a:spAutoFit/>
           </a:bodyPr>
           <a:lstStyle/>
@@ -5843,7 +5805,6 @@
           <a:lstStyle/>
           <a:p>
             <a:pPr algn="ctr"/>
-            <a:endParaRPr/>
           </a:p>
         </p:txBody>
       </p:sp>
@@ -5892,7 +5853,6 @@
           <a:lstStyle/>
           <a:p>
             <a:pPr algn="ctr"/>
-            <a:endParaRPr/>
           </a:p>
         </p:txBody>
       </p:sp>
@@ -5913,7 +5873,7 @@
           <a:noFill/>
         </p:spPr>
         <p:txBody>
-          <a:bodyPr wrap="square" lIns="0" tIns="0" rIns="0" bIns="0" anchor="t">
+          <a:bodyPr wrap="square" anchor="t" lIns="0" rIns="0" tIns="0" bIns="0">
             <a:spAutoFit/>
           </a:bodyPr>
           <a:lstStyle/>
@@ -5949,7 +5909,7 @@
           <a:noFill/>
         </p:spPr>
         <p:txBody>
-          <a:bodyPr wrap="square" lIns="0" tIns="0" rIns="0" bIns="0" anchor="t">
+          <a:bodyPr wrap="square" anchor="t" lIns="0" rIns="0" tIns="0" bIns="0">
             <a:spAutoFit/>
           </a:bodyPr>
           <a:lstStyle/>
@@ -5985,7 +5945,7 @@
           <a:noFill/>
         </p:spPr>
         <p:txBody>
-          <a:bodyPr wrap="square" lIns="0" tIns="0" rIns="0" bIns="0" anchor="t">
+          <a:bodyPr wrap="square" anchor="t" lIns="0" rIns="0" tIns="0" bIns="0">
             <a:spAutoFit/>
           </a:bodyPr>
           <a:lstStyle/>
@@ -6051,7 +6011,6 @@
           <a:lstStyle/>
           <a:p>
             <a:pPr algn="ctr"/>
-            <a:endParaRPr/>
           </a:p>
         </p:txBody>
       </p:sp>
@@ -6100,7 +6059,6 @@
           <a:lstStyle/>
           <a:p>
             <a:pPr algn="ctr"/>
-            <a:endParaRPr/>
           </a:p>
         </p:txBody>
       </p:sp>
@@ -6121,7 +6079,7 @@
           <a:noFill/>
         </p:spPr>
         <p:txBody>
-          <a:bodyPr wrap="square" lIns="0" tIns="0" rIns="0" bIns="0" anchor="t">
+          <a:bodyPr wrap="square" anchor="t" lIns="0" rIns="0" tIns="0" bIns="0">
             <a:spAutoFit/>
           </a:bodyPr>
           <a:lstStyle/>
@@ -6157,7 +6115,7 @@
           <a:noFill/>
         </p:spPr>
         <p:txBody>
-          <a:bodyPr wrap="square" lIns="0" tIns="0" rIns="0" bIns="0" anchor="t">
+          <a:bodyPr wrap="square" anchor="t" lIns="0" rIns="0" tIns="0" bIns="0">
             <a:spAutoFit/>
           </a:bodyPr>
           <a:lstStyle/>
@@ -6193,7 +6151,7 @@
           <a:noFill/>
         </p:spPr>
         <p:txBody>
-          <a:bodyPr wrap="square" lIns="0" tIns="0" rIns="0" bIns="0" anchor="t">
+          <a:bodyPr wrap="square" anchor="t" lIns="0" rIns="0" tIns="0" bIns="0">
             <a:spAutoFit/>
           </a:bodyPr>
           <a:lstStyle/>
@@ -6259,7 +6217,6 @@
           <a:lstStyle/>
           <a:p>
             <a:pPr algn="ctr"/>
-            <a:endParaRPr/>
           </a:p>
         </p:txBody>
       </p:sp>
@@ -6308,7 +6265,6 @@
           <a:lstStyle/>
           <a:p>
             <a:pPr algn="ctr"/>
-            <a:endParaRPr/>
           </a:p>
         </p:txBody>
       </p:sp>
@@ -6329,7 +6285,7 @@
           <a:noFill/>
         </p:spPr>
         <p:txBody>
-          <a:bodyPr wrap="square" lIns="0" tIns="0" rIns="0" bIns="0" anchor="t">
+          <a:bodyPr wrap="square" anchor="t" lIns="0" rIns="0" tIns="0" bIns="0">
             <a:spAutoFit/>
           </a:bodyPr>
           <a:lstStyle/>
@@ -6365,7 +6321,7 @@
           <a:noFill/>
         </p:spPr>
         <p:txBody>
-          <a:bodyPr wrap="square" lIns="0" tIns="0" rIns="0" bIns="0" anchor="t">
+          <a:bodyPr wrap="square" anchor="t" lIns="0" rIns="0" tIns="0" bIns="0">
             <a:spAutoFit/>
           </a:bodyPr>
           <a:lstStyle/>
@@ -6483,7 +6439,6 @@
           <a:lstStyle/>
           <a:p>
             <a:pPr algn="ctr"/>
-            <a:endParaRPr/>
           </a:p>
         </p:txBody>
       </p:sp>
@@ -6504,7 +6459,7 @@
           <a:noFill/>
         </p:spPr>
         <p:txBody>
-          <a:bodyPr wrap="square" lIns="0" tIns="0" rIns="0" bIns="0" anchor="t">
+          <a:bodyPr wrap="square" anchor="t" lIns="0" rIns="0" tIns="0" bIns="0">
             <a:spAutoFit/>
           </a:bodyPr>
           <a:lstStyle/>
@@ -6540,7 +6495,7 @@
           <a:noFill/>
         </p:spPr>
         <p:txBody>
-          <a:bodyPr wrap="square" lIns="0" tIns="0" rIns="0" bIns="0" anchor="t">
+          <a:bodyPr wrap="square" anchor="t" lIns="0" rIns="0" tIns="0" bIns="0">
             <a:spAutoFit/>
           </a:bodyPr>
           <a:lstStyle/>
@@ -6612,7 +6567,7 @@
 </file>
 
 <file path=ppt/slides/slide12.xml><?xml version="1.0" encoding="utf-8"?>
-<p:sld xmlns:a="http://schemas.openxmlformats.org/drawingml/2006/main" xmlns:r="http://schemas.openxmlformats.org/officeDocument/2006/relationships" xmlns:p="http://schemas.openxmlformats.org/presentationml/2006/main">
+<p:sld xmlns:a="http://schemas.openxmlformats.org/drawingml/2006/main" xmlns:p="http://schemas.openxmlformats.org/presentationml/2006/main" xmlns:r="http://schemas.openxmlformats.org/officeDocument/2006/relationships">
   <p:cSld>
     <p:bg>
       <p:bgPr>
@@ -6628,14 +6583,7 @@
         <p:cNvGrpSpPr/>
         <p:nvPr/>
       </p:nvGrpSpPr>
-      <p:grpSpPr>
-        <a:xfrm>
-          <a:off x="0" y="0"/>
-          <a:ext cx="0" cy="0"/>
-          <a:chOff x="0" y="0"/>
-          <a:chExt cx="0" cy="0"/>
-        </a:xfrm>
-      </p:grpSpPr>
+      <p:grpSpPr/>
       <p:sp>
         <p:nvSpPr>
           <p:cNvPr id="2" name="Rounded Rectangle 1"/>
@@ -6675,7 +6623,7 @@
           </a:fontRef>
         </p:style>
         <p:txBody>
-          <a:bodyPr wrap="none" lIns="45720" tIns="0" rIns="45720" bIns="0" rtlCol="0" anchor="ctr"/>
+          <a:bodyPr rtlCol="0" anchor="ctr" wrap="none" lIns="45720" rIns="45720" tIns="0" bIns="0"/>
           <a:lstStyle/>
           <a:p>
             <a:pPr algn="ctr"/>
@@ -6709,7 +6657,7 @@
           <a:noFill/>
         </p:spPr>
         <p:txBody>
-          <a:bodyPr wrap="square" lIns="0" tIns="0" rIns="0" bIns="0" anchor="ctr">
+          <a:bodyPr wrap="square" anchor="ctr" lIns="0" rIns="0" tIns="0" bIns="0">
             <a:spAutoFit/>
           </a:bodyPr>
           <a:lstStyle/>
@@ -6781,7 +6729,7 @@
           <a:noFill/>
         </p:spPr>
         <p:txBody>
-          <a:bodyPr wrap="square" lIns="0" tIns="0" rIns="0" bIns="0" anchor="t">
+          <a:bodyPr wrap="square" anchor="t" lIns="0" rIns="0" tIns="0" bIns="0">
             <a:spAutoFit/>
           </a:bodyPr>
           <a:lstStyle/>
@@ -6809,7 +6757,7 @@
         <p:spPr>
           <a:xfrm>
             <a:off x="548640" y="1042415"/>
-            <a:ext cx="11091672" cy="207749"/>
+            <a:ext cx="11091672" cy="347472"/>
           </a:xfrm>
           <a:prstGeom prst="rect">
             <a:avLst/>
@@ -6817,14 +6765,14 @@
           <a:noFill/>
         </p:spPr>
         <p:txBody>
-          <a:bodyPr wrap="square" lIns="0" tIns="0" rIns="0" bIns="0" anchor="t">
+          <a:bodyPr wrap="square" anchor="t" lIns="0" rIns="0" tIns="0" bIns="0">
             <a:spAutoFit/>
           </a:bodyPr>
           <a:lstStyle/>
           <a:p>
             <a:pPr algn="l"/>
             <a:r>
-              <a:rPr sz="1350" b="1" dirty="0" err="1">
+              <a:rPr sz="1350" b="1">
                 <a:solidFill>
                   <a:srgbClr val="0C1614"/>
                 </a:solidFill>
@@ -6832,16 +6780,6 @@
                 <a:ea typeface="STZhongsong"/>
               </a:rPr>
               <a:t>已实现的系统界面</a:t>
-            </a:r>
-            <a:r>
-              <a:rPr sz="1350" b="1" dirty="0">
-                <a:solidFill>
-                  <a:srgbClr val="0C1614"/>
-                </a:solidFill>
-                <a:latin typeface="Bahnschrift"/>
-                <a:ea typeface="STZhongsong"/>
-              </a:rPr>
-              <a:t> ·</a:t>
             </a:r>
           </a:p>
         </p:txBody>
@@ -6887,7 +6825,6 @@
           <a:lstStyle/>
           <a:p>
             <a:pPr algn="ctr"/>
-            <a:endParaRPr/>
           </a:p>
         </p:txBody>
       </p:sp>
@@ -6934,7 +6871,6 @@
           <a:lstStyle/>
           <a:p>
             <a:pPr algn="ctr"/>
-            <a:endParaRPr/>
           </a:p>
         </p:txBody>
       </p:sp>
@@ -6979,7 +6915,6 @@
           <a:lstStyle/>
           <a:p>
             <a:pPr algn="ctr"/>
-            <a:endParaRPr/>
           </a:p>
         </p:txBody>
       </p:sp>
@@ -7024,7 +6959,6 @@
           <a:lstStyle/>
           <a:p>
             <a:pPr algn="ctr"/>
-            <a:endParaRPr/>
           </a:p>
         </p:txBody>
       </p:sp>
@@ -7069,7 +7003,6 @@
           <a:lstStyle/>
           <a:p>
             <a:pPr algn="ctr"/>
-            <a:endParaRPr/>
           </a:p>
         </p:txBody>
       </p:sp>
@@ -7114,7 +7047,6 @@
           <a:lstStyle/>
           <a:p>
             <a:pPr algn="ctr"/>
-            <a:endParaRPr/>
           </a:p>
         </p:txBody>
       </p:sp>
@@ -7159,7 +7091,6 @@
           <a:lstStyle/>
           <a:p>
             <a:pPr algn="ctr"/>
-            <a:endParaRPr/>
           </a:p>
         </p:txBody>
       </p:sp>
@@ -7180,7 +7111,7 @@
           <a:noFill/>
         </p:spPr>
         <p:txBody>
-          <a:bodyPr wrap="square" lIns="0" tIns="0" rIns="0" bIns="0" anchor="ctr">
+          <a:bodyPr wrap="square" anchor="ctr" lIns="0" rIns="0" tIns="0" bIns="0">
             <a:spAutoFit/>
           </a:bodyPr>
           <a:lstStyle/>
@@ -7240,7 +7171,7 @@
           <a:noFill/>
         </p:spPr>
         <p:txBody>
-          <a:bodyPr wrap="square" lIns="0" tIns="0" rIns="0" bIns="0" anchor="ctr">
+          <a:bodyPr wrap="square" anchor="ctr" lIns="0" rIns="0" tIns="0" bIns="0">
             <a:spAutoFit/>
           </a:bodyPr>
           <a:lstStyle/>
@@ -7300,7 +7231,6 @@
           <a:lstStyle/>
           <a:p>
             <a:pPr algn="ctr"/>
-            <a:endParaRPr/>
           </a:p>
         </p:txBody>
       </p:sp>
@@ -7347,7 +7277,6 @@
           <a:lstStyle/>
           <a:p>
             <a:pPr algn="ctr"/>
-            <a:endParaRPr/>
           </a:p>
         </p:txBody>
       </p:sp>
@@ -7392,7 +7321,6 @@
           <a:lstStyle/>
           <a:p>
             <a:pPr algn="ctr"/>
-            <a:endParaRPr/>
           </a:p>
         </p:txBody>
       </p:sp>
@@ -7437,7 +7365,6 @@
           <a:lstStyle/>
           <a:p>
             <a:pPr algn="ctr"/>
-            <a:endParaRPr/>
           </a:p>
         </p:txBody>
       </p:sp>
@@ -7482,7 +7409,6 @@
           <a:lstStyle/>
           <a:p>
             <a:pPr algn="ctr"/>
-            <a:endParaRPr/>
           </a:p>
         </p:txBody>
       </p:sp>
@@ -7527,7 +7453,6 @@
           <a:lstStyle/>
           <a:p>
             <a:pPr algn="ctr"/>
-            <a:endParaRPr/>
           </a:p>
         </p:txBody>
       </p:sp>
@@ -7572,7 +7497,6 @@
           <a:lstStyle/>
           <a:p>
             <a:pPr algn="ctr"/>
-            <a:endParaRPr/>
           </a:p>
         </p:txBody>
       </p:sp>
@@ -7593,7 +7517,7 @@
           <a:noFill/>
         </p:spPr>
         <p:txBody>
-          <a:bodyPr wrap="square" lIns="0" tIns="0" rIns="0" bIns="0" anchor="ctr">
+          <a:bodyPr wrap="square" anchor="ctr" lIns="0" rIns="0" tIns="0" bIns="0">
             <a:spAutoFit/>
           </a:bodyPr>
           <a:lstStyle/>
@@ -7653,7 +7577,7 @@
           <a:noFill/>
         </p:spPr>
         <p:txBody>
-          <a:bodyPr wrap="square" lIns="0" tIns="0" rIns="0" bIns="0" anchor="ctr">
+          <a:bodyPr wrap="square" anchor="ctr" lIns="0" rIns="0" tIns="0" bIns="0">
             <a:spAutoFit/>
           </a:bodyPr>
           <a:lstStyle/>
@@ -7681,7 +7605,7 @@
 </file>
 
 <file path=ppt/slides/slide13.xml><?xml version="1.0" encoding="utf-8"?>
-<p:sld xmlns:a="http://schemas.openxmlformats.org/drawingml/2006/main" xmlns:r="http://schemas.openxmlformats.org/officeDocument/2006/relationships" xmlns:p="http://schemas.openxmlformats.org/presentationml/2006/main">
+<p:sld xmlns:a="http://schemas.openxmlformats.org/drawingml/2006/main" xmlns:p="http://schemas.openxmlformats.org/presentationml/2006/main" xmlns:r="http://schemas.openxmlformats.org/officeDocument/2006/relationships">
   <p:cSld>
     <p:bg>
       <p:bgPr>
@@ -7697,14 +7621,7 @@
         <p:cNvGrpSpPr/>
         <p:nvPr/>
       </p:nvGrpSpPr>
-      <p:grpSpPr>
-        <a:xfrm>
-          <a:off x="0" y="0"/>
-          <a:ext cx="0" cy="0"/>
-          <a:chOff x="0" y="0"/>
-          <a:chExt cx="0" cy="0"/>
-        </a:xfrm>
-      </p:grpSpPr>
+      <p:grpSpPr/>
       <p:sp>
         <p:nvSpPr>
           <p:cNvPr id="2" name="Rounded Rectangle 1"/>
@@ -7744,7 +7661,7 @@
           </a:fontRef>
         </p:style>
         <p:txBody>
-          <a:bodyPr wrap="none" lIns="45720" tIns="0" rIns="45720" bIns="0" rtlCol="0" anchor="ctr"/>
+          <a:bodyPr rtlCol="0" anchor="ctr" wrap="none" lIns="45720" rIns="45720" tIns="0" bIns="0"/>
           <a:lstStyle/>
           <a:p>
             <a:pPr algn="ctr"/>
@@ -7778,7 +7695,7 @@
           <a:noFill/>
         </p:spPr>
         <p:txBody>
-          <a:bodyPr wrap="square" lIns="0" tIns="0" rIns="0" bIns="0" anchor="ctr">
+          <a:bodyPr wrap="square" anchor="ctr" lIns="0" rIns="0" tIns="0" bIns="0">
             <a:spAutoFit/>
           </a:bodyPr>
           <a:lstStyle/>
@@ -7850,7 +7767,7 @@
           <a:noFill/>
         </p:spPr>
         <p:txBody>
-          <a:bodyPr wrap="square" lIns="0" tIns="0" rIns="0" bIns="0" anchor="t">
+          <a:bodyPr wrap="square" anchor="t" lIns="0" rIns="0" tIns="0" bIns="0">
             <a:spAutoFit/>
           </a:bodyPr>
           <a:lstStyle/>
@@ -7910,7 +7827,6 @@
           <a:lstStyle/>
           <a:p>
             <a:pPr algn="ctr"/>
-            <a:endParaRPr/>
           </a:p>
         </p:txBody>
       </p:sp>
@@ -7957,7 +7873,6 @@
           <a:lstStyle/>
           <a:p>
             <a:pPr algn="ctr"/>
-            <a:endParaRPr/>
           </a:p>
         </p:txBody>
       </p:sp>
@@ -8002,7 +7917,6 @@
           <a:lstStyle/>
           <a:p>
             <a:pPr algn="ctr"/>
-            <a:endParaRPr/>
           </a:p>
         </p:txBody>
       </p:sp>
@@ -8047,7 +7961,6 @@
           <a:lstStyle/>
           <a:p>
             <a:pPr algn="ctr"/>
-            <a:endParaRPr/>
           </a:p>
         </p:txBody>
       </p:sp>
@@ -8092,7 +8005,6 @@
           <a:lstStyle/>
           <a:p>
             <a:pPr algn="ctr"/>
-            <a:endParaRPr/>
           </a:p>
         </p:txBody>
       </p:sp>
@@ -8137,7 +8049,6 @@
           <a:lstStyle/>
           <a:p>
             <a:pPr algn="ctr"/>
-            <a:endParaRPr/>
           </a:p>
         </p:txBody>
       </p:sp>
@@ -8182,7 +8093,6 @@
           <a:lstStyle/>
           <a:p>
             <a:pPr algn="ctr"/>
-            <a:endParaRPr/>
           </a:p>
         </p:txBody>
       </p:sp>
@@ -8203,7 +8113,7 @@
           <a:noFill/>
         </p:spPr>
         <p:txBody>
-          <a:bodyPr wrap="square" lIns="0" tIns="0" rIns="0" bIns="0" anchor="ctr">
+          <a:bodyPr wrap="square" anchor="ctr" lIns="0" rIns="0" tIns="0" bIns="0">
             <a:spAutoFit/>
           </a:bodyPr>
           <a:lstStyle/>
@@ -8263,7 +8173,7 @@
           <a:noFill/>
         </p:spPr>
         <p:txBody>
-          <a:bodyPr wrap="square" lIns="0" tIns="0" rIns="0" bIns="0" anchor="ctr">
+          <a:bodyPr wrap="square" anchor="ctr" lIns="0" rIns="0" tIns="0" bIns="0">
             <a:spAutoFit/>
           </a:bodyPr>
           <a:lstStyle/>
@@ -8323,7 +8233,6 @@
           <a:lstStyle/>
           <a:p>
             <a:pPr algn="ctr"/>
-            <a:endParaRPr/>
           </a:p>
         </p:txBody>
       </p:sp>
@@ -8370,7 +8279,6 @@
           <a:lstStyle/>
           <a:p>
             <a:pPr algn="ctr"/>
-            <a:endParaRPr/>
           </a:p>
         </p:txBody>
       </p:sp>
@@ -8415,7 +8323,6 @@
           <a:lstStyle/>
           <a:p>
             <a:pPr algn="ctr"/>
-            <a:endParaRPr/>
           </a:p>
         </p:txBody>
       </p:sp>
@@ -8460,7 +8367,6 @@
           <a:lstStyle/>
           <a:p>
             <a:pPr algn="ctr"/>
-            <a:endParaRPr/>
           </a:p>
         </p:txBody>
       </p:sp>
@@ -8505,7 +8411,6 @@
           <a:lstStyle/>
           <a:p>
             <a:pPr algn="ctr"/>
-            <a:endParaRPr/>
           </a:p>
         </p:txBody>
       </p:sp>
@@ -8550,7 +8455,6 @@
           <a:lstStyle/>
           <a:p>
             <a:pPr algn="ctr"/>
-            <a:endParaRPr/>
           </a:p>
         </p:txBody>
       </p:sp>
@@ -8595,7 +8499,6 @@
           <a:lstStyle/>
           <a:p>
             <a:pPr algn="ctr"/>
-            <a:endParaRPr/>
           </a:p>
         </p:txBody>
       </p:sp>
@@ -8616,7 +8519,7 @@
           <a:noFill/>
         </p:spPr>
         <p:txBody>
-          <a:bodyPr wrap="square" lIns="0" tIns="0" rIns="0" bIns="0" anchor="ctr">
+          <a:bodyPr wrap="square" anchor="ctr" lIns="0" rIns="0" tIns="0" bIns="0">
             <a:spAutoFit/>
           </a:bodyPr>
           <a:lstStyle/>
@@ -8676,7 +8579,7 @@
           <a:noFill/>
         </p:spPr>
         <p:txBody>
-          <a:bodyPr wrap="square" lIns="0" tIns="0" rIns="0" bIns="0" anchor="ctr">
+          <a:bodyPr wrap="square" anchor="ctr" lIns="0" rIns="0" tIns="0" bIns="0">
             <a:spAutoFit/>
           </a:bodyPr>
           <a:lstStyle/>
@@ -8736,7 +8639,6 @@
           <a:lstStyle/>
           <a:p>
             <a:pPr algn="ctr"/>
-            <a:endParaRPr/>
           </a:p>
         </p:txBody>
       </p:sp>
@@ -8783,7 +8685,6 @@
           <a:lstStyle/>
           <a:p>
             <a:pPr algn="ctr"/>
-            <a:endParaRPr/>
           </a:p>
         </p:txBody>
       </p:sp>
@@ -8828,7 +8729,6 @@
           <a:lstStyle/>
           <a:p>
             <a:pPr algn="ctr"/>
-            <a:endParaRPr/>
           </a:p>
         </p:txBody>
       </p:sp>
@@ -8873,7 +8773,6 @@
           <a:lstStyle/>
           <a:p>
             <a:pPr algn="ctr"/>
-            <a:endParaRPr/>
           </a:p>
         </p:txBody>
       </p:sp>
@@ -8918,7 +8817,6 @@
           <a:lstStyle/>
           <a:p>
             <a:pPr algn="ctr"/>
-            <a:endParaRPr/>
           </a:p>
         </p:txBody>
       </p:sp>
@@ -8963,7 +8861,6 @@
           <a:lstStyle/>
           <a:p>
             <a:pPr algn="ctr"/>
-            <a:endParaRPr/>
           </a:p>
         </p:txBody>
       </p:sp>
@@ -9008,7 +8905,6 @@
           <a:lstStyle/>
           <a:p>
             <a:pPr algn="ctr"/>
-            <a:endParaRPr/>
           </a:p>
         </p:txBody>
       </p:sp>
@@ -9029,7 +8925,7 @@
           <a:noFill/>
         </p:spPr>
         <p:txBody>
-          <a:bodyPr wrap="square" lIns="0" tIns="0" rIns="0" bIns="0" anchor="ctr">
+          <a:bodyPr wrap="square" anchor="ctr" lIns="0" rIns="0" tIns="0" bIns="0">
             <a:spAutoFit/>
           </a:bodyPr>
           <a:lstStyle/>
@@ -9089,7 +8985,7 @@
           <a:noFill/>
         </p:spPr>
         <p:txBody>
-          <a:bodyPr wrap="square" lIns="0" tIns="0" rIns="0" bIns="0" anchor="ctr">
+          <a:bodyPr wrap="square" anchor="ctr" lIns="0" rIns="0" tIns="0" bIns="0">
             <a:spAutoFit/>
           </a:bodyPr>
           <a:lstStyle/>
@@ -9149,7 +9045,6 @@
           <a:lstStyle/>
           <a:p>
             <a:pPr algn="ctr"/>
-            <a:endParaRPr/>
           </a:p>
         </p:txBody>
       </p:sp>
@@ -9196,7 +9091,6 @@
           <a:lstStyle/>
           <a:p>
             <a:pPr algn="ctr"/>
-            <a:endParaRPr/>
           </a:p>
         </p:txBody>
       </p:sp>
@@ -9241,7 +9135,6 @@
           <a:lstStyle/>
           <a:p>
             <a:pPr algn="ctr"/>
-            <a:endParaRPr/>
           </a:p>
         </p:txBody>
       </p:sp>
@@ -9286,7 +9179,6 @@
           <a:lstStyle/>
           <a:p>
             <a:pPr algn="ctr"/>
-            <a:endParaRPr/>
           </a:p>
         </p:txBody>
       </p:sp>
@@ -9331,7 +9223,6 @@
           <a:lstStyle/>
           <a:p>
             <a:pPr algn="ctr"/>
-            <a:endParaRPr/>
           </a:p>
         </p:txBody>
       </p:sp>
@@ -9376,7 +9267,6 @@
           <a:lstStyle/>
           <a:p>
             <a:pPr algn="ctr"/>
-            <a:endParaRPr/>
           </a:p>
         </p:txBody>
       </p:sp>
@@ -9421,7 +9311,6 @@
           <a:lstStyle/>
           <a:p>
             <a:pPr algn="ctr"/>
-            <a:endParaRPr/>
           </a:p>
         </p:txBody>
       </p:sp>
@@ -9442,7 +9331,7 @@
           <a:noFill/>
         </p:spPr>
         <p:txBody>
-          <a:bodyPr wrap="square" lIns="0" tIns="0" rIns="0" bIns="0" anchor="ctr">
+          <a:bodyPr wrap="square" anchor="ctr" lIns="0" rIns="0" tIns="0" bIns="0">
             <a:spAutoFit/>
           </a:bodyPr>
           <a:lstStyle/>
@@ -9502,7 +9391,7 @@
           <a:noFill/>
         </p:spPr>
         <p:txBody>
-          <a:bodyPr wrap="square" lIns="0" tIns="0" rIns="0" bIns="0" anchor="ctr">
+          <a:bodyPr wrap="square" anchor="ctr" lIns="0" rIns="0" tIns="0" bIns="0">
             <a:spAutoFit/>
           </a:bodyPr>
           <a:lstStyle/>
@@ -9530,7 +9419,7 @@
 </file>
 
 <file path=ppt/slides/slide14.xml><?xml version="1.0" encoding="utf-8"?>
-<p:sld xmlns:a="http://schemas.openxmlformats.org/drawingml/2006/main" xmlns:r="http://schemas.openxmlformats.org/officeDocument/2006/relationships" xmlns:p="http://schemas.openxmlformats.org/presentationml/2006/main">
+<p:sld xmlns:a="http://schemas.openxmlformats.org/drawingml/2006/main" xmlns:p="http://schemas.openxmlformats.org/presentationml/2006/main" xmlns:r="http://schemas.openxmlformats.org/officeDocument/2006/relationships">
   <p:cSld>
     <p:bg>
       <p:bgPr>
@@ -9546,14 +9435,7 @@
         <p:cNvGrpSpPr/>
         <p:nvPr/>
       </p:nvGrpSpPr>
-      <p:grpSpPr>
-        <a:xfrm>
-          <a:off x="0" y="0"/>
-          <a:ext cx="0" cy="0"/>
-          <a:chOff x="0" y="0"/>
-          <a:chExt cx="0" cy="0"/>
-        </a:xfrm>
-      </p:grpSpPr>
+      <p:grpSpPr/>
       <p:sp>
         <p:nvSpPr>
           <p:cNvPr id="2" name="Rounded Rectangle 1"/>
@@ -9593,7 +9475,7 @@
           </a:fontRef>
         </p:style>
         <p:txBody>
-          <a:bodyPr wrap="none" lIns="45720" tIns="0" rIns="45720" bIns="0" rtlCol="0" anchor="ctr"/>
+          <a:bodyPr rtlCol="0" anchor="ctr" wrap="none" lIns="45720" rIns="45720" tIns="0" bIns="0"/>
           <a:lstStyle/>
           <a:p>
             <a:pPr algn="ctr"/>
@@ -9627,7 +9509,7 @@
           <a:noFill/>
         </p:spPr>
         <p:txBody>
-          <a:bodyPr wrap="square" lIns="0" tIns="0" rIns="0" bIns="0" anchor="ctr">
+          <a:bodyPr wrap="square" anchor="ctr" lIns="0" rIns="0" tIns="0" bIns="0">
             <a:spAutoFit/>
           </a:bodyPr>
           <a:lstStyle/>
@@ -9699,7 +9581,7 @@
           <a:noFill/>
         </p:spPr>
         <p:txBody>
-          <a:bodyPr wrap="square" lIns="0" tIns="0" rIns="0" bIns="0" anchor="t">
+          <a:bodyPr wrap="square" anchor="t" lIns="0" rIns="0" tIns="0" bIns="0">
             <a:spAutoFit/>
           </a:bodyPr>
           <a:lstStyle/>
@@ -9763,7 +9645,6 @@
           <a:lstStyle/>
           <a:p>
             <a:pPr algn="ctr"/>
-            <a:endParaRPr/>
           </a:p>
         </p:txBody>
       </p:sp>
@@ -9784,7 +9665,7 @@
           <a:noFill/>
         </p:spPr>
         <p:txBody>
-          <a:bodyPr wrap="square" lIns="0" tIns="0" rIns="0" bIns="0" anchor="ctr">
+          <a:bodyPr wrap="square" anchor="ctr" lIns="0" rIns="0" tIns="0" bIns="0">
             <a:spAutoFit/>
           </a:bodyPr>
           <a:lstStyle/>
@@ -9820,7 +9701,7 @@
           <a:noFill/>
         </p:spPr>
         <p:txBody>
-          <a:bodyPr wrap="square" lIns="0" tIns="0" rIns="0" bIns="0" anchor="ctr">
+          <a:bodyPr wrap="square" anchor="ctr" lIns="0" rIns="0" tIns="0" bIns="0">
             <a:spAutoFit/>
           </a:bodyPr>
           <a:lstStyle/>
@@ -9860,7 +9741,7 @@
           <a:noFill/>
         </p:spPr>
         <p:txBody>
-          <a:bodyPr wrap="square" lIns="0" tIns="0" rIns="0" bIns="0" anchor="t">
+          <a:bodyPr wrap="square" anchor="t" lIns="0" rIns="0" tIns="0" bIns="0">
             <a:spAutoFit/>
           </a:bodyPr>
           <a:lstStyle/>
@@ -9924,7 +9805,6 @@
           <a:lstStyle/>
           <a:p>
             <a:pPr algn="ctr"/>
-            <a:endParaRPr/>
           </a:p>
         </p:txBody>
       </p:sp>
@@ -9945,7 +9825,7 @@
           <a:noFill/>
         </p:spPr>
         <p:txBody>
-          <a:bodyPr wrap="square" lIns="0" tIns="0" rIns="0" bIns="0" anchor="ctr">
+          <a:bodyPr wrap="square" anchor="ctr" lIns="0" rIns="0" tIns="0" bIns="0">
             <a:spAutoFit/>
           </a:bodyPr>
           <a:lstStyle/>
@@ -9981,7 +9861,7 @@
           <a:noFill/>
         </p:spPr>
         <p:txBody>
-          <a:bodyPr wrap="square" lIns="0" tIns="0" rIns="0" bIns="0" anchor="ctr">
+          <a:bodyPr wrap="square" anchor="ctr" lIns="0" rIns="0" tIns="0" bIns="0">
             <a:spAutoFit/>
           </a:bodyPr>
           <a:lstStyle/>
@@ -10021,7 +9901,7 @@
           <a:noFill/>
         </p:spPr>
         <p:txBody>
-          <a:bodyPr wrap="square" lIns="0" tIns="0" rIns="0" bIns="0" anchor="t">
+          <a:bodyPr wrap="square" anchor="t" lIns="0" rIns="0" tIns="0" bIns="0">
             <a:spAutoFit/>
           </a:bodyPr>
           <a:lstStyle/>
@@ -10085,7 +9965,6 @@
           <a:lstStyle/>
           <a:p>
             <a:pPr algn="ctr"/>
-            <a:endParaRPr/>
           </a:p>
         </p:txBody>
       </p:sp>
@@ -10106,7 +9985,7 @@
           <a:noFill/>
         </p:spPr>
         <p:txBody>
-          <a:bodyPr wrap="square" lIns="0" tIns="0" rIns="0" bIns="0" anchor="ctr">
+          <a:bodyPr wrap="square" anchor="ctr" lIns="0" rIns="0" tIns="0" bIns="0">
             <a:spAutoFit/>
           </a:bodyPr>
           <a:lstStyle/>
@@ -10142,7 +10021,7 @@
           <a:noFill/>
         </p:spPr>
         <p:txBody>
-          <a:bodyPr wrap="square" lIns="0" tIns="0" rIns="0" bIns="0" anchor="ctr">
+          <a:bodyPr wrap="square" anchor="ctr" lIns="0" rIns="0" tIns="0" bIns="0">
             <a:spAutoFit/>
           </a:bodyPr>
           <a:lstStyle/>
@@ -10182,7 +10061,7 @@
           <a:noFill/>
         </p:spPr>
         <p:txBody>
-          <a:bodyPr wrap="square" lIns="0" tIns="0" rIns="0" bIns="0" anchor="t">
+          <a:bodyPr wrap="square" anchor="t" lIns="0" rIns="0" tIns="0" bIns="0">
             <a:spAutoFit/>
           </a:bodyPr>
           <a:lstStyle/>
@@ -10246,7 +10125,6 @@
           <a:lstStyle/>
           <a:p>
             <a:pPr algn="ctr"/>
-            <a:endParaRPr/>
           </a:p>
         </p:txBody>
       </p:sp>
@@ -10267,7 +10145,7 @@
           <a:noFill/>
         </p:spPr>
         <p:txBody>
-          <a:bodyPr wrap="square" lIns="0" tIns="0" rIns="0" bIns="0" anchor="ctr">
+          <a:bodyPr wrap="square" anchor="ctr" lIns="0" rIns="0" tIns="0" bIns="0">
             <a:spAutoFit/>
           </a:bodyPr>
           <a:lstStyle/>
@@ -10303,7 +10181,7 @@
           <a:noFill/>
         </p:spPr>
         <p:txBody>
-          <a:bodyPr wrap="square" lIns="0" tIns="0" rIns="0" bIns="0" anchor="ctr">
+          <a:bodyPr wrap="square" anchor="ctr" lIns="0" rIns="0" tIns="0" bIns="0">
             <a:spAutoFit/>
           </a:bodyPr>
           <a:lstStyle/>
@@ -10343,7 +10221,7 @@
           <a:noFill/>
         </p:spPr>
         <p:txBody>
-          <a:bodyPr wrap="square" lIns="0" tIns="0" rIns="0" bIns="0" anchor="t">
+          <a:bodyPr wrap="square" anchor="t" lIns="0" rIns="0" tIns="0" bIns="0">
             <a:spAutoFit/>
           </a:bodyPr>
           <a:lstStyle/>
@@ -10407,7 +10285,6 @@
           <a:lstStyle/>
           <a:p>
             <a:pPr algn="ctr"/>
-            <a:endParaRPr/>
           </a:p>
         </p:txBody>
       </p:sp>
@@ -10428,7 +10305,7 @@
           <a:noFill/>
         </p:spPr>
         <p:txBody>
-          <a:bodyPr wrap="square" lIns="0" tIns="0" rIns="0" bIns="0" anchor="ctr">
+          <a:bodyPr wrap="square" anchor="ctr" lIns="0" rIns="0" tIns="0" bIns="0">
             <a:spAutoFit/>
           </a:bodyPr>
           <a:lstStyle/>
@@ -10464,7 +10341,7 @@
           <a:noFill/>
         </p:spPr>
         <p:txBody>
-          <a:bodyPr wrap="square" lIns="0" tIns="0" rIns="0" bIns="0" anchor="ctr">
+          <a:bodyPr wrap="square" anchor="ctr" lIns="0" rIns="0" tIns="0" bIns="0">
             <a:spAutoFit/>
           </a:bodyPr>
           <a:lstStyle/>
@@ -10504,7 +10381,7 @@
           <a:noFill/>
         </p:spPr>
         <p:txBody>
-          <a:bodyPr wrap="square" lIns="0" tIns="0" rIns="0" bIns="0" anchor="t">
+          <a:bodyPr wrap="square" anchor="t" lIns="0" rIns="0" tIns="0" bIns="0">
             <a:spAutoFit/>
           </a:bodyPr>
           <a:lstStyle/>
@@ -10568,7 +10445,6 @@
           <a:lstStyle/>
           <a:p>
             <a:pPr algn="ctr"/>
-            <a:endParaRPr/>
           </a:p>
         </p:txBody>
       </p:sp>
@@ -10589,13 +10465,22 @@
           <a:noFill/>
         </p:spPr>
         <p:txBody>
-          <a:bodyPr wrap="square" lIns="0" tIns="0" rIns="0" bIns="0" anchor="ctr">
+          <a:bodyPr wrap="square" anchor="ctr" lIns="0" rIns="0" tIns="0" bIns="0">
             <a:spAutoFit/>
           </a:bodyPr>
           <a:lstStyle/>
           <a:p>
             <a:pPr algn="l"/>
-            <a:endParaRPr/>
+            <a:r>
+              <a:rPr sz="1200" b="1">
+                <a:solidFill>
+                  <a:srgbClr val="0C1614"/>
+                </a:solidFill>
+                <a:latin typeface="Bahnschrift"/>
+                <a:ea typeface="STZhongsong"/>
+              </a:rPr>
+              <a:t/>
+            </a:r>
           </a:p>
         </p:txBody>
       </p:sp>
@@ -10616,7 +10501,7 @@
           <a:noFill/>
         </p:spPr>
         <p:txBody>
-          <a:bodyPr wrap="square" lIns="0" tIns="0" rIns="0" bIns="0" anchor="ctr">
+          <a:bodyPr wrap="square" anchor="ctr" lIns="0" rIns="0" tIns="0" bIns="0">
             <a:spAutoFit/>
           </a:bodyPr>
           <a:lstStyle/>
@@ -10680,7 +10565,7 @@
           <a:noFill/>
         </p:spPr>
         <p:txBody>
-          <a:bodyPr wrap="square" lIns="0" tIns="0" rIns="0" bIns="0" anchor="t">
+          <a:bodyPr wrap="square" anchor="t" lIns="0" rIns="0" tIns="0" bIns="0">
             <a:spAutoFit/>
           </a:bodyPr>
           <a:lstStyle/>
@@ -10716,7 +10601,7 @@
           <a:noFill/>
         </p:spPr>
         <p:txBody>
-          <a:bodyPr wrap="square" lIns="0" tIns="0" rIns="0" bIns="0" anchor="t">
+          <a:bodyPr wrap="square" anchor="t" lIns="0" rIns="0" tIns="0" bIns="0">
             <a:spAutoFit/>
           </a:bodyPr>
           <a:lstStyle/>
@@ -10744,7 +10629,7 @@
 </file>
 
 <file path=ppt/slides/slide15.xml><?xml version="1.0" encoding="utf-8"?>
-<p:sld xmlns:a="http://schemas.openxmlformats.org/drawingml/2006/main" xmlns:r="http://schemas.openxmlformats.org/officeDocument/2006/relationships" xmlns:p="http://schemas.openxmlformats.org/presentationml/2006/main">
+<p:sld xmlns:a="http://schemas.openxmlformats.org/drawingml/2006/main" xmlns:p="http://schemas.openxmlformats.org/presentationml/2006/main" xmlns:r="http://schemas.openxmlformats.org/officeDocument/2006/relationships">
   <p:cSld>
     <p:bg>
       <p:bgPr>
@@ -10760,14 +10645,7 @@
         <p:cNvGrpSpPr/>
         <p:nvPr/>
       </p:nvGrpSpPr>
-      <p:grpSpPr>
-        <a:xfrm>
-          <a:off x="0" y="0"/>
-          <a:ext cx="0" cy="0"/>
-          <a:chOff x="0" y="0"/>
-          <a:chExt cx="0" cy="0"/>
-        </a:xfrm>
-      </p:grpSpPr>
+      <p:grpSpPr/>
       <p:sp>
         <p:nvSpPr>
           <p:cNvPr id="2" name="Rounded Rectangle 1"/>
@@ -10807,7 +10685,7 @@
           </a:fontRef>
         </p:style>
         <p:txBody>
-          <a:bodyPr wrap="none" lIns="45720" tIns="0" rIns="45720" bIns="0" rtlCol="0" anchor="ctr"/>
+          <a:bodyPr rtlCol="0" anchor="ctr" wrap="none" lIns="45720" rIns="45720" tIns="0" bIns="0"/>
           <a:lstStyle/>
           <a:p>
             <a:pPr algn="ctr"/>
@@ -10841,7 +10719,7 @@
           <a:noFill/>
         </p:spPr>
         <p:txBody>
-          <a:bodyPr wrap="square" lIns="0" tIns="0" rIns="0" bIns="0" anchor="ctr">
+          <a:bodyPr wrap="square" anchor="ctr" lIns="0" rIns="0" tIns="0" bIns="0">
             <a:spAutoFit/>
           </a:bodyPr>
           <a:lstStyle/>
@@ -10913,7 +10791,7 @@
           <a:noFill/>
         </p:spPr>
         <p:txBody>
-          <a:bodyPr wrap="square" lIns="0" tIns="0" rIns="0" bIns="0" anchor="t">
+          <a:bodyPr wrap="square" anchor="t" lIns="0" rIns="0" tIns="0" bIns="0">
             <a:spAutoFit/>
           </a:bodyPr>
           <a:lstStyle/>
@@ -10949,7 +10827,7 @@
           <a:noFill/>
         </p:spPr>
         <p:txBody>
-          <a:bodyPr wrap="square" lIns="0" tIns="0" rIns="0" bIns="0" anchor="t">
+          <a:bodyPr wrap="square" anchor="t" lIns="0" rIns="0" tIns="0" bIns="0">
             <a:spAutoFit/>
           </a:bodyPr>
           <a:lstStyle/>
@@ -11013,7 +10891,6 @@
           <a:lstStyle/>
           <a:p>
             <a:pPr algn="ctr"/>
-            <a:endParaRPr/>
           </a:p>
         </p:txBody>
       </p:sp>
@@ -11034,7 +10911,7 @@
           <a:noFill/>
         </p:spPr>
         <p:txBody>
-          <a:bodyPr wrap="square" lIns="0" tIns="0" rIns="0" bIns="0" anchor="ctr">
+          <a:bodyPr wrap="square" anchor="ctr" lIns="0" rIns="0" tIns="0" bIns="0">
             <a:spAutoFit/>
           </a:bodyPr>
           <a:lstStyle/>
@@ -11112,7 +10989,6 @@
           <a:lstStyle/>
           <a:p>
             <a:pPr algn="ctr"/>
-            <a:endParaRPr/>
           </a:p>
         </p:txBody>
       </p:sp>
@@ -11133,7 +11009,7 @@
           <a:noFill/>
         </p:spPr>
         <p:txBody>
-          <a:bodyPr wrap="square" lIns="0" tIns="0" rIns="0" bIns="0" anchor="ctr">
+          <a:bodyPr wrap="square" anchor="ctr" lIns="0" rIns="0" tIns="0" bIns="0">
             <a:spAutoFit/>
           </a:bodyPr>
           <a:lstStyle/>
@@ -11211,7 +11087,6 @@
           <a:lstStyle/>
           <a:p>
             <a:pPr algn="ctr"/>
-            <a:endParaRPr/>
           </a:p>
         </p:txBody>
       </p:sp>
@@ -11232,7 +11107,7 @@
           <a:noFill/>
         </p:spPr>
         <p:txBody>
-          <a:bodyPr wrap="square" lIns="0" tIns="0" rIns="0" bIns="0" anchor="ctr">
+          <a:bodyPr wrap="square" anchor="ctr" lIns="0" rIns="0" tIns="0" bIns="0">
             <a:spAutoFit/>
           </a:bodyPr>
           <a:lstStyle/>
@@ -11282,7 +11157,7 @@
           <a:noFill/>
         </p:spPr>
         <p:txBody>
-          <a:bodyPr wrap="square" lIns="0" tIns="0" rIns="0" bIns="0" anchor="t">
+          <a:bodyPr wrap="square" anchor="t" lIns="0" rIns="0" tIns="0" bIns="0">
             <a:spAutoFit/>
           </a:bodyPr>
           <a:lstStyle/>
@@ -11346,7 +11221,6 @@
           <a:lstStyle/>
           <a:p>
             <a:pPr algn="ctr"/>
-            <a:endParaRPr/>
           </a:p>
         </p:txBody>
       </p:sp>
@@ -11367,7 +11241,7 @@
           <a:noFill/>
         </p:spPr>
         <p:txBody>
-          <a:bodyPr wrap="square" lIns="0" tIns="0" rIns="0" bIns="0" anchor="t">
+          <a:bodyPr wrap="square" anchor="t" lIns="0" rIns="0" tIns="0" bIns="0">
             <a:spAutoFit/>
           </a:bodyPr>
           <a:lstStyle/>
@@ -11447,7 +11321,7 @@
           <a:noFill/>
         </p:spPr>
         <p:txBody>
-          <a:bodyPr wrap="square" lIns="0" tIns="0" rIns="0" bIns="0" anchor="t">
+          <a:bodyPr wrap="square" anchor="t" lIns="0" rIns="0" tIns="0" bIns="0">
             <a:spAutoFit/>
           </a:bodyPr>
           <a:lstStyle/>
@@ -11511,7 +11385,6 @@
           <a:lstStyle/>
           <a:p>
             <a:pPr algn="ctr"/>
-            <a:endParaRPr/>
           </a:p>
         </p:txBody>
       </p:sp>
@@ -11532,7 +11405,7 @@
           <a:noFill/>
         </p:spPr>
         <p:txBody>
-          <a:bodyPr wrap="square" lIns="0" tIns="0" rIns="0" bIns="0" anchor="ctr">
+          <a:bodyPr wrap="square" anchor="ctr" lIns="0" rIns="0" tIns="0" bIns="0">
             <a:spAutoFit/>
           </a:bodyPr>
           <a:lstStyle/>
@@ -11568,7 +11441,7 @@
           <a:noFill/>
         </p:spPr>
         <p:txBody>
-          <a:bodyPr wrap="square" lIns="0" tIns="0" rIns="0" bIns="0" anchor="ctr">
+          <a:bodyPr wrap="square" anchor="ctr" lIns="0" rIns="0" tIns="0" bIns="0">
             <a:spAutoFit/>
           </a:bodyPr>
           <a:lstStyle/>
@@ -11595,8 +11468,8 @@
         </p:nvSpPr>
         <p:spPr>
           <a:xfrm>
-            <a:off x="7818120" y="1729681"/>
-            <a:ext cx="3703320" cy="143373"/>
+            <a:off x="7818120" y="1444752"/>
+            <a:ext cx="3703320" cy="713232"/>
           </a:xfrm>
           <a:prstGeom prst="rect">
             <a:avLst/>
@@ -11604,7 +11477,7 @@
           <a:noFill/>
         </p:spPr>
         <p:txBody>
-          <a:bodyPr wrap="square" lIns="0" tIns="0" rIns="0" bIns="0" anchor="ctr">
+          <a:bodyPr wrap="square" anchor="ctr" lIns="0" rIns="0" tIns="0" bIns="0">
             <a:spAutoFit/>
           </a:bodyPr>
           <a:lstStyle/>
@@ -11624,13 +11497,6 @@
               </a:rPr>
               <a:t>现有成果；后续架构把关、代码审查、全文统稿</a:t>
             </a:r>
-            <a:endParaRPr sz="950" b="0" dirty="0">
-              <a:solidFill>
-                <a:srgbClr val="454E48"/>
-              </a:solidFill>
-              <a:latin typeface="Bahnschrift"/>
-              <a:ea typeface="微软雅黑"/>
-            </a:endParaRPr>
           </a:p>
         </p:txBody>
       </p:sp>
@@ -11679,7 +11545,6 @@
           <a:lstStyle/>
           <a:p>
             <a:pPr algn="ctr"/>
-            <a:endParaRPr/>
           </a:p>
         </p:txBody>
       </p:sp>
@@ -11700,7 +11565,7 @@
           <a:noFill/>
         </p:spPr>
         <p:txBody>
-          <a:bodyPr wrap="square" lIns="0" tIns="0" rIns="0" bIns="0" anchor="ctr">
+          <a:bodyPr wrap="square" anchor="ctr" lIns="0" rIns="0" tIns="0" bIns="0">
             <a:spAutoFit/>
           </a:bodyPr>
           <a:lstStyle/>
@@ -11736,7 +11601,7 @@
           <a:noFill/>
         </p:spPr>
         <p:txBody>
-          <a:bodyPr wrap="square" lIns="0" tIns="0" rIns="0" bIns="0" anchor="ctr">
+          <a:bodyPr wrap="square" anchor="ctr" lIns="0" rIns="0" tIns="0" bIns="0">
             <a:spAutoFit/>
           </a:bodyPr>
           <a:lstStyle/>
@@ -11772,7 +11637,7 @@
           <a:noFill/>
         </p:spPr>
         <p:txBody>
-          <a:bodyPr wrap="square" lIns="0" tIns="0" rIns="0" bIns="0" anchor="ctr">
+          <a:bodyPr wrap="square" anchor="ctr" lIns="0" rIns="0" tIns="0" bIns="0">
             <a:spAutoFit/>
           </a:bodyPr>
           <a:lstStyle/>
@@ -11840,7 +11705,6 @@
           <a:lstStyle/>
           <a:p>
             <a:pPr algn="ctr"/>
-            <a:endParaRPr/>
           </a:p>
         </p:txBody>
       </p:sp>
@@ -11861,7 +11725,7 @@
           <a:noFill/>
         </p:spPr>
         <p:txBody>
-          <a:bodyPr wrap="square" lIns="0" tIns="0" rIns="0" bIns="0" anchor="ctr">
+          <a:bodyPr wrap="square" anchor="ctr" lIns="0" rIns="0" tIns="0" bIns="0">
             <a:spAutoFit/>
           </a:bodyPr>
           <a:lstStyle/>
@@ -11897,7 +11761,7 @@
           <a:noFill/>
         </p:spPr>
         <p:txBody>
-          <a:bodyPr wrap="square" lIns="0" tIns="0" rIns="0" bIns="0" anchor="ctr">
+          <a:bodyPr wrap="square" anchor="ctr" lIns="0" rIns="0" tIns="0" bIns="0">
             <a:spAutoFit/>
           </a:bodyPr>
           <a:lstStyle/>
@@ -11933,7 +11797,7 @@
           <a:noFill/>
         </p:spPr>
         <p:txBody>
-          <a:bodyPr wrap="square" lIns="0" tIns="0" rIns="0" bIns="0" anchor="ctr">
+          <a:bodyPr wrap="square" anchor="ctr" lIns="0" rIns="0" tIns="0" bIns="0">
             <a:spAutoFit/>
           </a:bodyPr>
           <a:lstStyle/>
@@ -12001,7 +11865,6 @@
           <a:lstStyle/>
           <a:p>
             <a:pPr algn="ctr"/>
-            <a:endParaRPr/>
           </a:p>
         </p:txBody>
       </p:sp>
@@ -12022,7 +11885,7 @@
           <a:noFill/>
         </p:spPr>
         <p:txBody>
-          <a:bodyPr wrap="square" lIns="0" tIns="0" rIns="0" bIns="0" anchor="ctr">
+          <a:bodyPr wrap="square" anchor="ctr" lIns="0" rIns="0" tIns="0" bIns="0">
             <a:spAutoFit/>
           </a:bodyPr>
           <a:lstStyle/>
@@ -12058,7 +11921,7 @@
           <a:noFill/>
         </p:spPr>
         <p:txBody>
-          <a:bodyPr wrap="square" lIns="0" tIns="0" rIns="0" bIns="0" anchor="ctr">
+          <a:bodyPr wrap="square" anchor="ctr" lIns="0" rIns="0" tIns="0" bIns="0">
             <a:spAutoFit/>
           </a:bodyPr>
           <a:lstStyle/>
@@ -12094,7 +11957,7 @@
           <a:noFill/>
         </p:spPr>
         <p:txBody>
-          <a:bodyPr wrap="square" lIns="0" tIns="0" rIns="0" bIns="0" anchor="ctr">
+          <a:bodyPr wrap="square" anchor="ctr" lIns="0" rIns="0" tIns="0" bIns="0">
             <a:spAutoFit/>
           </a:bodyPr>
           <a:lstStyle/>
@@ -12162,7 +12025,6 @@
           <a:lstStyle/>
           <a:p>
             <a:pPr algn="ctr"/>
-            <a:endParaRPr/>
           </a:p>
         </p:txBody>
       </p:sp>
@@ -12183,7 +12045,7 @@
           <a:noFill/>
         </p:spPr>
         <p:txBody>
-          <a:bodyPr wrap="square" lIns="0" tIns="0" rIns="0" bIns="0" anchor="ctr">
+          <a:bodyPr wrap="square" anchor="ctr" lIns="0" rIns="0" tIns="0" bIns="0">
             <a:spAutoFit/>
           </a:bodyPr>
           <a:lstStyle/>
@@ -12219,7 +12081,7 @@
           <a:noFill/>
         </p:spPr>
         <p:txBody>
-          <a:bodyPr wrap="square" lIns="0" tIns="0" rIns="0" bIns="0" anchor="ctr">
+          <a:bodyPr wrap="square" anchor="ctr" lIns="0" rIns="0" tIns="0" bIns="0">
             <a:spAutoFit/>
           </a:bodyPr>
           <a:lstStyle/>
@@ -12255,7 +12117,7 @@
           <a:noFill/>
         </p:spPr>
         <p:txBody>
-          <a:bodyPr wrap="square" lIns="0" tIns="0" rIns="0" bIns="0" anchor="ctr">
+          <a:bodyPr wrap="square" anchor="ctr" lIns="0" rIns="0" tIns="0" bIns="0">
             <a:spAutoFit/>
           </a:bodyPr>
           <a:lstStyle/>
@@ -12287,7 +12149,7 @@
 </file>
 
 <file path=ppt/slides/slide16.xml><?xml version="1.0" encoding="utf-8"?>
-<p:sld xmlns:a="http://schemas.openxmlformats.org/drawingml/2006/main" xmlns:r="http://schemas.openxmlformats.org/officeDocument/2006/relationships" xmlns:p="http://schemas.openxmlformats.org/presentationml/2006/main">
+<p:sld xmlns:a="http://schemas.openxmlformats.org/drawingml/2006/main" xmlns:p="http://schemas.openxmlformats.org/presentationml/2006/main" xmlns:r="http://schemas.openxmlformats.org/officeDocument/2006/relationships">
   <p:cSld>
     <p:bg>
       <p:bgPr>
@@ -12303,14 +12165,7 @@
         <p:cNvGrpSpPr/>
         <p:nvPr/>
       </p:nvGrpSpPr>
-      <p:grpSpPr>
-        <a:xfrm>
-          <a:off x="0" y="0"/>
-          <a:ext cx="0" cy="0"/>
-          <a:chOff x="0" y="0"/>
-          <a:chExt cx="0" cy="0"/>
-        </a:xfrm>
-      </p:grpSpPr>
+      <p:grpSpPr/>
       <p:sp>
         <p:nvSpPr>
           <p:cNvPr id="2" name="Rounded Rectangle 1"/>
@@ -12350,7 +12205,7 @@
           </a:fontRef>
         </p:style>
         <p:txBody>
-          <a:bodyPr wrap="none" lIns="45720" tIns="0" rIns="45720" bIns="0" rtlCol="0" anchor="ctr"/>
+          <a:bodyPr rtlCol="0" anchor="ctr" wrap="none" lIns="45720" rIns="45720" tIns="0" bIns="0"/>
           <a:lstStyle/>
           <a:p>
             <a:pPr algn="ctr"/>
@@ -12384,7 +12239,7 @@
           <a:noFill/>
         </p:spPr>
         <p:txBody>
-          <a:bodyPr wrap="square" lIns="0" tIns="0" rIns="0" bIns="0" anchor="ctr">
+          <a:bodyPr wrap="square" anchor="ctr" lIns="0" rIns="0" tIns="0" bIns="0">
             <a:spAutoFit/>
           </a:bodyPr>
           <a:lstStyle/>
@@ -12456,7 +12311,7 @@
           <a:noFill/>
         </p:spPr>
         <p:txBody>
-          <a:bodyPr wrap="square" lIns="0" tIns="0" rIns="0" bIns="0" anchor="t">
+          <a:bodyPr wrap="square" anchor="t" lIns="0" rIns="0" tIns="0" bIns="0">
             <a:spAutoFit/>
           </a:bodyPr>
           <a:lstStyle/>
@@ -12518,7 +12373,6 @@
           <a:lstStyle/>
           <a:p>
             <a:pPr algn="ctr"/>
-            <a:endParaRPr/>
           </a:p>
         </p:txBody>
       </p:sp>
@@ -12567,7 +12421,6 @@
           <a:lstStyle/>
           <a:p>
             <a:pPr algn="ctr"/>
-            <a:endParaRPr/>
           </a:p>
         </p:txBody>
       </p:sp>
@@ -12588,7 +12441,7 @@
           <a:noFill/>
         </p:spPr>
         <p:txBody>
-          <a:bodyPr wrap="square" lIns="0" tIns="0" rIns="0" bIns="0" anchor="t">
+          <a:bodyPr wrap="square" anchor="t" lIns="0" rIns="0" tIns="0" bIns="0">
             <a:spAutoFit/>
           </a:bodyPr>
           <a:lstStyle/>
@@ -12624,7 +12477,7 @@
           <a:noFill/>
         </p:spPr>
         <p:txBody>
-          <a:bodyPr wrap="square" lIns="0" tIns="0" rIns="0" bIns="0" anchor="t">
+          <a:bodyPr wrap="square" anchor="t" lIns="0" rIns="0" tIns="0" bIns="0">
             <a:spAutoFit/>
           </a:bodyPr>
           <a:lstStyle/>
@@ -12690,7 +12543,6 @@
           <a:lstStyle/>
           <a:p>
             <a:pPr algn="ctr"/>
-            <a:endParaRPr/>
           </a:p>
         </p:txBody>
       </p:sp>
@@ -12739,7 +12591,6 @@
           <a:lstStyle/>
           <a:p>
             <a:pPr algn="ctr"/>
-            <a:endParaRPr/>
           </a:p>
         </p:txBody>
       </p:sp>
@@ -12760,7 +12611,7 @@
           <a:noFill/>
         </p:spPr>
         <p:txBody>
-          <a:bodyPr wrap="square" lIns="0" tIns="0" rIns="0" bIns="0" anchor="t">
+          <a:bodyPr wrap="square" anchor="t" lIns="0" rIns="0" tIns="0" bIns="0">
             <a:spAutoFit/>
           </a:bodyPr>
           <a:lstStyle/>
@@ -12796,7 +12647,7 @@
           <a:noFill/>
         </p:spPr>
         <p:txBody>
-          <a:bodyPr wrap="square" lIns="0" tIns="0" rIns="0" bIns="0" anchor="t">
+          <a:bodyPr wrap="square" anchor="t" lIns="0" rIns="0" tIns="0" bIns="0">
             <a:spAutoFit/>
           </a:bodyPr>
           <a:lstStyle/>
@@ -12862,7 +12713,6 @@
           <a:lstStyle/>
           <a:p>
             <a:pPr algn="ctr"/>
-            <a:endParaRPr/>
           </a:p>
         </p:txBody>
       </p:sp>
@@ -12911,7 +12761,6 @@
           <a:lstStyle/>
           <a:p>
             <a:pPr algn="ctr"/>
-            <a:endParaRPr/>
           </a:p>
         </p:txBody>
       </p:sp>
@@ -12932,7 +12781,7 @@
           <a:noFill/>
         </p:spPr>
         <p:txBody>
-          <a:bodyPr wrap="square" lIns="0" tIns="0" rIns="0" bIns="0" anchor="t">
+          <a:bodyPr wrap="square" anchor="t" lIns="0" rIns="0" tIns="0" bIns="0">
             <a:spAutoFit/>
           </a:bodyPr>
           <a:lstStyle/>
@@ -12968,7 +12817,7 @@
           <a:noFill/>
         </p:spPr>
         <p:txBody>
-          <a:bodyPr wrap="square" lIns="0" tIns="0" rIns="0" bIns="0" anchor="t">
+          <a:bodyPr wrap="square" anchor="t" lIns="0" rIns="0" tIns="0" bIns="0">
             <a:spAutoFit/>
           </a:bodyPr>
           <a:lstStyle/>
@@ -13034,7 +12883,6 @@
           <a:lstStyle/>
           <a:p>
             <a:pPr algn="ctr"/>
-            <a:endParaRPr/>
           </a:p>
         </p:txBody>
       </p:sp>
@@ -13083,7 +12931,6 @@
           <a:lstStyle/>
           <a:p>
             <a:pPr algn="ctr"/>
-            <a:endParaRPr/>
           </a:p>
         </p:txBody>
       </p:sp>
@@ -13104,7 +12951,7 @@
           <a:noFill/>
         </p:spPr>
         <p:txBody>
-          <a:bodyPr wrap="square" lIns="0" tIns="0" rIns="0" bIns="0" anchor="t">
+          <a:bodyPr wrap="square" anchor="t" lIns="0" rIns="0" tIns="0" bIns="0">
             <a:spAutoFit/>
           </a:bodyPr>
           <a:lstStyle/>
@@ -13140,7 +12987,7 @@
           <a:noFill/>
         </p:spPr>
         <p:txBody>
-          <a:bodyPr wrap="square" lIns="0" tIns="0" rIns="0" bIns="0" anchor="t">
+          <a:bodyPr wrap="square" anchor="t" lIns="0" rIns="0" tIns="0" bIns="0">
             <a:spAutoFit/>
           </a:bodyPr>
           <a:lstStyle/>
@@ -13206,7 +13053,6 @@
           <a:lstStyle/>
           <a:p>
             <a:pPr algn="ctr"/>
-            <a:endParaRPr/>
           </a:p>
         </p:txBody>
       </p:sp>
@@ -13255,7 +13101,6 @@
           <a:lstStyle/>
           <a:p>
             <a:pPr algn="ctr"/>
-            <a:endParaRPr/>
           </a:p>
         </p:txBody>
       </p:sp>
@@ -13276,7 +13121,7 @@
           <a:noFill/>
         </p:spPr>
         <p:txBody>
-          <a:bodyPr wrap="square" lIns="0" tIns="0" rIns="0" bIns="0" anchor="t">
+          <a:bodyPr wrap="square" anchor="t" lIns="0" rIns="0" tIns="0" bIns="0">
             <a:spAutoFit/>
           </a:bodyPr>
           <a:lstStyle/>
@@ -13312,14 +13157,14 @@
           <a:noFill/>
         </p:spPr>
         <p:txBody>
-          <a:bodyPr wrap="square" lIns="0" tIns="0" rIns="0" bIns="0" anchor="t">
+          <a:bodyPr wrap="square" anchor="t" lIns="0" rIns="0" tIns="0" bIns="0">
             <a:spAutoFit/>
           </a:bodyPr>
           <a:lstStyle/>
           <a:p>
             <a:pPr algn="ctr"/>
             <a:r>
-              <a:rPr sz="1500" b="0" dirty="0" err="1">
+              <a:rPr sz="1500" b="0">
                 <a:solidFill>
                   <a:srgbClr val="F0846B"/>
                 </a:solidFill>
@@ -13328,13 +13173,6 @@
               </a:rPr>
               <a:t>恳请老师与同学们批评指正</a:t>
             </a:r>
-            <a:endParaRPr sz="1500" b="0" dirty="0">
-              <a:solidFill>
-                <a:srgbClr val="F0846B"/>
-              </a:solidFill>
-              <a:latin typeface="Bahnschrift"/>
-              <a:ea typeface="微软雅黑"/>
-            </a:endParaRPr>
           </a:p>
         </p:txBody>
       </p:sp>
@@ -13347,7 +13185,7 @@
 </file>
 
 <file path=ppt/slides/slide2.xml><?xml version="1.0" encoding="utf-8"?>
-<p:sld xmlns:a="http://schemas.openxmlformats.org/drawingml/2006/main" xmlns:r="http://schemas.openxmlformats.org/officeDocument/2006/relationships" xmlns:p="http://schemas.openxmlformats.org/presentationml/2006/main">
+<p:sld xmlns:a="http://schemas.openxmlformats.org/drawingml/2006/main" xmlns:p="http://schemas.openxmlformats.org/presentationml/2006/main" xmlns:r="http://schemas.openxmlformats.org/officeDocument/2006/relationships">
   <p:cSld>
     <p:bg>
       <p:bgPr>
@@ -13363,14 +13201,7 @@
         <p:cNvGrpSpPr/>
         <p:nvPr/>
       </p:nvGrpSpPr>
-      <p:grpSpPr>
-        <a:xfrm>
-          <a:off x="0" y="0"/>
-          <a:ext cx="0" cy="0"/>
-          <a:chOff x="0" y="0"/>
-          <a:chExt cx="0" cy="0"/>
-        </a:xfrm>
-      </p:grpSpPr>
+      <p:grpSpPr/>
       <p:sp>
         <p:nvSpPr>
           <p:cNvPr id="2" name="Rounded Rectangle 1"/>
@@ -13410,7 +13241,7 @@
           </a:fontRef>
         </p:style>
         <p:txBody>
-          <a:bodyPr wrap="none" lIns="45720" tIns="0" rIns="45720" bIns="0" rtlCol="0" anchor="ctr"/>
+          <a:bodyPr rtlCol="0" anchor="ctr" wrap="none" lIns="45720" rIns="45720" tIns="0" bIns="0"/>
           <a:lstStyle/>
           <a:p>
             <a:pPr algn="ctr"/>
@@ -13444,7 +13275,7 @@
           <a:noFill/>
         </p:spPr>
         <p:txBody>
-          <a:bodyPr wrap="square" lIns="0" tIns="0" rIns="0" bIns="0" anchor="ctr">
+          <a:bodyPr wrap="square" anchor="ctr" lIns="0" rIns="0" tIns="0" bIns="0">
             <a:spAutoFit/>
           </a:bodyPr>
           <a:lstStyle/>
@@ -13516,7 +13347,7 @@
           <a:noFill/>
         </p:spPr>
         <p:txBody>
-          <a:bodyPr wrap="square" lIns="0" tIns="0" rIns="0" bIns="0" anchor="t">
+          <a:bodyPr wrap="square" anchor="t" lIns="0" rIns="0" tIns="0" bIns="0">
             <a:spAutoFit/>
           </a:bodyPr>
           <a:lstStyle/>
@@ -13574,7 +13405,7 @@
           </a:fontRef>
         </p:style>
         <p:txBody>
-          <a:bodyPr wrap="none" lIns="45720" tIns="0" rIns="45720" bIns="0" rtlCol="0" anchor="ctr"/>
+          <a:bodyPr rtlCol="0" anchor="ctr" wrap="none" lIns="45720" rIns="45720" tIns="0" bIns="0"/>
           <a:lstStyle/>
           <a:p>
             <a:pPr algn="ctr"/>
@@ -13608,7 +13439,7 @@
           <a:noFill/>
         </p:spPr>
         <p:txBody>
-          <a:bodyPr wrap="square" lIns="0" tIns="0" rIns="0" bIns="0" anchor="ctr">
+          <a:bodyPr wrap="square" anchor="ctr" lIns="0" rIns="0" tIns="0" bIns="0">
             <a:spAutoFit/>
           </a:bodyPr>
           <a:lstStyle/>
@@ -13666,7 +13497,7 @@
           </a:fontRef>
         </p:style>
         <p:txBody>
-          <a:bodyPr wrap="none" lIns="45720" tIns="0" rIns="45720" bIns="0" rtlCol="0" anchor="ctr"/>
+          <a:bodyPr rtlCol="0" anchor="ctr" wrap="none" lIns="45720" rIns="45720" tIns="0" bIns="0"/>
           <a:lstStyle/>
           <a:p>
             <a:pPr algn="ctr"/>
@@ -13700,7 +13531,7 @@
           <a:noFill/>
         </p:spPr>
         <p:txBody>
-          <a:bodyPr wrap="square" lIns="0" tIns="0" rIns="0" bIns="0" anchor="ctr">
+          <a:bodyPr wrap="square" anchor="ctr" lIns="0" rIns="0" tIns="0" bIns="0">
             <a:spAutoFit/>
           </a:bodyPr>
           <a:lstStyle/>
@@ -13758,7 +13589,7 @@
           </a:fontRef>
         </p:style>
         <p:txBody>
-          <a:bodyPr wrap="none" lIns="45720" tIns="0" rIns="45720" bIns="0" rtlCol="0" anchor="ctr"/>
+          <a:bodyPr rtlCol="0" anchor="ctr" wrap="none" lIns="45720" rIns="45720" tIns="0" bIns="0"/>
           <a:lstStyle/>
           <a:p>
             <a:pPr algn="ctr"/>
@@ -13792,7 +13623,7 @@
           <a:noFill/>
         </p:spPr>
         <p:txBody>
-          <a:bodyPr wrap="square" lIns="0" tIns="0" rIns="0" bIns="0" anchor="ctr">
+          <a:bodyPr wrap="square" anchor="ctr" lIns="0" rIns="0" tIns="0" bIns="0">
             <a:spAutoFit/>
           </a:bodyPr>
           <a:lstStyle/>
@@ -13850,7 +13681,7 @@
           </a:fontRef>
         </p:style>
         <p:txBody>
-          <a:bodyPr wrap="none" lIns="45720" tIns="0" rIns="45720" bIns="0" rtlCol="0" anchor="ctr"/>
+          <a:bodyPr rtlCol="0" anchor="ctr" wrap="none" lIns="45720" rIns="45720" tIns="0" bIns="0"/>
           <a:lstStyle/>
           <a:p>
             <a:pPr algn="ctr"/>
@@ -13884,7 +13715,7 @@
           <a:noFill/>
         </p:spPr>
         <p:txBody>
-          <a:bodyPr wrap="square" lIns="0" tIns="0" rIns="0" bIns="0" anchor="ctr">
+          <a:bodyPr wrap="square" anchor="ctr" lIns="0" rIns="0" tIns="0" bIns="0">
             <a:spAutoFit/>
           </a:bodyPr>
           <a:lstStyle/>
@@ -13942,7 +13773,7 @@
           </a:fontRef>
         </p:style>
         <p:txBody>
-          <a:bodyPr wrap="none" lIns="45720" tIns="0" rIns="45720" bIns="0" rtlCol="0" anchor="ctr"/>
+          <a:bodyPr rtlCol="0" anchor="ctr" wrap="none" lIns="45720" rIns="45720" tIns="0" bIns="0"/>
           <a:lstStyle/>
           <a:p>
             <a:pPr algn="ctr"/>
@@ -13976,7 +13807,7 @@
           <a:noFill/>
         </p:spPr>
         <p:txBody>
-          <a:bodyPr wrap="square" lIns="0" tIns="0" rIns="0" bIns="0" anchor="ctr">
+          <a:bodyPr wrap="square" anchor="ctr" lIns="0" rIns="0" tIns="0" bIns="0">
             <a:spAutoFit/>
           </a:bodyPr>
           <a:lstStyle/>
@@ -14034,7 +13865,7 @@
           </a:fontRef>
         </p:style>
         <p:txBody>
-          <a:bodyPr wrap="none" lIns="45720" tIns="0" rIns="45720" bIns="0" rtlCol="0" anchor="ctr"/>
+          <a:bodyPr rtlCol="0" anchor="ctr" wrap="none" lIns="45720" rIns="45720" tIns="0" bIns="0"/>
           <a:lstStyle/>
           <a:p>
             <a:pPr algn="ctr"/>
@@ -14068,7 +13899,7 @@
           <a:noFill/>
         </p:spPr>
         <p:txBody>
-          <a:bodyPr wrap="square" lIns="0" tIns="0" rIns="0" bIns="0" anchor="ctr">
+          <a:bodyPr wrap="square" anchor="ctr" lIns="0" rIns="0" tIns="0" bIns="0">
             <a:spAutoFit/>
           </a:bodyPr>
           <a:lstStyle/>
@@ -14126,7 +13957,7 @@
           </a:fontRef>
         </p:style>
         <p:txBody>
-          <a:bodyPr wrap="none" lIns="45720" tIns="0" rIns="45720" bIns="0" rtlCol="0" anchor="ctr"/>
+          <a:bodyPr rtlCol="0" anchor="ctr" wrap="none" lIns="45720" rIns="45720" tIns="0" bIns="0"/>
           <a:lstStyle/>
           <a:p>
             <a:pPr algn="ctr"/>
@@ -14160,7 +13991,7 @@
           <a:noFill/>
         </p:spPr>
         <p:txBody>
-          <a:bodyPr wrap="square" lIns="0" tIns="0" rIns="0" bIns="0" anchor="ctr">
+          <a:bodyPr wrap="square" anchor="ctr" lIns="0" rIns="0" tIns="0" bIns="0">
             <a:spAutoFit/>
           </a:bodyPr>
           <a:lstStyle/>
@@ -14222,7 +14053,6 @@
           <a:lstStyle/>
           <a:p>
             <a:pPr algn="ctr"/>
-            <a:endParaRPr/>
           </a:p>
         </p:txBody>
       </p:sp>
@@ -14271,7 +14101,6 @@
           <a:lstStyle/>
           <a:p>
             <a:pPr algn="ctr"/>
-            <a:endParaRPr/>
           </a:p>
         </p:txBody>
       </p:sp>
@@ -14314,7 +14143,7 @@
           </a:fontRef>
         </p:style>
         <p:txBody>
-          <a:bodyPr wrap="none" lIns="45720" tIns="0" rIns="45720" bIns="0" rtlCol="0" anchor="ctr"/>
+          <a:bodyPr rtlCol="0" anchor="ctr" wrap="none" lIns="45720" rIns="45720" tIns="0" bIns="0"/>
           <a:lstStyle/>
           <a:p>
             <a:pPr algn="ctr"/>
@@ -14348,7 +14177,7 @@
           <a:noFill/>
         </p:spPr>
         <p:txBody>
-          <a:bodyPr wrap="square" lIns="0" tIns="0" rIns="0" bIns="0" anchor="ctr">
+          <a:bodyPr wrap="square" anchor="ctr" lIns="0" rIns="0" tIns="0" bIns="0">
             <a:spAutoFit/>
           </a:bodyPr>
           <a:lstStyle/>
@@ -14384,7 +14213,7 @@
           <a:noFill/>
         </p:spPr>
         <p:txBody>
-          <a:bodyPr wrap="square" lIns="0" tIns="0" rIns="0" bIns="0" anchor="ctr">
+          <a:bodyPr wrap="square" anchor="ctr" lIns="0" rIns="0" tIns="0" bIns="0">
             <a:spAutoFit/>
           </a:bodyPr>
           <a:lstStyle/>
@@ -14424,7 +14253,7 @@
           <a:noFill/>
         </p:spPr>
         <p:txBody>
-          <a:bodyPr wrap="square" lIns="0" tIns="0" rIns="0" bIns="0" anchor="ctr">
+          <a:bodyPr wrap="square" anchor="ctr" lIns="0" rIns="0" tIns="0" bIns="0">
             <a:spAutoFit/>
           </a:bodyPr>
           <a:lstStyle/>
@@ -14460,7 +14289,7 @@
           <a:noFill/>
         </p:spPr>
         <p:txBody>
-          <a:bodyPr wrap="square" lIns="0" tIns="0" rIns="0" bIns="0" anchor="ctr">
+          <a:bodyPr wrap="square" anchor="ctr" lIns="0" rIns="0" tIns="0" bIns="0">
             <a:spAutoFit/>
           </a:bodyPr>
           <a:lstStyle/>
@@ -14500,7 +14329,7 @@
           <a:noFill/>
         </p:spPr>
         <p:txBody>
-          <a:bodyPr wrap="square" lIns="0" tIns="0" rIns="0" bIns="0" anchor="ctr">
+          <a:bodyPr wrap="square" anchor="ctr" lIns="0" rIns="0" tIns="0" bIns="0">
             <a:spAutoFit/>
           </a:bodyPr>
           <a:lstStyle/>
@@ -14536,7 +14365,7 @@
           <a:noFill/>
         </p:spPr>
         <p:txBody>
-          <a:bodyPr wrap="square" lIns="0" tIns="0" rIns="0" bIns="0" anchor="ctr">
+          <a:bodyPr wrap="square" anchor="ctr" lIns="0" rIns="0" tIns="0" bIns="0">
             <a:spAutoFit/>
           </a:bodyPr>
           <a:lstStyle/>
@@ -14576,7 +14405,7 @@
           <a:noFill/>
         </p:spPr>
         <p:txBody>
-          <a:bodyPr wrap="square" lIns="0" tIns="0" rIns="0" bIns="0" anchor="ctr">
+          <a:bodyPr wrap="square" anchor="ctr" lIns="0" rIns="0" tIns="0" bIns="0">
             <a:spAutoFit/>
           </a:bodyPr>
           <a:lstStyle/>
@@ -14612,7 +14441,7 @@
           <a:noFill/>
         </p:spPr>
         <p:txBody>
-          <a:bodyPr wrap="square" lIns="0" tIns="0" rIns="0" bIns="0" anchor="ctr">
+          <a:bodyPr wrap="square" anchor="ctr" lIns="0" rIns="0" tIns="0" bIns="0">
             <a:spAutoFit/>
           </a:bodyPr>
           <a:lstStyle/>
@@ -14644,7 +14473,7 @@
 </file>
 
 <file path=ppt/slides/slide3.xml><?xml version="1.0" encoding="utf-8"?>
-<p:sld xmlns:a="http://schemas.openxmlformats.org/drawingml/2006/main" xmlns:r="http://schemas.openxmlformats.org/officeDocument/2006/relationships" xmlns:p="http://schemas.openxmlformats.org/presentationml/2006/main">
+<p:sld xmlns:a="http://schemas.openxmlformats.org/drawingml/2006/main" xmlns:p="http://schemas.openxmlformats.org/presentationml/2006/main" xmlns:r="http://schemas.openxmlformats.org/officeDocument/2006/relationships">
   <p:cSld>
     <p:bg>
       <p:bgPr>
@@ -14660,14 +14489,7 @@
         <p:cNvGrpSpPr/>
         <p:nvPr/>
       </p:nvGrpSpPr>
-      <p:grpSpPr>
-        <a:xfrm>
-          <a:off x="0" y="0"/>
-          <a:ext cx="0" cy="0"/>
-          <a:chOff x="0" y="0"/>
-          <a:chExt cx="0" cy="0"/>
-        </a:xfrm>
-      </p:grpSpPr>
+      <p:grpSpPr/>
       <p:sp>
         <p:nvSpPr>
           <p:cNvPr id="2" name="Rounded Rectangle 1"/>
@@ -14707,7 +14529,7 @@
           </a:fontRef>
         </p:style>
         <p:txBody>
-          <a:bodyPr wrap="none" lIns="45720" tIns="0" rIns="45720" bIns="0" rtlCol="0" anchor="ctr"/>
+          <a:bodyPr rtlCol="0" anchor="ctr" wrap="none" lIns="45720" rIns="45720" tIns="0" bIns="0"/>
           <a:lstStyle/>
           <a:p>
             <a:pPr algn="ctr"/>
@@ -14741,7 +14563,7 @@
           <a:noFill/>
         </p:spPr>
         <p:txBody>
-          <a:bodyPr wrap="square" lIns="0" tIns="0" rIns="0" bIns="0" anchor="ctr">
+          <a:bodyPr wrap="square" anchor="ctr" lIns="0" rIns="0" tIns="0" bIns="0">
             <a:spAutoFit/>
           </a:bodyPr>
           <a:lstStyle/>
@@ -14813,7 +14635,7 @@
           <a:noFill/>
         </p:spPr>
         <p:txBody>
-          <a:bodyPr wrap="square" lIns="0" tIns="0" rIns="0" bIns="0" anchor="t">
+          <a:bodyPr wrap="square" anchor="t" lIns="0" rIns="0" tIns="0" bIns="0">
             <a:spAutoFit/>
           </a:bodyPr>
           <a:lstStyle/>
@@ -14840,7 +14662,7 @@
         </p:nvSpPr>
         <p:spPr>
           <a:xfrm>
-            <a:off x="548640" y="1153878"/>
+            <a:off x="548640" y="1152144"/>
             <a:ext cx="11091672" cy="384048"/>
           </a:xfrm>
           <a:prstGeom prst="rect">
@@ -14849,7 +14671,7 @@
           <a:noFill/>
         </p:spPr>
         <p:txBody>
-          <a:bodyPr wrap="square" lIns="0" tIns="0" rIns="0" bIns="0" anchor="t">
+          <a:bodyPr wrap="square" anchor="t" lIns="0" rIns="0" tIns="0" bIns="0">
             <a:spAutoFit/>
           </a:bodyPr>
           <a:lstStyle/>
@@ -14921,7 +14743,6 @@
           <a:lstStyle/>
           <a:p>
             <a:pPr algn="ctr"/>
-            <a:endParaRPr/>
           </a:p>
         </p:txBody>
       </p:sp>
@@ -14970,7 +14791,6 @@
           <a:lstStyle/>
           <a:p>
             <a:pPr algn="ctr"/>
-            <a:endParaRPr/>
           </a:p>
         </p:txBody>
       </p:sp>
@@ -15013,7 +14833,7 @@
           </a:fontRef>
         </p:style>
         <p:txBody>
-          <a:bodyPr wrap="none" lIns="45720" tIns="0" rIns="45720" bIns="0" rtlCol="0" anchor="ctr"/>
+          <a:bodyPr rtlCol="0" anchor="ctr" wrap="none" lIns="45720" rIns="45720" tIns="0" bIns="0"/>
           <a:lstStyle/>
           <a:p>
             <a:pPr algn="ctr"/>
@@ -15047,7 +14867,7 @@
           <a:noFill/>
         </p:spPr>
         <p:txBody>
-          <a:bodyPr wrap="square" lIns="0" tIns="0" rIns="0" bIns="0" anchor="t">
+          <a:bodyPr wrap="square" anchor="t" lIns="0" rIns="0" tIns="0" bIns="0">
             <a:spAutoFit/>
           </a:bodyPr>
           <a:lstStyle/>
@@ -15130,7 +14950,6 @@
           <a:lstStyle/>
           <a:p>
             <a:pPr algn="ctr"/>
-            <a:endParaRPr/>
           </a:p>
         </p:txBody>
       </p:sp>
@@ -15179,7 +14998,6 @@
           <a:lstStyle/>
           <a:p>
             <a:pPr algn="ctr"/>
-            <a:endParaRPr/>
           </a:p>
         </p:txBody>
       </p:sp>
@@ -15222,7 +15040,7 @@
           </a:fontRef>
         </p:style>
         <p:txBody>
-          <a:bodyPr wrap="none" lIns="45720" tIns="0" rIns="45720" bIns="0" rtlCol="0" anchor="ctr"/>
+          <a:bodyPr rtlCol="0" anchor="ctr" wrap="none" lIns="45720" rIns="45720" tIns="0" bIns="0"/>
           <a:lstStyle/>
           <a:p>
             <a:pPr algn="ctr"/>
@@ -15256,7 +15074,7 @@
           <a:noFill/>
         </p:spPr>
         <p:txBody>
-          <a:bodyPr wrap="square" lIns="0" tIns="0" rIns="0" bIns="0" anchor="t">
+          <a:bodyPr wrap="square" anchor="t" lIns="0" rIns="0" tIns="0" bIns="0">
             <a:spAutoFit/>
           </a:bodyPr>
           <a:lstStyle/>
@@ -15339,7 +15157,6 @@
           <a:lstStyle/>
           <a:p>
             <a:pPr algn="ctr"/>
-            <a:endParaRPr/>
           </a:p>
         </p:txBody>
       </p:sp>
@@ -15388,7 +15205,6 @@
           <a:lstStyle/>
           <a:p>
             <a:pPr algn="ctr"/>
-            <a:endParaRPr/>
           </a:p>
         </p:txBody>
       </p:sp>
@@ -15431,7 +15247,7 @@
           </a:fontRef>
         </p:style>
         <p:txBody>
-          <a:bodyPr wrap="none" lIns="45720" tIns="0" rIns="45720" bIns="0" rtlCol="0" anchor="ctr"/>
+          <a:bodyPr rtlCol="0" anchor="ctr" wrap="none" lIns="45720" rIns="45720" tIns="0" bIns="0"/>
           <a:lstStyle/>
           <a:p>
             <a:pPr algn="ctr"/>
@@ -15465,7 +15281,7 @@
           <a:noFill/>
         </p:spPr>
         <p:txBody>
-          <a:bodyPr wrap="square" lIns="0" tIns="0" rIns="0" bIns="0" anchor="t">
+          <a:bodyPr wrap="square" anchor="t" lIns="0" rIns="0" tIns="0" bIns="0">
             <a:spAutoFit/>
           </a:bodyPr>
           <a:lstStyle/>
@@ -15548,7 +15364,6 @@
           <a:lstStyle/>
           <a:p>
             <a:pPr algn="ctr"/>
-            <a:endParaRPr/>
           </a:p>
         </p:txBody>
       </p:sp>
@@ -15597,7 +15412,6 @@
           <a:lstStyle/>
           <a:p>
             <a:pPr algn="ctr"/>
-            <a:endParaRPr/>
           </a:p>
         </p:txBody>
       </p:sp>
@@ -15640,7 +15454,7 @@
           </a:fontRef>
         </p:style>
         <p:txBody>
-          <a:bodyPr wrap="none" lIns="45720" tIns="0" rIns="45720" bIns="0" rtlCol="0" anchor="ctr"/>
+          <a:bodyPr rtlCol="0" anchor="ctr" wrap="none" lIns="45720" rIns="45720" tIns="0" bIns="0"/>
           <a:lstStyle/>
           <a:p>
             <a:pPr algn="ctr"/>
@@ -15674,7 +15488,7 @@
           <a:noFill/>
         </p:spPr>
         <p:txBody>
-          <a:bodyPr wrap="square" lIns="0" tIns="0" rIns="0" bIns="0" anchor="t">
+          <a:bodyPr wrap="square" anchor="t" lIns="0" rIns="0" tIns="0" bIns="0">
             <a:spAutoFit/>
           </a:bodyPr>
           <a:lstStyle/>
@@ -15757,7 +15571,6 @@
           <a:lstStyle/>
           <a:p>
             <a:pPr algn="ctr"/>
-            <a:endParaRPr/>
           </a:p>
         </p:txBody>
       </p:sp>
@@ -15806,7 +15619,6 @@
           <a:lstStyle/>
           <a:p>
             <a:pPr algn="ctr"/>
-            <a:endParaRPr/>
           </a:p>
         </p:txBody>
       </p:sp>
@@ -15849,7 +15661,7 @@
           </a:fontRef>
         </p:style>
         <p:txBody>
-          <a:bodyPr wrap="none" lIns="45720" tIns="0" rIns="45720" bIns="0" rtlCol="0" anchor="ctr"/>
+          <a:bodyPr rtlCol="0" anchor="ctr" wrap="none" lIns="45720" rIns="45720" tIns="0" bIns="0"/>
           <a:lstStyle/>
           <a:p>
             <a:pPr algn="ctr"/>
@@ -15875,7 +15687,7 @@
         <p:spPr>
           <a:xfrm>
             <a:off x="6903720" y="2395728"/>
-            <a:ext cx="4480560" cy="993734"/>
+            <a:ext cx="4480560" cy="2194560"/>
           </a:xfrm>
           <a:prstGeom prst="rect">
             <a:avLst/>
@@ -15883,7 +15695,7 @@
           <a:noFill/>
         </p:spPr>
         <p:txBody>
-          <a:bodyPr wrap="square" lIns="0" tIns="0" rIns="0" bIns="0" anchor="t">
+          <a:bodyPr wrap="square" anchor="t" lIns="0" rIns="0" tIns="0" bIns="0">
             <a:spAutoFit/>
           </a:bodyPr>
           <a:lstStyle/>
@@ -15894,7 +15706,7 @@
               </a:spcAft>
             </a:pPr>
             <a:r>
-              <a:rPr sz="1600" b="1" dirty="0" err="1">
+              <a:rPr sz="1600" b="1">
                 <a:solidFill>
                   <a:srgbClr val="FFFFFF"/>
                 </a:solidFill>
@@ -15903,13 +15715,6 @@
               </a:rPr>
               <a:t>大模型技术日趋成熟</a:t>
             </a:r>
-            <a:endParaRPr sz="1600" b="1" dirty="0">
-              <a:solidFill>
-                <a:srgbClr val="FFFFFF"/>
-              </a:solidFill>
-              <a:latin typeface="Bahnschrift"/>
-              <a:ea typeface="微软雅黑"/>
-            </a:endParaRPr>
           </a:p>
           <a:p>
             <a:pPr algn="l">
@@ -15921,52 +15726,15 @@
               </a:spcAft>
             </a:pPr>
             <a:r>
-              <a:rPr sz="1100" b="0" dirty="0">
+              <a:rPr sz="1100" b="0">
                 <a:solidFill>
                   <a:srgbClr val="D9E4DE"/>
                 </a:solidFill>
                 <a:latin typeface="Bahnschrift"/>
                 <a:ea typeface="微软雅黑"/>
               </a:rPr>
-              <a:t>·  </a:t>
-            </a:r>
-            <a:r>
-              <a:rPr sz="1100" b="0" dirty="0" err="1">
-                <a:solidFill>
-                  <a:srgbClr val="D9E4DE"/>
-                </a:solidFill>
-                <a:latin typeface="Bahnschrift"/>
-                <a:ea typeface="微软雅黑"/>
-              </a:rPr>
-              <a:t>自然语言</a:t>
-            </a:r>
-            <a:r>
-              <a:rPr sz="1100" b="0" dirty="0">
-                <a:solidFill>
-                  <a:srgbClr val="D9E4DE"/>
-                </a:solidFill>
-                <a:latin typeface="Bahnschrift"/>
-                <a:ea typeface="微软雅黑"/>
-              </a:rPr>
-              <a:t> → </a:t>
-            </a:r>
-            <a:r>
-              <a:rPr sz="1100" b="0" dirty="0" err="1">
-                <a:solidFill>
-                  <a:srgbClr val="D9E4DE"/>
-                </a:solidFill>
-                <a:latin typeface="Bahnschrift"/>
-                <a:ea typeface="微软雅黑"/>
-              </a:rPr>
-              <a:t>结构化学习画像</a:t>
-            </a:r>
-            <a:endParaRPr sz="1100" b="0" dirty="0">
-              <a:solidFill>
-                <a:srgbClr val="D9E4DE"/>
-              </a:solidFill>
-              <a:latin typeface="Bahnschrift"/>
-              <a:ea typeface="微软雅黑"/>
-            </a:endParaRPr>
+              <a:t>·  自然语言 → 结构化学习画像</a:t>
+            </a:r>
           </a:p>
           <a:p>
             <a:pPr algn="l">
@@ -15978,129 +15746,32 @@
               </a:spcAft>
             </a:pPr>
             <a:r>
-              <a:rPr sz="1100" b="0" dirty="0">
+              <a:rPr sz="1100" b="0">
                 <a:solidFill>
                   <a:srgbClr val="D9E4DE"/>
                 </a:solidFill>
                 <a:latin typeface="Bahnschrift"/>
                 <a:ea typeface="微软雅黑"/>
               </a:rPr>
-              <a:t>·  </a:t>
-            </a:r>
-            <a:r>
-              <a:rPr sz="1100" b="0" dirty="0" err="1">
-                <a:solidFill>
-                  <a:srgbClr val="D9E4DE"/>
-                </a:solidFill>
-                <a:latin typeface="Bahnschrift"/>
-                <a:ea typeface="微软雅黑"/>
-              </a:rPr>
-              <a:t>多源资料</a:t>
-            </a:r>
-            <a:r>
-              <a:rPr sz="1100" b="0" dirty="0">
-                <a:solidFill>
-                  <a:srgbClr val="D9E4DE"/>
-                </a:solidFill>
-                <a:latin typeface="Bahnschrift"/>
-                <a:ea typeface="微软雅黑"/>
-              </a:rPr>
-              <a:t> → </a:t>
-            </a:r>
-            <a:r>
-              <a:rPr sz="1100" b="0" dirty="0" err="1">
-                <a:solidFill>
-                  <a:srgbClr val="D9E4DE"/>
-                </a:solidFill>
-                <a:latin typeface="Bahnschrift"/>
-                <a:ea typeface="微软雅黑"/>
-              </a:rPr>
-              <a:t>考点与权重分析</a:t>
-            </a:r>
-            <a:endParaRPr sz="1100" b="0" dirty="0">
-              <a:solidFill>
-                <a:srgbClr val="D9E4DE"/>
-              </a:solidFill>
-              <a:latin typeface="Bahnschrift"/>
-              <a:ea typeface="微软雅黑"/>
-            </a:endParaRPr>
+              <a:t>·  多源资料 → 考点与权重分析</a:t>
+            </a:r>
           </a:p>
           <a:p>
             <a:pPr algn="l">
               <a:lnSpc>
                 <a:spcPct val="115000"/>
               </a:lnSpc>
-              <a:spcAft>
-                <a:spcPts val="800"/>
-              </a:spcAft>
             </a:pPr>
             <a:r>
-              <a:rPr sz="1100" b="0" dirty="0">
+              <a:rPr sz="1100" b="0">
                 <a:solidFill>
                   <a:srgbClr val="D9E4DE"/>
                 </a:solidFill>
                 <a:latin typeface="Bahnschrift"/>
                 <a:ea typeface="微软雅黑"/>
               </a:rPr>
-              <a:t>·  </a:t>
-            </a:r>
-            <a:r>
-              <a:rPr sz="1100" b="0" dirty="0" err="1">
-                <a:solidFill>
-                  <a:srgbClr val="D9E4DE"/>
-                </a:solidFill>
-                <a:latin typeface="Bahnschrift"/>
-                <a:ea typeface="微软雅黑"/>
-              </a:rPr>
-              <a:t>个性化生成</a:t>
-            </a:r>
-            <a:r>
-              <a:rPr sz="1100" b="0" dirty="0">
-                <a:solidFill>
-                  <a:srgbClr val="D9E4DE"/>
-                </a:solidFill>
-                <a:latin typeface="Bahnschrift"/>
-                <a:ea typeface="微软雅黑"/>
-              </a:rPr>
-              <a:t> → </a:t>
-            </a:r>
-            <a:r>
-              <a:rPr sz="1100" b="0" dirty="0" err="1">
-                <a:solidFill>
-                  <a:srgbClr val="D9E4DE"/>
-                </a:solidFill>
-                <a:latin typeface="Bahnschrift"/>
-                <a:ea typeface="微软雅黑"/>
-              </a:rPr>
-              <a:t>复习计划</a:t>
-            </a:r>
-            <a:r>
-              <a:rPr sz="1100" b="0" dirty="0">
-                <a:solidFill>
-                  <a:srgbClr val="D9E4DE"/>
-                </a:solidFill>
-                <a:latin typeface="Bahnschrift"/>
-                <a:ea typeface="微软雅黑"/>
-              </a:rPr>
-              <a:t> / </a:t>
-            </a:r>
-            <a:r>
-              <a:rPr sz="1100" b="0" dirty="0" err="1">
-                <a:solidFill>
-                  <a:srgbClr val="D9E4DE"/>
-                </a:solidFill>
-                <a:latin typeface="Bahnschrift"/>
-                <a:ea typeface="微软雅黑"/>
-              </a:rPr>
-              <a:t>自测题</a:t>
-            </a:r>
-            <a:endParaRPr sz="1100" b="0" dirty="0">
-              <a:solidFill>
-                <a:srgbClr val="D9E4DE"/>
-              </a:solidFill>
-              <a:latin typeface="Bahnschrift"/>
-              <a:ea typeface="微软雅黑"/>
-            </a:endParaRPr>
+              <a:t>·  个性化生成 → 复习计划 / 自测题</a:t>
+            </a:r>
           </a:p>
         </p:txBody>
       </p:sp>
@@ -16147,7 +15818,6 @@
           <a:lstStyle/>
           <a:p>
             <a:pPr algn="ctr"/>
-            <a:endParaRPr/>
           </a:p>
         </p:txBody>
       </p:sp>
@@ -16196,7 +15866,6 @@
           <a:lstStyle/>
           <a:p>
             <a:pPr algn="ctr"/>
-            <a:endParaRPr/>
           </a:p>
         </p:txBody>
       </p:sp>
@@ -16217,7 +15886,7 @@
           <a:noFill/>
         </p:spPr>
         <p:txBody>
-          <a:bodyPr wrap="square" lIns="0" tIns="0" rIns="0" bIns="0" anchor="t">
+          <a:bodyPr wrap="square" anchor="t" lIns="0" rIns="0" tIns="0" bIns="0">
             <a:spAutoFit/>
           </a:bodyPr>
           <a:lstStyle/>
@@ -16272,7 +15941,7 @@
 </file>
 
 <file path=ppt/slides/slide4.xml><?xml version="1.0" encoding="utf-8"?>
-<p:sld xmlns:a="http://schemas.openxmlformats.org/drawingml/2006/main" xmlns:r="http://schemas.openxmlformats.org/officeDocument/2006/relationships" xmlns:p="http://schemas.openxmlformats.org/presentationml/2006/main">
+<p:sld xmlns:a="http://schemas.openxmlformats.org/drawingml/2006/main" xmlns:p="http://schemas.openxmlformats.org/presentationml/2006/main" xmlns:r="http://schemas.openxmlformats.org/officeDocument/2006/relationships">
   <p:cSld>
     <p:bg>
       <p:bgPr>
@@ -16288,14 +15957,7 @@
         <p:cNvGrpSpPr/>
         <p:nvPr/>
       </p:nvGrpSpPr>
-      <p:grpSpPr>
-        <a:xfrm>
-          <a:off x="0" y="0"/>
-          <a:ext cx="0" cy="0"/>
-          <a:chOff x="0" y="0"/>
-          <a:chExt cx="0" cy="0"/>
-        </a:xfrm>
-      </p:grpSpPr>
+      <p:grpSpPr/>
       <p:sp>
         <p:nvSpPr>
           <p:cNvPr id="2" name="Rounded Rectangle 1"/>
@@ -16335,7 +15997,7 @@
           </a:fontRef>
         </p:style>
         <p:txBody>
-          <a:bodyPr wrap="none" lIns="45720" tIns="0" rIns="45720" bIns="0" rtlCol="0" anchor="ctr"/>
+          <a:bodyPr rtlCol="0" anchor="ctr" wrap="none" lIns="45720" rIns="45720" tIns="0" bIns="0"/>
           <a:lstStyle/>
           <a:p>
             <a:pPr algn="ctr"/>
@@ -16369,7 +16031,7 @@
           <a:noFill/>
         </p:spPr>
         <p:txBody>
-          <a:bodyPr wrap="square" lIns="0" tIns="0" rIns="0" bIns="0" anchor="ctr">
+          <a:bodyPr wrap="square" anchor="ctr" lIns="0" rIns="0" tIns="0" bIns="0">
             <a:spAutoFit/>
           </a:bodyPr>
           <a:lstStyle/>
@@ -16441,7 +16103,7 @@
           <a:noFill/>
         </p:spPr>
         <p:txBody>
-          <a:bodyPr wrap="square" lIns="0" tIns="0" rIns="0" bIns="0" anchor="t">
+          <a:bodyPr wrap="square" anchor="t" lIns="0" rIns="0" tIns="0" bIns="0">
             <a:spAutoFit/>
           </a:bodyPr>
           <a:lstStyle/>
@@ -16503,7 +16165,6 @@
           <a:lstStyle/>
           <a:p>
             <a:pPr algn="ctr"/>
-            <a:endParaRPr/>
           </a:p>
         </p:txBody>
       </p:sp>
@@ -16550,7 +16211,6 @@
           <a:lstStyle/>
           <a:p>
             <a:pPr algn="ctr"/>
-            <a:endParaRPr/>
           </a:p>
         </p:txBody>
       </p:sp>
@@ -16563,7 +16223,7 @@
         <p:spPr>
           <a:xfrm>
             <a:off x="822960" y="1243584"/>
-            <a:ext cx="10607040" cy="487313"/>
+            <a:ext cx="10607040" cy="1005840"/>
           </a:xfrm>
           <a:prstGeom prst="rect">
             <a:avLst/>
@@ -16571,7 +16231,7 @@
           <a:noFill/>
         </p:spPr>
         <p:txBody>
-          <a:bodyPr wrap="square" lIns="0" tIns="0" rIns="0" bIns="0" anchor="t">
+          <a:bodyPr wrap="square" anchor="t" lIns="0" rIns="0" tIns="0" bIns="0">
             <a:spAutoFit/>
           </a:bodyPr>
           <a:lstStyle/>
@@ -16582,54 +16242,24 @@
               </a:lnSpc>
             </a:pPr>
             <a:r>
-              <a:rPr sz="1500" b="1" dirty="0">
+              <a:rPr sz="1500" b="1">
                 <a:solidFill>
                   <a:srgbClr val="F0846B"/>
                 </a:solidFill>
                 <a:latin typeface="Bahnschrift"/>
                 <a:ea typeface="STZhongsong"/>
               </a:rPr>
-              <a:t>「</a:t>
-            </a:r>
-            <a:r>
-              <a:rPr sz="1500" b="1" dirty="0" err="1">
-                <a:solidFill>
-                  <a:srgbClr val="F0846B"/>
-                </a:solidFill>
-                <a:latin typeface="Bahnschrift"/>
-                <a:ea typeface="STZhongsong"/>
-              </a:rPr>
-              <a:t>期末周别慌</a:t>
-            </a:r>
-            <a:r>
-              <a:rPr sz="1500" b="1" dirty="0">
-                <a:solidFill>
-                  <a:srgbClr val="F0846B"/>
-                </a:solidFill>
-                <a:latin typeface="Bahnschrift"/>
-                <a:ea typeface="STZhongsong"/>
-              </a:rPr>
-              <a:t>！」</a:t>
-            </a:r>
-            <a:r>
-              <a:rPr sz="1250" b="0" dirty="0" err="1">
+              <a:t>「期末周别慌！」</a:t>
+            </a:r>
+            <a:r>
+              <a:rPr sz="1250" b="0">
                 <a:solidFill>
                   <a:srgbClr val="FFFFFF"/>
                 </a:solidFill>
                 <a:latin typeface="Bahnschrift"/>
                 <a:ea typeface="微软雅黑"/>
               </a:rPr>
-              <a:t>面向大学生期末复习场景：学生上传多源复习资料、描述备考目标与学习状态</a:t>
-            </a:r>
-            <a:r>
-              <a:rPr sz="1250" b="0" dirty="0">
-                <a:solidFill>
-                  <a:srgbClr val="FFFFFF"/>
-                </a:solidFill>
-                <a:latin typeface="Bahnschrift"/>
-                <a:ea typeface="微软雅黑"/>
-              </a:rPr>
-              <a:t>，</a:t>
+              <a:t>面向大学生期末复习场景：学生上传多源复习资料、描述备考目标与学习状态，</a:t>
             </a:r>
           </a:p>
           <a:p>
@@ -16639,24 +16269,14 @@
               </a:lnSpc>
             </a:pPr>
             <a:r>
-              <a:rPr sz="1250" b="0" dirty="0" err="1">
+              <a:rPr sz="1250" b="0">
                 <a:solidFill>
                   <a:srgbClr val="FFFFFF"/>
                 </a:solidFill>
                 <a:latin typeface="Bahnschrift"/>
                 <a:ea typeface="微软雅黑"/>
               </a:rPr>
-              <a:t>系统调用大模型生成个性化复习重点、按天计划与自测题，配套打卡与统计，一站式科学备考</a:t>
-            </a:r>
-            <a:r>
-              <a:rPr sz="1250" b="0" dirty="0">
-                <a:solidFill>
-                  <a:srgbClr val="FFFFFF"/>
-                </a:solidFill>
-                <a:latin typeface="Bahnschrift"/>
-                <a:ea typeface="微软雅黑"/>
-              </a:rPr>
-              <a:t>。</a:t>
+              <a:t>系统调用大模型生成个性化复习重点、按天计划与自测题，配套打卡与统计，一站式科学备考。</a:t>
             </a:r>
           </a:p>
         </p:txBody>
@@ -16678,7 +16298,7 @@
           <a:noFill/>
         </p:spPr>
         <p:txBody>
-          <a:bodyPr wrap="square" lIns="0" tIns="0" rIns="0" bIns="0" anchor="t">
+          <a:bodyPr wrap="square" anchor="t" lIns="0" rIns="0" tIns="0" bIns="0">
             <a:spAutoFit/>
           </a:bodyPr>
           <a:lstStyle/>
@@ -16740,7 +16360,6 @@
           <a:lstStyle/>
           <a:p>
             <a:pPr algn="ctr"/>
-            <a:endParaRPr/>
           </a:p>
         </p:txBody>
       </p:sp>
@@ -16789,7 +16408,6 @@
           <a:lstStyle/>
           <a:p>
             <a:pPr algn="ctr"/>
-            <a:endParaRPr/>
           </a:p>
         </p:txBody>
       </p:sp>
@@ -16810,7 +16428,7 @@
           <a:noFill/>
         </p:spPr>
         <p:txBody>
-          <a:bodyPr wrap="square" lIns="0" tIns="0" rIns="0" bIns="0" anchor="t">
+          <a:bodyPr wrap="square" anchor="t" lIns="0" rIns="0" tIns="0" bIns="0">
             <a:spAutoFit/>
           </a:bodyPr>
           <a:lstStyle/>
@@ -16846,7 +16464,7 @@
           <a:noFill/>
         </p:spPr>
         <p:txBody>
-          <a:bodyPr wrap="square" lIns="0" tIns="0" rIns="0" bIns="0" anchor="t">
+          <a:bodyPr wrap="square" anchor="t" lIns="0" rIns="0" tIns="0" bIns="0">
             <a:spAutoFit/>
           </a:bodyPr>
           <a:lstStyle/>
@@ -16882,7 +16500,7 @@
           <a:noFill/>
         </p:spPr>
         <p:txBody>
-          <a:bodyPr wrap="square" lIns="0" tIns="0" rIns="0" bIns="0" anchor="t">
+          <a:bodyPr wrap="square" anchor="t" lIns="0" rIns="0" tIns="0" bIns="0">
             <a:spAutoFit/>
           </a:bodyPr>
           <a:lstStyle/>
@@ -16944,7 +16562,6 @@
           <a:lstStyle/>
           <a:p>
             <a:pPr algn="ctr"/>
-            <a:endParaRPr/>
           </a:p>
         </p:txBody>
       </p:sp>
@@ -16993,7 +16610,6 @@
           <a:lstStyle/>
           <a:p>
             <a:pPr algn="ctr"/>
-            <a:endParaRPr/>
           </a:p>
         </p:txBody>
       </p:sp>
@@ -17014,7 +16630,7 @@
           <a:noFill/>
         </p:spPr>
         <p:txBody>
-          <a:bodyPr wrap="square" lIns="0" tIns="0" rIns="0" bIns="0" anchor="t">
+          <a:bodyPr wrap="square" anchor="t" lIns="0" rIns="0" tIns="0" bIns="0">
             <a:spAutoFit/>
           </a:bodyPr>
           <a:lstStyle/>
@@ -17050,7 +16666,7 @@
           <a:noFill/>
         </p:spPr>
         <p:txBody>
-          <a:bodyPr wrap="square" lIns="0" tIns="0" rIns="0" bIns="0" anchor="t">
+          <a:bodyPr wrap="square" anchor="t" lIns="0" rIns="0" tIns="0" bIns="0">
             <a:spAutoFit/>
           </a:bodyPr>
           <a:lstStyle/>
@@ -17086,7 +16702,7 @@
           <a:noFill/>
         </p:spPr>
         <p:txBody>
-          <a:bodyPr wrap="square" lIns="0" tIns="0" rIns="0" bIns="0" anchor="t">
+          <a:bodyPr wrap="square" anchor="t" lIns="0" rIns="0" tIns="0" bIns="0">
             <a:spAutoFit/>
           </a:bodyPr>
           <a:lstStyle/>
@@ -17148,7 +16764,6 @@
           <a:lstStyle/>
           <a:p>
             <a:pPr algn="ctr"/>
-            <a:endParaRPr/>
           </a:p>
         </p:txBody>
       </p:sp>
@@ -17197,7 +16812,6 @@
           <a:lstStyle/>
           <a:p>
             <a:pPr algn="ctr"/>
-            <a:endParaRPr/>
           </a:p>
         </p:txBody>
       </p:sp>
@@ -17218,7 +16832,7 @@
           <a:noFill/>
         </p:spPr>
         <p:txBody>
-          <a:bodyPr wrap="square" lIns="0" tIns="0" rIns="0" bIns="0" anchor="t">
+          <a:bodyPr wrap="square" anchor="t" lIns="0" rIns="0" tIns="0" bIns="0">
             <a:spAutoFit/>
           </a:bodyPr>
           <a:lstStyle/>
@@ -17254,7 +16868,7 @@
           <a:noFill/>
         </p:spPr>
         <p:txBody>
-          <a:bodyPr wrap="square" lIns="0" tIns="0" rIns="0" bIns="0" anchor="t">
+          <a:bodyPr wrap="square" anchor="t" lIns="0" rIns="0" tIns="0" bIns="0">
             <a:spAutoFit/>
           </a:bodyPr>
           <a:lstStyle/>
@@ -17290,7 +16904,7 @@
           <a:noFill/>
         </p:spPr>
         <p:txBody>
-          <a:bodyPr wrap="square" lIns="0" tIns="0" rIns="0" bIns="0" anchor="t">
+          <a:bodyPr wrap="square" anchor="t" lIns="0" rIns="0" tIns="0" bIns="0">
             <a:spAutoFit/>
           </a:bodyPr>
           <a:lstStyle/>
@@ -17352,7 +16966,6 @@
           <a:lstStyle/>
           <a:p>
             <a:pPr algn="ctr"/>
-            <a:endParaRPr/>
           </a:p>
         </p:txBody>
       </p:sp>
@@ -17401,7 +17014,6 @@
           <a:lstStyle/>
           <a:p>
             <a:pPr algn="ctr"/>
-            <a:endParaRPr/>
           </a:p>
         </p:txBody>
       </p:sp>
@@ -17422,7 +17034,7 @@
           <a:noFill/>
         </p:spPr>
         <p:txBody>
-          <a:bodyPr wrap="square" lIns="0" tIns="0" rIns="0" bIns="0" anchor="t">
+          <a:bodyPr wrap="square" anchor="t" lIns="0" rIns="0" tIns="0" bIns="0">
             <a:spAutoFit/>
           </a:bodyPr>
           <a:lstStyle/>
@@ -17458,7 +17070,7 @@
           <a:noFill/>
         </p:spPr>
         <p:txBody>
-          <a:bodyPr wrap="square" lIns="0" tIns="0" rIns="0" bIns="0" anchor="t">
+          <a:bodyPr wrap="square" anchor="t" lIns="0" rIns="0" tIns="0" bIns="0">
             <a:spAutoFit/>
           </a:bodyPr>
           <a:lstStyle/>
@@ -17494,7 +17106,7 @@
           <a:noFill/>
         </p:spPr>
         <p:txBody>
-          <a:bodyPr wrap="square" lIns="0" tIns="0" rIns="0" bIns="0" anchor="t">
+          <a:bodyPr wrap="square" anchor="t" lIns="0" rIns="0" tIns="0" bIns="0">
             <a:spAutoFit/>
           </a:bodyPr>
           <a:lstStyle/>
@@ -17556,7 +17168,6 @@
           <a:lstStyle/>
           <a:p>
             <a:pPr algn="ctr"/>
-            <a:endParaRPr/>
           </a:p>
         </p:txBody>
       </p:sp>
@@ -17605,7 +17216,6 @@
           <a:lstStyle/>
           <a:p>
             <a:pPr algn="ctr"/>
-            <a:endParaRPr/>
           </a:p>
         </p:txBody>
       </p:sp>
@@ -17626,7 +17236,7 @@
           <a:noFill/>
         </p:spPr>
         <p:txBody>
-          <a:bodyPr wrap="square" lIns="0" tIns="0" rIns="0" bIns="0" anchor="t">
+          <a:bodyPr wrap="square" anchor="t" lIns="0" rIns="0" tIns="0" bIns="0">
             <a:spAutoFit/>
           </a:bodyPr>
           <a:lstStyle/>
@@ -17662,7 +17272,7 @@
           <a:noFill/>
         </p:spPr>
         <p:txBody>
-          <a:bodyPr wrap="square" lIns="0" tIns="0" rIns="0" bIns="0" anchor="t">
+          <a:bodyPr wrap="square" anchor="t" lIns="0" rIns="0" tIns="0" bIns="0">
             <a:spAutoFit/>
           </a:bodyPr>
           <a:lstStyle/>
@@ -17698,7 +17308,7 @@
           <a:noFill/>
         </p:spPr>
         <p:txBody>
-          <a:bodyPr wrap="square" lIns="0" tIns="0" rIns="0" bIns="0" anchor="t">
+          <a:bodyPr wrap="square" anchor="t" lIns="0" rIns="0" tIns="0" bIns="0">
             <a:spAutoFit/>
           </a:bodyPr>
           <a:lstStyle/>
@@ -17760,7 +17370,6 @@
           <a:lstStyle/>
           <a:p>
             <a:pPr algn="ctr"/>
-            <a:endParaRPr/>
           </a:p>
         </p:txBody>
       </p:sp>
@@ -17809,7 +17418,6 @@
           <a:lstStyle/>
           <a:p>
             <a:pPr algn="ctr"/>
-            <a:endParaRPr/>
           </a:p>
         </p:txBody>
       </p:sp>
@@ -17830,7 +17438,7 @@
           <a:noFill/>
         </p:spPr>
         <p:txBody>
-          <a:bodyPr wrap="square" lIns="0" tIns="0" rIns="0" bIns="0" anchor="t">
+          <a:bodyPr wrap="square" anchor="t" lIns="0" rIns="0" tIns="0" bIns="0">
             <a:spAutoFit/>
           </a:bodyPr>
           <a:lstStyle/>
@@ -17866,7 +17474,7 @@
           <a:noFill/>
         </p:spPr>
         <p:txBody>
-          <a:bodyPr wrap="square" lIns="0" tIns="0" rIns="0" bIns="0" anchor="t">
+          <a:bodyPr wrap="square" anchor="t" lIns="0" rIns="0" tIns="0" bIns="0">
             <a:spAutoFit/>
           </a:bodyPr>
           <a:lstStyle/>
@@ -17902,7 +17510,7 @@
           <a:noFill/>
         </p:spPr>
         <p:txBody>
-          <a:bodyPr wrap="square" lIns="0" tIns="0" rIns="0" bIns="0" anchor="t">
+          <a:bodyPr wrap="square" anchor="t" lIns="0" rIns="0" tIns="0" bIns="0">
             <a:spAutoFit/>
           </a:bodyPr>
           <a:lstStyle/>
@@ -17964,7 +17572,6 @@
           <a:lstStyle/>
           <a:p>
             <a:pPr algn="ctr"/>
-            <a:endParaRPr/>
           </a:p>
         </p:txBody>
       </p:sp>
@@ -18013,7 +17620,6 @@
           <a:lstStyle/>
           <a:p>
             <a:pPr algn="ctr"/>
-            <a:endParaRPr/>
           </a:p>
         </p:txBody>
       </p:sp>
@@ -18034,7 +17640,7 @@
           <a:noFill/>
         </p:spPr>
         <p:txBody>
-          <a:bodyPr wrap="square" lIns="0" tIns="0" rIns="0" bIns="0" anchor="t">
+          <a:bodyPr wrap="square" anchor="t" lIns="0" rIns="0" tIns="0" bIns="0">
             <a:spAutoFit/>
           </a:bodyPr>
           <a:lstStyle/>
@@ -18070,7 +17676,7 @@
           <a:noFill/>
         </p:spPr>
         <p:txBody>
-          <a:bodyPr wrap="square" lIns="0" tIns="0" rIns="0" bIns="0" anchor="t">
+          <a:bodyPr wrap="square" anchor="t" lIns="0" rIns="0" tIns="0" bIns="0">
             <a:spAutoFit/>
           </a:bodyPr>
           <a:lstStyle/>
@@ -18106,7 +17712,7 @@
           <a:noFill/>
         </p:spPr>
         <p:txBody>
-          <a:bodyPr wrap="square" lIns="0" tIns="0" rIns="0" bIns="0" anchor="t">
+          <a:bodyPr wrap="square" anchor="t" lIns="0" rIns="0" tIns="0" bIns="0">
             <a:spAutoFit/>
           </a:bodyPr>
           <a:lstStyle/>
@@ -18178,7 +17784,7 @@
           <a:noFill/>
         </p:spPr>
         <p:txBody>
-          <a:bodyPr wrap="square" lIns="0" tIns="0" rIns="0" bIns="0" anchor="t">
+          <a:bodyPr wrap="square" anchor="t" lIns="0" rIns="0" tIns="0" bIns="0">
             <a:spAutoFit/>
           </a:bodyPr>
           <a:lstStyle/>
@@ -18240,7 +17846,6 @@
           <a:lstStyle/>
           <a:p>
             <a:pPr algn="ctr"/>
-            <a:endParaRPr/>
           </a:p>
         </p:txBody>
       </p:sp>
@@ -18289,7 +17894,6 @@
           <a:lstStyle/>
           <a:p>
             <a:pPr algn="ctr"/>
-            <a:endParaRPr/>
           </a:p>
         </p:txBody>
       </p:sp>
@@ -18332,7 +17936,7 @@
           </a:fontRef>
         </p:style>
         <p:txBody>
-          <a:bodyPr wrap="none" lIns="45720" tIns="0" rIns="45720" bIns="0" rtlCol="0" anchor="ctr"/>
+          <a:bodyPr rtlCol="0" anchor="ctr" wrap="none" lIns="45720" rIns="45720" tIns="0" bIns="0"/>
           <a:lstStyle/>
           <a:p>
             <a:pPr algn="ctr"/>
@@ -18366,7 +17970,7 @@
           <a:noFill/>
         </p:spPr>
         <p:txBody>
-          <a:bodyPr wrap="square" lIns="0" tIns="0" rIns="0" bIns="0" anchor="t">
+          <a:bodyPr wrap="square" anchor="t" lIns="0" rIns="0" tIns="0" bIns="0">
             <a:spAutoFit/>
           </a:bodyPr>
           <a:lstStyle/>
@@ -18432,7 +18036,6 @@
           <a:lstStyle/>
           <a:p>
             <a:pPr algn="ctr"/>
-            <a:endParaRPr/>
           </a:p>
         </p:txBody>
       </p:sp>
@@ -18481,7 +18084,6 @@
           <a:lstStyle/>
           <a:p>
             <a:pPr algn="ctr"/>
-            <a:endParaRPr/>
           </a:p>
         </p:txBody>
       </p:sp>
@@ -18524,7 +18126,7 @@
           </a:fontRef>
         </p:style>
         <p:txBody>
-          <a:bodyPr wrap="none" lIns="45720" tIns="0" rIns="45720" bIns="0" rtlCol="0" anchor="ctr"/>
+          <a:bodyPr rtlCol="0" anchor="ctr" wrap="none" lIns="45720" rIns="45720" tIns="0" bIns="0"/>
           <a:lstStyle/>
           <a:p>
             <a:pPr algn="ctr"/>
@@ -18558,7 +18160,7 @@
           <a:noFill/>
         </p:spPr>
         <p:txBody>
-          <a:bodyPr wrap="square" lIns="0" tIns="0" rIns="0" bIns="0" anchor="t">
+          <a:bodyPr wrap="square" anchor="t" lIns="0" rIns="0" tIns="0" bIns="0">
             <a:spAutoFit/>
           </a:bodyPr>
           <a:lstStyle/>
@@ -18624,7 +18226,6 @@
           <a:lstStyle/>
           <a:p>
             <a:pPr algn="ctr"/>
-            <a:endParaRPr/>
           </a:p>
         </p:txBody>
       </p:sp>
@@ -18673,7 +18274,6 @@
           <a:lstStyle/>
           <a:p>
             <a:pPr algn="ctr"/>
-            <a:endParaRPr/>
           </a:p>
         </p:txBody>
       </p:sp>
@@ -18716,7 +18316,7 @@
           </a:fontRef>
         </p:style>
         <p:txBody>
-          <a:bodyPr wrap="none" lIns="45720" tIns="0" rIns="45720" bIns="0" rtlCol="0" anchor="ctr"/>
+          <a:bodyPr rtlCol="0" anchor="ctr" wrap="none" lIns="45720" rIns="45720" tIns="0" bIns="0"/>
           <a:lstStyle/>
           <a:p>
             <a:pPr algn="ctr"/>
@@ -18750,7 +18350,7 @@
           <a:noFill/>
         </p:spPr>
         <p:txBody>
-          <a:bodyPr wrap="square" lIns="0" tIns="0" rIns="0" bIns="0" anchor="t">
+          <a:bodyPr wrap="square" anchor="t" lIns="0" rIns="0" tIns="0" bIns="0">
             <a:spAutoFit/>
           </a:bodyPr>
           <a:lstStyle/>
@@ -18812,7 +18412,6 @@
           <a:lstStyle/>
           <a:p>
             <a:pPr algn="ctr"/>
-            <a:endParaRPr/>
           </a:p>
         </p:txBody>
       </p:sp>
@@ -18833,7 +18432,7 @@
           <a:noFill/>
         </p:spPr>
         <p:txBody>
-          <a:bodyPr wrap="square" lIns="0" tIns="0" rIns="0" bIns="0" anchor="t">
+          <a:bodyPr wrap="square" anchor="t" lIns="0" rIns="0" tIns="0" bIns="0">
             <a:spAutoFit/>
           </a:bodyPr>
           <a:lstStyle/>
@@ -18899,7 +18498,7 @@
 </file>
 
 <file path=ppt/slides/slide5.xml><?xml version="1.0" encoding="utf-8"?>
-<p:sld xmlns:a="http://schemas.openxmlformats.org/drawingml/2006/main" xmlns:r="http://schemas.openxmlformats.org/officeDocument/2006/relationships" xmlns:p="http://schemas.openxmlformats.org/presentationml/2006/main">
+<p:sld xmlns:a="http://schemas.openxmlformats.org/drawingml/2006/main" xmlns:p="http://schemas.openxmlformats.org/presentationml/2006/main" xmlns:r="http://schemas.openxmlformats.org/officeDocument/2006/relationships">
   <p:cSld>
     <p:bg>
       <p:bgPr>
@@ -18915,14 +18514,7 @@
         <p:cNvGrpSpPr/>
         <p:nvPr/>
       </p:nvGrpSpPr>
-      <p:grpSpPr>
-        <a:xfrm>
-          <a:off x="0" y="0"/>
-          <a:ext cx="0" cy="0"/>
-          <a:chOff x="0" y="0"/>
-          <a:chExt cx="0" cy="0"/>
-        </a:xfrm>
-      </p:grpSpPr>
+      <p:grpSpPr/>
       <p:sp>
         <p:nvSpPr>
           <p:cNvPr id="2" name="Rounded Rectangle 1"/>
@@ -18962,7 +18554,7 @@
           </a:fontRef>
         </p:style>
         <p:txBody>
-          <a:bodyPr wrap="none" lIns="45720" tIns="0" rIns="45720" bIns="0" rtlCol="0" anchor="ctr"/>
+          <a:bodyPr rtlCol="0" anchor="ctr" wrap="none" lIns="45720" rIns="45720" tIns="0" bIns="0"/>
           <a:lstStyle/>
           <a:p>
             <a:pPr algn="ctr"/>
@@ -18996,7 +18588,7 @@
           <a:noFill/>
         </p:spPr>
         <p:txBody>
-          <a:bodyPr wrap="square" lIns="0" tIns="0" rIns="0" bIns="0" anchor="ctr">
+          <a:bodyPr wrap="square" anchor="ctr" lIns="0" rIns="0" tIns="0" bIns="0">
             <a:spAutoFit/>
           </a:bodyPr>
           <a:lstStyle/>
@@ -19068,7 +18660,7 @@
           <a:noFill/>
         </p:spPr>
         <p:txBody>
-          <a:bodyPr wrap="square" lIns="0" tIns="0" rIns="0" bIns="0" anchor="t">
+          <a:bodyPr wrap="square" anchor="t" lIns="0" rIns="0" tIns="0" bIns="0">
             <a:spAutoFit/>
           </a:bodyPr>
           <a:lstStyle/>
@@ -19130,7 +18722,6 @@
           <a:lstStyle/>
           <a:p>
             <a:pPr algn="ctr"/>
-            <a:endParaRPr/>
           </a:p>
         </p:txBody>
       </p:sp>
@@ -19179,7 +18770,6 @@
           <a:lstStyle/>
           <a:p>
             <a:pPr algn="ctr"/>
-            <a:endParaRPr/>
           </a:p>
         </p:txBody>
       </p:sp>
@@ -19200,7 +18790,7 @@
           <a:noFill/>
         </p:spPr>
         <p:txBody>
-          <a:bodyPr wrap="square" lIns="0" tIns="0" rIns="0" bIns="0" anchor="t">
+          <a:bodyPr wrap="square" anchor="t" lIns="0" rIns="0" tIns="0" bIns="0">
             <a:spAutoFit/>
           </a:bodyPr>
           <a:lstStyle/>
@@ -19246,7 +18836,7 @@
           <a:noFill/>
         </p:spPr>
         <p:txBody>
-          <a:bodyPr wrap="square" lIns="0" tIns="0" rIns="0" bIns="0" anchor="t">
+          <a:bodyPr wrap="square" anchor="t" lIns="0" rIns="0" tIns="0" bIns="0">
             <a:spAutoFit/>
           </a:bodyPr>
           <a:lstStyle/>
@@ -19312,7 +18902,6 @@
           <a:lstStyle/>
           <a:p>
             <a:pPr algn="ctr"/>
-            <a:endParaRPr/>
           </a:p>
         </p:txBody>
       </p:sp>
@@ -19361,7 +18950,6 @@
           <a:lstStyle/>
           <a:p>
             <a:pPr algn="ctr"/>
-            <a:endParaRPr/>
           </a:p>
         </p:txBody>
       </p:sp>
@@ -19382,7 +18970,7 @@
           <a:noFill/>
         </p:spPr>
         <p:txBody>
-          <a:bodyPr wrap="square" lIns="0" tIns="0" rIns="0" bIns="0" anchor="t">
+          <a:bodyPr wrap="square" anchor="t" lIns="0" rIns="0" tIns="0" bIns="0">
             <a:spAutoFit/>
           </a:bodyPr>
           <a:lstStyle/>
@@ -19428,7 +19016,7 @@
           <a:noFill/>
         </p:spPr>
         <p:txBody>
-          <a:bodyPr wrap="square" lIns="0" tIns="0" rIns="0" bIns="0" anchor="t">
+          <a:bodyPr wrap="square" anchor="t" lIns="0" rIns="0" tIns="0" bIns="0">
             <a:spAutoFit/>
           </a:bodyPr>
           <a:lstStyle/>
@@ -19494,7 +19082,6 @@
           <a:lstStyle/>
           <a:p>
             <a:pPr algn="ctr"/>
-            <a:endParaRPr/>
           </a:p>
         </p:txBody>
       </p:sp>
@@ -19543,7 +19130,6 @@
           <a:lstStyle/>
           <a:p>
             <a:pPr algn="ctr"/>
-            <a:endParaRPr/>
           </a:p>
         </p:txBody>
       </p:sp>
@@ -19564,7 +19150,7 @@
           <a:noFill/>
         </p:spPr>
         <p:txBody>
-          <a:bodyPr wrap="square" lIns="0" tIns="0" rIns="0" bIns="0" anchor="t">
+          <a:bodyPr wrap="square" anchor="t" lIns="0" rIns="0" tIns="0" bIns="0">
             <a:spAutoFit/>
           </a:bodyPr>
           <a:lstStyle/>
@@ -19610,7 +19196,7 @@
           <a:noFill/>
         </p:spPr>
         <p:txBody>
-          <a:bodyPr wrap="square" lIns="0" tIns="0" rIns="0" bIns="0" anchor="t">
+          <a:bodyPr wrap="square" anchor="t" lIns="0" rIns="0" tIns="0" bIns="0">
             <a:spAutoFit/>
           </a:bodyPr>
           <a:lstStyle/>
@@ -19676,7 +19262,6 @@
           <a:lstStyle/>
           <a:p>
             <a:pPr algn="ctr"/>
-            <a:endParaRPr/>
           </a:p>
         </p:txBody>
       </p:sp>
@@ -19725,7 +19310,6 @@
           <a:lstStyle/>
           <a:p>
             <a:pPr algn="ctr"/>
-            <a:endParaRPr/>
           </a:p>
         </p:txBody>
       </p:sp>
@@ -19746,7 +19330,7 @@
           <a:noFill/>
         </p:spPr>
         <p:txBody>
-          <a:bodyPr wrap="square" lIns="0" tIns="0" rIns="0" bIns="0" anchor="t">
+          <a:bodyPr wrap="square" anchor="t" lIns="0" rIns="0" tIns="0" bIns="0">
             <a:spAutoFit/>
           </a:bodyPr>
           <a:lstStyle/>
@@ -19792,7 +19376,7 @@
           <a:noFill/>
         </p:spPr>
         <p:txBody>
-          <a:bodyPr wrap="square" lIns="0" tIns="0" rIns="0" bIns="0" anchor="t">
+          <a:bodyPr wrap="square" anchor="t" lIns="0" rIns="0" tIns="0" bIns="0">
             <a:spAutoFit/>
           </a:bodyPr>
           <a:lstStyle/>
@@ -19858,7 +19442,6 @@
           <a:lstStyle/>
           <a:p>
             <a:pPr algn="ctr"/>
-            <a:endParaRPr/>
           </a:p>
         </p:txBody>
       </p:sp>
@@ -19907,7 +19490,6 @@
           <a:lstStyle/>
           <a:p>
             <a:pPr algn="ctr"/>
-            <a:endParaRPr/>
           </a:p>
         </p:txBody>
       </p:sp>
@@ -19928,7 +19510,7 @@
           <a:noFill/>
         </p:spPr>
         <p:txBody>
-          <a:bodyPr wrap="square" lIns="0" tIns="0" rIns="0" bIns="0" anchor="t">
+          <a:bodyPr wrap="square" anchor="t" lIns="0" rIns="0" tIns="0" bIns="0">
             <a:spAutoFit/>
           </a:bodyPr>
           <a:lstStyle/>
@@ -19974,7 +19556,7 @@
           <a:noFill/>
         </p:spPr>
         <p:txBody>
-          <a:bodyPr wrap="square" lIns="0" tIns="0" rIns="0" bIns="0" anchor="t">
+          <a:bodyPr wrap="square" anchor="t" lIns="0" rIns="0" tIns="0" bIns="0">
             <a:spAutoFit/>
           </a:bodyPr>
           <a:lstStyle/>
@@ -20040,7 +19622,6 @@
           <a:lstStyle/>
           <a:p>
             <a:pPr algn="ctr"/>
-            <a:endParaRPr/>
           </a:p>
         </p:txBody>
       </p:sp>
@@ -20061,7 +19642,7 @@
           <a:noFill/>
         </p:spPr>
         <p:txBody>
-          <a:bodyPr wrap="square" lIns="0" tIns="0" rIns="0" bIns="0" anchor="t">
+          <a:bodyPr wrap="square" anchor="t" lIns="0" rIns="0" tIns="0" bIns="0">
             <a:spAutoFit/>
           </a:bodyPr>
           <a:lstStyle/>
@@ -20099,7 +19680,7 @@
 </file>
 
 <file path=ppt/slides/slide6.xml><?xml version="1.0" encoding="utf-8"?>
-<p:sld xmlns:a="http://schemas.openxmlformats.org/drawingml/2006/main" xmlns:r="http://schemas.openxmlformats.org/officeDocument/2006/relationships" xmlns:p="http://schemas.openxmlformats.org/presentationml/2006/main">
+<p:sld xmlns:a="http://schemas.openxmlformats.org/drawingml/2006/main" xmlns:p="http://schemas.openxmlformats.org/presentationml/2006/main" xmlns:r="http://schemas.openxmlformats.org/officeDocument/2006/relationships">
   <p:cSld>
     <p:bg>
       <p:bgPr>
@@ -20115,14 +19696,7 @@
         <p:cNvGrpSpPr/>
         <p:nvPr/>
       </p:nvGrpSpPr>
-      <p:grpSpPr>
-        <a:xfrm>
-          <a:off x="0" y="0"/>
-          <a:ext cx="0" cy="0"/>
-          <a:chOff x="0" y="0"/>
-          <a:chExt cx="0" cy="0"/>
-        </a:xfrm>
-      </p:grpSpPr>
+      <p:grpSpPr/>
       <p:sp>
         <p:nvSpPr>
           <p:cNvPr id="2" name="Rounded Rectangle 1"/>
@@ -20162,7 +19736,7 @@
           </a:fontRef>
         </p:style>
         <p:txBody>
-          <a:bodyPr wrap="none" lIns="45720" tIns="0" rIns="45720" bIns="0" rtlCol="0" anchor="ctr"/>
+          <a:bodyPr rtlCol="0" anchor="ctr" wrap="none" lIns="45720" rIns="45720" tIns="0" bIns="0"/>
           <a:lstStyle/>
           <a:p>
             <a:pPr algn="ctr"/>
@@ -20196,7 +19770,7 @@
           <a:noFill/>
         </p:spPr>
         <p:txBody>
-          <a:bodyPr wrap="square" lIns="0" tIns="0" rIns="0" bIns="0" anchor="ctr">
+          <a:bodyPr wrap="square" anchor="ctr" lIns="0" rIns="0" tIns="0" bIns="0">
             <a:spAutoFit/>
           </a:bodyPr>
           <a:lstStyle/>
@@ -20268,7 +19842,7 @@
           <a:noFill/>
         </p:spPr>
         <p:txBody>
-          <a:bodyPr wrap="square" lIns="0" tIns="0" rIns="0" bIns="0" anchor="t">
+          <a:bodyPr wrap="square" anchor="t" lIns="0" rIns="0" tIns="0" bIns="0">
             <a:spAutoFit/>
           </a:bodyPr>
           <a:lstStyle/>
@@ -20332,7 +19906,6 @@
           <a:lstStyle/>
           <a:p>
             <a:pPr algn="ctr"/>
-            <a:endParaRPr/>
           </a:p>
         </p:txBody>
       </p:sp>
@@ -20353,7 +19926,7 @@
           <a:noFill/>
         </p:spPr>
         <p:txBody>
-          <a:bodyPr wrap="square" lIns="0" tIns="0" rIns="0" bIns="0" anchor="ctr">
+          <a:bodyPr wrap="square" anchor="ctr" lIns="0" rIns="0" tIns="0" bIns="0">
             <a:spAutoFit/>
           </a:bodyPr>
           <a:lstStyle/>
@@ -20389,7 +19962,7 @@
           <a:noFill/>
         </p:spPr>
         <p:txBody>
-          <a:bodyPr wrap="square" lIns="0" tIns="0" rIns="0" bIns="0" anchor="ctr">
+          <a:bodyPr wrap="square" anchor="ctr" lIns="0" rIns="0" tIns="0" bIns="0">
             <a:spAutoFit/>
           </a:bodyPr>
           <a:lstStyle/>
@@ -20425,7 +19998,7 @@
           <a:noFill/>
         </p:spPr>
         <p:txBody>
-          <a:bodyPr wrap="square" lIns="0" tIns="0" rIns="0" bIns="0" anchor="ctr">
+          <a:bodyPr wrap="square" anchor="ctr" lIns="0" rIns="0" tIns="0" bIns="0">
             <a:spAutoFit/>
           </a:bodyPr>
           <a:lstStyle/>
@@ -20489,7 +20062,6 @@
           <a:lstStyle/>
           <a:p>
             <a:pPr algn="ctr"/>
-            <a:endParaRPr/>
           </a:p>
         </p:txBody>
       </p:sp>
@@ -20510,7 +20082,7 @@
           <a:noFill/>
         </p:spPr>
         <p:txBody>
-          <a:bodyPr wrap="square" lIns="0" tIns="0" rIns="0" bIns="0" anchor="ctr">
+          <a:bodyPr wrap="square" anchor="ctr" lIns="0" rIns="0" tIns="0" bIns="0">
             <a:spAutoFit/>
           </a:bodyPr>
           <a:lstStyle/>
@@ -20546,7 +20118,7 @@
           <a:noFill/>
         </p:spPr>
         <p:txBody>
-          <a:bodyPr wrap="square" lIns="0" tIns="0" rIns="0" bIns="0" anchor="ctr">
+          <a:bodyPr wrap="square" anchor="ctr" lIns="0" rIns="0" tIns="0" bIns="0">
             <a:spAutoFit/>
           </a:bodyPr>
           <a:lstStyle/>
@@ -20582,7 +20154,7 @@
           <a:noFill/>
         </p:spPr>
         <p:txBody>
-          <a:bodyPr wrap="square" lIns="0" tIns="0" rIns="0" bIns="0" anchor="ctr">
+          <a:bodyPr wrap="square" anchor="ctr" lIns="0" rIns="0" tIns="0" bIns="0">
             <a:spAutoFit/>
           </a:bodyPr>
           <a:lstStyle/>
@@ -20646,7 +20218,6 @@
           <a:lstStyle/>
           <a:p>
             <a:pPr algn="ctr"/>
-            <a:endParaRPr/>
           </a:p>
         </p:txBody>
       </p:sp>
@@ -20667,7 +20238,7 @@
           <a:noFill/>
         </p:spPr>
         <p:txBody>
-          <a:bodyPr wrap="square" lIns="0" tIns="0" rIns="0" bIns="0" anchor="ctr">
+          <a:bodyPr wrap="square" anchor="ctr" lIns="0" rIns="0" tIns="0" bIns="0">
             <a:spAutoFit/>
           </a:bodyPr>
           <a:lstStyle/>
@@ -20703,7 +20274,7 @@
           <a:noFill/>
         </p:spPr>
         <p:txBody>
-          <a:bodyPr wrap="square" lIns="0" tIns="0" rIns="0" bIns="0" anchor="ctr">
+          <a:bodyPr wrap="square" anchor="ctr" lIns="0" rIns="0" tIns="0" bIns="0">
             <a:spAutoFit/>
           </a:bodyPr>
           <a:lstStyle/>
@@ -20739,7 +20310,7 @@
           <a:noFill/>
         </p:spPr>
         <p:txBody>
-          <a:bodyPr wrap="square" lIns="0" tIns="0" rIns="0" bIns="0" anchor="ctr">
+          <a:bodyPr wrap="square" anchor="ctr" lIns="0" rIns="0" tIns="0" bIns="0">
             <a:spAutoFit/>
           </a:bodyPr>
           <a:lstStyle/>
@@ -20803,7 +20374,6 @@
           <a:lstStyle/>
           <a:p>
             <a:pPr algn="ctr"/>
-            <a:endParaRPr/>
           </a:p>
         </p:txBody>
       </p:sp>
@@ -20824,7 +20394,7 @@
           <a:noFill/>
         </p:spPr>
         <p:txBody>
-          <a:bodyPr wrap="square" lIns="0" tIns="0" rIns="0" bIns="0" anchor="ctr">
+          <a:bodyPr wrap="square" anchor="ctr" lIns="0" rIns="0" tIns="0" bIns="0">
             <a:spAutoFit/>
           </a:bodyPr>
           <a:lstStyle/>
@@ -20860,7 +20430,7 @@
           <a:noFill/>
         </p:spPr>
         <p:txBody>
-          <a:bodyPr wrap="square" lIns="0" tIns="0" rIns="0" bIns="0" anchor="ctr">
+          <a:bodyPr wrap="square" anchor="ctr" lIns="0" rIns="0" tIns="0" bIns="0">
             <a:spAutoFit/>
           </a:bodyPr>
           <a:lstStyle/>
@@ -20896,7 +20466,7 @@
           <a:noFill/>
         </p:spPr>
         <p:txBody>
-          <a:bodyPr wrap="square" lIns="0" tIns="0" rIns="0" bIns="0" anchor="ctr">
+          <a:bodyPr wrap="square" anchor="ctr" lIns="0" rIns="0" tIns="0" bIns="0">
             <a:spAutoFit/>
           </a:bodyPr>
           <a:lstStyle/>
@@ -20958,7 +20528,6 @@
           <a:lstStyle/>
           <a:p>
             <a:pPr algn="ctr"/>
-            <a:endParaRPr/>
           </a:p>
         </p:txBody>
       </p:sp>
@@ -21007,7 +20576,6 @@
           <a:lstStyle/>
           <a:p>
             <a:pPr algn="ctr"/>
-            <a:endParaRPr/>
           </a:p>
         </p:txBody>
       </p:sp>
@@ -21028,7 +20596,7 @@
           <a:noFill/>
         </p:spPr>
         <p:txBody>
-          <a:bodyPr wrap="square" lIns="0" tIns="0" rIns="0" bIns="0" anchor="ctr">
+          <a:bodyPr wrap="square" anchor="ctr" lIns="0" rIns="0" tIns="0" bIns="0">
             <a:spAutoFit/>
           </a:bodyPr>
           <a:lstStyle/>
@@ -21064,7 +20632,7 @@
           <a:noFill/>
         </p:spPr>
         <p:txBody>
-          <a:bodyPr wrap="square" lIns="0" tIns="0" rIns="0" bIns="0" anchor="ctr">
+          <a:bodyPr wrap="square" anchor="ctr" lIns="0" rIns="0" tIns="0" bIns="0">
             <a:spAutoFit/>
           </a:bodyPr>
           <a:lstStyle/>
@@ -21100,7 +20668,7 @@
           <a:noFill/>
         </p:spPr>
         <p:txBody>
-          <a:bodyPr wrap="square" lIns="0" tIns="0" rIns="0" bIns="0" anchor="ctr">
+          <a:bodyPr wrap="square" anchor="ctr" lIns="0" rIns="0" tIns="0" bIns="0">
             <a:spAutoFit/>
           </a:bodyPr>
           <a:lstStyle/>
@@ -21164,7 +20732,6 @@
           <a:lstStyle/>
           <a:p>
             <a:pPr algn="ctr"/>
-            <a:endParaRPr/>
           </a:p>
         </p:txBody>
       </p:sp>
@@ -21185,7 +20752,7 @@
           <a:noFill/>
         </p:spPr>
         <p:txBody>
-          <a:bodyPr wrap="square" lIns="0" tIns="0" rIns="0" bIns="0" anchor="ctr">
+          <a:bodyPr wrap="square" anchor="ctr" lIns="0" rIns="0" tIns="0" bIns="0">
             <a:spAutoFit/>
           </a:bodyPr>
           <a:lstStyle/>
@@ -21221,7 +20788,7 @@
           <a:noFill/>
         </p:spPr>
         <p:txBody>
-          <a:bodyPr wrap="square" lIns="0" tIns="0" rIns="0" bIns="0" anchor="ctr">
+          <a:bodyPr wrap="square" anchor="ctr" lIns="0" rIns="0" tIns="0" bIns="0">
             <a:spAutoFit/>
           </a:bodyPr>
           <a:lstStyle/>
@@ -21257,7 +20824,7 @@
           <a:noFill/>
         </p:spPr>
         <p:txBody>
-          <a:bodyPr wrap="square" lIns="0" tIns="0" rIns="0" bIns="0" anchor="ctr">
+          <a:bodyPr wrap="square" anchor="ctr" lIns="0" rIns="0" tIns="0" bIns="0">
             <a:spAutoFit/>
           </a:bodyPr>
           <a:lstStyle/>
@@ -21321,7 +20888,6 @@
           <a:lstStyle/>
           <a:p>
             <a:pPr algn="ctr"/>
-            <a:endParaRPr/>
           </a:p>
         </p:txBody>
       </p:sp>
@@ -21342,7 +20908,7 @@
           <a:noFill/>
         </p:spPr>
         <p:txBody>
-          <a:bodyPr wrap="square" lIns="0" tIns="0" rIns="0" bIns="0" anchor="ctr">
+          <a:bodyPr wrap="square" anchor="ctr" lIns="0" rIns="0" tIns="0" bIns="0">
             <a:spAutoFit/>
           </a:bodyPr>
           <a:lstStyle/>
@@ -21378,7 +20944,7 @@
           <a:noFill/>
         </p:spPr>
         <p:txBody>
-          <a:bodyPr wrap="square" lIns="0" tIns="0" rIns="0" bIns="0" anchor="ctr">
+          <a:bodyPr wrap="square" anchor="ctr" lIns="0" rIns="0" tIns="0" bIns="0">
             <a:spAutoFit/>
           </a:bodyPr>
           <a:lstStyle/>
@@ -21414,7 +20980,7 @@
           <a:noFill/>
         </p:spPr>
         <p:txBody>
-          <a:bodyPr wrap="square" lIns="0" tIns="0" rIns="0" bIns="0" anchor="ctr">
+          <a:bodyPr wrap="square" anchor="ctr" lIns="0" rIns="0" tIns="0" bIns="0">
             <a:spAutoFit/>
           </a:bodyPr>
           <a:lstStyle/>
@@ -21478,7 +21044,6 @@
           <a:lstStyle/>
           <a:p>
             <a:pPr algn="ctr"/>
-            <a:endParaRPr/>
           </a:p>
         </p:txBody>
       </p:sp>
@@ -21499,7 +21064,7 @@
           <a:noFill/>
         </p:spPr>
         <p:txBody>
-          <a:bodyPr wrap="square" lIns="0" tIns="0" rIns="0" bIns="0" anchor="ctr">
+          <a:bodyPr wrap="square" anchor="ctr" lIns="0" rIns="0" tIns="0" bIns="0">
             <a:spAutoFit/>
           </a:bodyPr>
           <a:lstStyle/>
@@ -21535,7 +21100,7 @@
           <a:noFill/>
         </p:spPr>
         <p:txBody>
-          <a:bodyPr wrap="square" lIns="0" tIns="0" rIns="0" bIns="0" anchor="ctr">
+          <a:bodyPr wrap="square" anchor="ctr" lIns="0" rIns="0" tIns="0" bIns="0">
             <a:spAutoFit/>
           </a:bodyPr>
           <a:lstStyle/>
@@ -21571,7 +21136,7 @@
           <a:noFill/>
         </p:spPr>
         <p:txBody>
-          <a:bodyPr wrap="square" lIns="0" tIns="0" rIns="0" bIns="0" anchor="ctr">
+          <a:bodyPr wrap="square" anchor="ctr" lIns="0" rIns="0" tIns="0" bIns="0">
             <a:spAutoFit/>
           </a:bodyPr>
           <a:lstStyle/>
@@ -21635,7 +21200,6 @@
           <a:lstStyle/>
           <a:p>
             <a:pPr algn="ctr"/>
-            <a:endParaRPr/>
           </a:p>
         </p:txBody>
       </p:sp>
@@ -21656,7 +21220,7 @@
           <a:noFill/>
         </p:spPr>
         <p:txBody>
-          <a:bodyPr wrap="square" lIns="0" tIns="0" rIns="0" bIns="0" anchor="ctr">
+          <a:bodyPr wrap="square" anchor="ctr" lIns="0" rIns="0" tIns="0" bIns="0">
             <a:spAutoFit/>
           </a:bodyPr>
           <a:lstStyle/>
@@ -21692,7 +21256,7 @@
           <a:noFill/>
         </p:spPr>
         <p:txBody>
-          <a:bodyPr wrap="square" lIns="0" tIns="0" rIns="0" bIns="0" anchor="ctr">
+          <a:bodyPr wrap="square" anchor="ctr" lIns="0" rIns="0" tIns="0" bIns="0">
             <a:spAutoFit/>
           </a:bodyPr>
           <a:lstStyle/>
@@ -21728,7 +21292,7 @@
           <a:noFill/>
         </p:spPr>
         <p:txBody>
-          <a:bodyPr wrap="square" lIns="0" tIns="0" rIns="0" bIns="0" anchor="ctr">
+          <a:bodyPr wrap="square" anchor="ctr" lIns="0" rIns="0" tIns="0" bIns="0">
             <a:spAutoFit/>
           </a:bodyPr>
           <a:lstStyle/>
@@ -21810,7 +21374,7 @@
           </a:fontRef>
         </p:style>
         <p:txBody>
-          <a:bodyPr wrap="none" lIns="45720" tIns="0" rIns="45720" bIns="0" rtlCol="0" anchor="ctr"/>
+          <a:bodyPr rtlCol="0" anchor="ctr" wrap="none" lIns="45720" rIns="45720" tIns="0" bIns="0"/>
           <a:lstStyle/>
           <a:p>
             <a:pPr algn="ctr"/>
@@ -21870,7 +21434,6 @@
           <a:lstStyle/>
           <a:p>
             <a:pPr algn="ctr"/>
-            <a:endParaRPr/>
           </a:p>
         </p:txBody>
       </p:sp>
@@ -21891,7 +21454,7 @@
           <a:noFill/>
         </p:spPr>
         <p:txBody>
-          <a:bodyPr wrap="square" lIns="0" tIns="0" rIns="0" bIns="0" anchor="ctr">
+          <a:bodyPr wrap="square" anchor="ctr" lIns="0" rIns="0" tIns="0" bIns="0">
             <a:spAutoFit/>
           </a:bodyPr>
           <a:lstStyle/>
@@ -21963,7 +21526,6 @@
           <a:lstStyle/>
           <a:p>
             <a:pPr algn="ctr"/>
-            <a:endParaRPr/>
           </a:p>
         </p:txBody>
       </p:sp>
@@ -21984,7 +21546,7 @@
           <a:noFill/>
         </p:spPr>
         <p:txBody>
-          <a:bodyPr wrap="square" lIns="0" tIns="0" rIns="0" bIns="0" anchor="ctr">
+          <a:bodyPr wrap="square" anchor="ctr" lIns="0" rIns="0" tIns="0" bIns="0">
             <a:spAutoFit/>
           </a:bodyPr>
           <a:lstStyle/>
@@ -22056,7 +21618,6 @@
           <a:lstStyle/>
           <a:p>
             <a:pPr algn="ctr"/>
-            <a:endParaRPr/>
           </a:p>
         </p:txBody>
       </p:sp>
@@ -22077,7 +21638,7 @@
           <a:noFill/>
         </p:spPr>
         <p:txBody>
-          <a:bodyPr wrap="square" lIns="0" tIns="0" rIns="0" bIns="0" anchor="ctr">
+          <a:bodyPr wrap="square" anchor="ctr" lIns="0" rIns="0" tIns="0" bIns="0">
             <a:spAutoFit/>
           </a:bodyPr>
           <a:lstStyle/>
@@ -22149,7 +21710,6 @@
           <a:lstStyle/>
           <a:p>
             <a:pPr algn="ctr"/>
-            <a:endParaRPr/>
           </a:p>
         </p:txBody>
       </p:sp>
@@ -22170,7 +21730,7 @@
           <a:noFill/>
         </p:spPr>
         <p:txBody>
-          <a:bodyPr wrap="square" lIns="0" tIns="0" rIns="0" bIns="0" anchor="ctr">
+          <a:bodyPr wrap="square" anchor="ctr" lIns="0" rIns="0" tIns="0" bIns="0">
             <a:spAutoFit/>
           </a:bodyPr>
           <a:lstStyle/>
@@ -22208,7 +21768,7 @@
 </file>
 
 <file path=ppt/slides/slide7.xml><?xml version="1.0" encoding="utf-8"?>
-<p:sld xmlns:a="http://schemas.openxmlformats.org/drawingml/2006/main" xmlns:r="http://schemas.openxmlformats.org/officeDocument/2006/relationships" xmlns:p="http://schemas.openxmlformats.org/presentationml/2006/main">
+<p:sld xmlns:a="http://schemas.openxmlformats.org/drawingml/2006/main" xmlns:p="http://schemas.openxmlformats.org/presentationml/2006/main" xmlns:r="http://schemas.openxmlformats.org/officeDocument/2006/relationships">
   <p:cSld>
     <p:bg>
       <p:bgPr>
@@ -22224,14 +21784,7 @@
         <p:cNvGrpSpPr/>
         <p:nvPr/>
       </p:nvGrpSpPr>
-      <p:grpSpPr>
-        <a:xfrm>
-          <a:off x="0" y="0"/>
-          <a:ext cx="0" cy="0"/>
-          <a:chOff x="0" y="0"/>
-          <a:chExt cx="0" cy="0"/>
-        </a:xfrm>
-      </p:grpSpPr>
+      <p:grpSpPr/>
       <p:sp>
         <p:nvSpPr>
           <p:cNvPr id="2" name="Rounded Rectangle 1"/>
@@ -22271,7 +21824,7 @@
           </a:fontRef>
         </p:style>
         <p:txBody>
-          <a:bodyPr wrap="none" lIns="45720" tIns="0" rIns="45720" bIns="0" rtlCol="0" anchor="ctr"/>
+          <a:bodyPr rtlCol="0" anchor="ctr" wrap="none" lIns="45720" rIns="45720" tIns="0" bIns="0"/>
           <a:lstStyle/>
           <a:p>
             <a:pPr algn="ctr"/>
@@ -22305,7 +21858,7 @@
           <a:noFill/>
         </p:spPr>
         <p:txBody>
-          <a:bodyPr wrap="square" lIns="0" tIns="0" rIns="0" bIns="0" anchor="ctr">
+          <a:bodyPr wrap="square" anchor="ctr" lIns="0" rIns="0" tIns="0" bIns="0">
             <a:spAutoFit/>
           </a:bodyPr>
           <a:lstStyle/>
@@ -22377,7 +21930,7 @@
           <a:noFill/>
         </p:spPr>
         <p:txBody>
-          <a:bodyPr wrap="square" lIns="0" tIns="0" rIns="0" bIns="0" anchor="t">
+          <a:bodyPr wrap="square" anchor="t" lIns="0" rIns="0" tIns="0" bIns="0">
             <a:spAutoFit/>
           </a:bodyPr>
           <a:lstStyle/>
@@ -22413,7 +21966,7 @@
           <a:noFill/>
         </p:spPr>
         <p:txBody>
-          <a:bodyPr wrap="square" lIns="0" tIns="0" rIns="0" bIns="0" anchor="t">
+          <a:bodyPr wrap="square" anchor="t" lIns="0" rIns="0" tIns="0" bIns="0">
             <a:spAutoFit/>
           </a:bodyPr>
           <a:lstStyle/>
@@ -22475,7 +22028,6 @@
           <a:lstStyle/>
           <a:p>
             <a:pPr algn="ctr"/>
-            <a:endParaRPr/>
           </a:p>
         </p:txBody>
       </p:sp>
@@ -22524,7 +22076,6 @@
           <a:lstStyle/>
           <a:p>
             <a:pPr algn="ctr"/>
-            <a:endParaRPr/>
           </a:p>
         </p:txBody>
       </p:sp>
@@ -22545,7 +22096,7 @@
           <a:noFill/>
         </p:spPr>
         <p:txBody>
-          <a:bodyPr wrap="square" lIns="0" tIns="0" rIns="0" bIns="0" anchor="t">
+          <a:bodyPr wrap="square" anchor="t" lIns="0" rIns="0" tIns="0" bIns="0">
             <a:spAutoFit/>
           </a:bodyPr>
           <a:lstStyle/>
@@ -22581,7 +22132,7 @@
           <a:noFill/>
         </p:spPr>
         <p:txBody>
-          <a:bodyPr wrap="square" lIns="0" tIns="0" rIns="0" bIns="0" anchor="t">
+          <a:bodyPr wrap="square" anchor="t" lIns="0" rIns="0" tIns="0" bIns="0">
             <a:spAutoFit/>
           </a:bodyPr>
           <a:lstStyle/>
@@ -22617,7 +22168,7 @@
           <a:noFill/>
         </p:spPr>
         <p:txBody>
-          <a:bodyPr wrap="square" lIns="0" tIns="0" rIns="0" bIns="0" anchor="t">
+          <a:bodyPr wrap="square" anchor="t" lIns="0" rIns="0" tIns="0" bIns="0">
             <a:spAutoFit/>
           </a:bodyPr>
           <a:lstStyle/>
@@ -22679,7 +22230,6 @@
           <a:lstStyle/>
           <a:p>
             <a:pPr algn="ctr"/>
-            <a:endParaRPr/>
           </a:p>
         </p:txBody>
       </p:sp>
@@ -22728,7 +22278,6 @@
           <a:lstStyle/>
           <a:p>
             <a:pPr algn="ctr"/>
-            <a:endParaRPr/>
           </a:p>
         </p:txBody>
       </p:sp>
@@ -22749,7 +22298,7 @@
           <a:noFill/>
         </p:spPr>
         <p:txBody>
-          <a:bodyPr wrap="square" lIns="0" tIns="0" rIns="0" bIns="0" anchor="t">
+          <a:bodyPr wrap="square" anchor="t" lIns="0" rIns="0" tIns="0" bIns="0">
             <a:spAutoFit/>
           </a:bodyPr>
           <a:lstStyle/>
@@ -22785,7 +22334,7 @@
           <a:noFill/>
         </p:spPr>
         <p:txBody>
-          <a:bodyPr wrap="square" lIns="0" tIns="0" rIns="0" bIns="0" anchor="t">
+          <a:bodyPr wrap="square" anchor="t" lIns="0" rIns="0" tIns="0" bIns="0">
             <a:spAutoFit/>
           </a:bodyPr>
           <a:lstStyle/>
@@ -22821,7 +22370,7 @@
           <a:noFill/>
         </p:spPr>
         <p:txBody>
-          <a:bodyPr wrap="square" lIns="0" tIns="0" rIns="0" bIns="0" anchor="t">
+          <a:bodyPr wrap="square" anchor="t" lIns="0" rIns="0" tIns="0" bIns="0">
             <a:spAutoFit/>
           </a:bodyPr>
           <a:lstStyle/>
@@ -22883,7 +22432,6 @@
           <a:lstStyle/>
           <a:p>
             <a:pPr algn="ctr"/>
-            <a:endParaRPr/>
           </a:p>
         </p:txBody>
       </p:sp>
@@ -22932,7 +22480,6 @@
           <a:lstStyle/>
           <a:p>
             <a:pPr algn="ctr"/>
-            <a:endParaRPr/>
           </a:p>
         </p:txBody>
       </p:sp>
@@ -22953,7 +22500,7 @@
           <a:noFill/>
         </p:spPr>
         <p:txBody>
-          <a:bodyPr wrap="square" lIns="0" tIns="0" rIns="0" bIns="0" anchor="t">
+          <a:bodyPr wrap="square" anchor="t" lIns="0" rIns="0" tIns="0" bIns="0">
             <a:spAutoFit/>
           </a:bodyPr>
           <a:lstStyle/>
@@ -22989,7 +22536,7 @@
           <a:noFill/>
         </p:spPr>
         <p:txBody>
-          <a:bodyPr wrap="square" lIns="0" tIns="0" rIns="0" bIns="0" anchor="t">
+          <a:bodyPr wrap="square" anchor="t" lIns="0" rIns="0" tIns="0" bIns="0">
             <a:spAutoFit/>
           </a:bodyPr>
           <a:lstStyle/>
@@ -23025,7 +22572,7 @@
           <a:noFill/>
         </p:spPr>
         <p:txBody>
-          <a:bodyPr wrap="square" lIns="0" tIns="0" rIns="0" bIns="0" anchor="t">
+          <a:bodyPr wrap="square" anchor="t" lIns="0" rIns="0" tIns="0" bIns="0">
             <a:spAutoFit/>
           </a:bodyPr>
           <a:lstStyle/>
@@ -23087,7 +22634,6 @@
           <a:lstStyle/>
           <a:p>
             <a:pPr algn="ctr"/>
-            <a:endParaRPr/>
           </a:p>
         </p:txBody>
       </p:sp>
@@ -23136,7 +22682,6 @@
           <a:lstStyle/>
           <a:p>
             <a:pPr algn="ctr"/>
-            <a:endParaRPr/>
           </a:p>
         </p:txBody>
       </p:sp>
@@ -23157,7 +22702,7 @@
           <a:noFill/>
         </p:spPr>
         <p:txBody>
-          <a:bodyPr wrap="square" lIns="0" tIns="0" rIns="0" bIns="0" anchor="t">
+          <a:bodyPr wrap="square" anchor="t" lIns="0" rIns="0" tIns="0" bIns="0">
             <a:spAutoFit/>
           </a:bodyPr>
           <a:lstStyle/>
@@ -23193,7 +22738,7 @@
           <a:noFill/>
         </p:spPr>
         <p:txBody>
-          <a:bodyPr wrap="square" lIns="0" tIns="0" rIns="0" bIns="0" anchor="t">
+          <a:bodyPr wrap="square" anchor="t" lIns="0" rIns="0" tIns="0" bIns="0">
             <a:spAutoFit/>
           </a:bodyPr>
           <a:lstStyle/>
@@ -23229,7 +22774,7 @@
           <a:noFill/>
         </p:spPr>
         <p:txBody>
-          <a:bodyPr wrap="square" lIns="0" tIns="0" rIns="0" bIns="0" anchor="t">
+          <a:bodyPr wrap="square" anchor="t" lIns="0" rIns="0" tIns="0" bIns="0">
             <a:spAutoFit/>
           </a:bodyPr>
           <a:lstStyle/>
@@ -23291,7 +22836,6 @@
           <a:lstStyle/>
           <a:p>
             <a:pPr algn="ctr"/>
-            <a:endParaRPr/>
           </a:p>
         </p:txBody>
       </p:sp>
@@ -23340,7 +22884,6 @@
           <a:lstStyle/>
           <a:p>
             <a:pPr algn="ctr"/>
-            <a:endParaRPr/>
           </a:p>
         </p:txBody>
       </p:sp>
@@ -23361,7 +22904,7 @@
           <a:noFill/>
         </p:spPr>
         <p:txBody>
-          <a:bodyPr wrap="square" lIns="0" tIns="0" rIns="0" bIns="0" anchor="t">
+          <a:bodyPr wrap="square" anchor="t" lIns="0" rIns="0" tIns="0" bIns="0">
             <a:spAutoFit/>
           </a:bodyPr>
           <a:lstStyle/>
@@ -23397,7 +22940,7 @@
           <a:noFill/>
         </p:spPr>
         <p:txBody>
-          <a:bodyPr wrap="square" lIns="0" tIns="0" rIns="0" bIns="0" anchor="t">
+          <a:bodyPr wrap="square" anchor="t" lIns="0" rIns="0" tIns="0" bIns="0">
             <a:spAutoFit/>
           </a:bodyPr>
           <a:lstStyle/>
@@ -23455,7 +22998,7 @@
           </a:fontRef>
         </p:style>
         <p:txBody>
-          <a:bodyPr wrap="none" lIns="45720" tIns="0" rIns="45720" bIns="0" rtlCol="0" anchor="ctr"/>
+          <a:bodyPr rtlCol="0" anchor="ctr" wrap="none" lIns="45720" rIns="45720" tIns="0" bIns="0"/>
           <a:lstStyle/>
           <a:p>
             <a:pPr algn="ctr"/>
@@ -23511,7 +23054,7 @@
           </a:fontRef>
         </p:style>
         <p:txBody>
-          <a:bodyPr wrap="none" lIns="45720" tIns="0" rIns="45720" bIns="0" rtlCol="0" anchor="ctr"/>
+          <a:bodyPr rtlCol="0" anchor="ctr" wrap="none" lIns="45720" rIns="45720" tIns="0" bIns="0"/>
           <a:lstStyle/>
           <a:p>
             <a:pPr algn="ctr"/>
@@ -23567,7 +23110,7 @@
           </a:fontRef>
         </p:style>
         <p:txBody>
-          <a:bodyPr wrap="none" lIns="45720" tIns="0" rIns="45720" bIns="0" rtlCol="0" anchor="ctr"/>
+          <a:bodyPr rtlCol="0" anchor="ctr" wrap="none" lIns="45720" rIns="45720" tIns="0" bIns="0"/>
           <a:lstStyle/>
           <a:p>
             <a:pPr algn="ctr"/>
@@ -23601,7 +23144,7 @@
           <a:noFill/>
         </p:spPr>
         <p:txBody>
-          <a:bodyPr wrap="square" lIns="0" tIns="0" rIns="0" bIns="0" anchor="t">
+          <a:bodyPr wrap="square" anchor="t" lIns="0" rIns="0" tIns="0" bIns="0">
             <a:spAutoFit/>
           </a:bodyPr>
           <a:lstStyle/>
@@ -23663,7 +23206,6 @@
           <a:lstStyle/>
           <a:p>
             <a:pPr algn="ctr"/>
-            <a:endParaRPr/>
           </a:p>
         </p:txBody>
       </p:sp>
@@ -23712,7 +23254,6 @@
           <a:lstStyle/>
           <a:p>
             <a:pPr algn="ctr"/>
-            <a:endParaRPr/>
           </a:p>
         </p:txBody>
       </p:sp>
@@ -23755,7 +23296,7 @@
           </a:fontRef>
         </p:style>
         <p:txBody>
-          <a:bodyPr wrap="none" lIns="45720" tIns="0" rIns="45720" bIns="0" rtlCol="0" anchor="ctr"/>
+          <a:bodyPr rtlCol="0" anchor="ctr" wrap="none" lIns="45720" rIns="45720" tIns="0" bIns="0"/>
           <a:lstStyle/>
           <a:p>
             <a:pPr algn="ctr"/>
@@ -23789,7 +23330,7 @@
           <a:noFill/>
         </p:spPr>
         <p:txBody>
-          <a:bodyPr wrap="square" lIns="0" tIns="0" rIns="0" bIns="0" anchor="t">
+          <a:bodyPr wrap="square" anchor="t" lIns="0" rIns="0" tIns="0" bIns="0">
             <a:spAutoFit/>
           </a:bodyPr>
           <a:lstStyle/>
@@ -23875,7 +23416,6 @@
           <a:lstStyle/>
           <a:p>
             <a:pPr algn="ctr"/>
-            <a:endParaRPr/>
           </a:p>
         </p:txBody>
       </p:sp>
@@ -23924,7 +23464,6 @@
           <a:lstStyle/>
           <a:p>
             <a:pPr algn="ctr"/>
-            <a:endParaRPr/>
           </a:p>
         </p:txBody>
       </p:sp>
@@ -23967,7 +23506,7 @@
           </a:fontRef>
         </p:style>
         <p:txBody>
-          <a:bodyPr wrap="none" lIns="45720" tIns="0" rIns="45720" bIns="0" rtlCol="0" anchor="ctr"/>
+          <a:bodyPr rtlCol="0" anchor="ctr" wrap="none" lIns="45720" rIns="45720" tIns="0" bIns="0"/>
           <a:lstStyle/>
           <a:p>
             <a:pPr algn="ctr"/>
@@ -24001,7 +23540,7 @@
           <a:noFill/>
         </p:spPr>
         <p:txBody>
-          <a:bodyPr wrap="square" lIns="0" tIns="0" rIns="0" bIns="0" anchor="t">
+          <a:bodyPr wrap="square" anchor="t" lIns="0" rIns="0" tIns="0" bIns="0">
             <a:spAutoFit/>
           </a:bodyPr>
           <a:lstStyle/>
@@ -24041,7 +23580,7 @@
           <a:noFill/>
         </p:spPr>
         <p:txBody>
-          <a:bodyPr wrap="square" lIns="0" tIns="0" rIns="0" bIns="0" anchor="t">
+          <a:bodyPr wrap="square" anchor="t" lIns="0" rIns="0" tIns="0" bIns="0">
             <a:spAutoFit/>
           </a:bodyPr>
           <a:lstStyle/>
@@ -24105,7 +23644,6 @@
           <a:lstStyle/>
           <a:p>
             <a:pPr algn="ctr"/>
-            <a:endParaRPr/>
           </a:p>
         </p:txBody>
       </p:sp>
@@ -24126,7 +23664,7 @@
           <a:noFill/>
         </p:spPr>
         <p:txBody>
-          <a:bodyPr wrap="square" lIns="0" tIns="0" rIns="0" bIns="0" anchor="ctr">
+          <a:bodyPr wrap="square" anchor="ctr" lIns="0" rIns="0" tIns="0" bIns="0">
             <a:spAutoFit/>
           </a:bodyPr>
           <a:lstStyle/>
@@ -24162,7 +23700,7 @@
           <a:noFill/>
         </p:spPr>
         <p:txBody>
-          <a:bodyPr wrap="square" lIns="0" tIns="0" rIns="0" bIns="0" anchor="ctr">
+          <a:bodyPr wrap="square" anchor="ctr" lIns="0" rIns="0" tIns="0" bIns="0">
             <a:spAutoFit/>
           </a:bodyPr>
           <a:lstStyle/>
@@ -24230,7 +23768,6 @@
           <a:lstStyle/>
           <a:p>
             <a:pPr algn="ctr"/>
-            <a:endParaRPr/>
           </a:p>
         </p:txBody>
       </p:sp>
@@ -24251,7 +23788,7 @@
           <a:noFill/>
         </p:spPr>
         <p:txBody>
-          <a:bodyPr wrap="square" lIns="0" tIns="0" rIns="0" bIns="0" anchor="ctr">
+          <a:bodyPr wrap="square" anchor="ctr" lIns="0" rIns="0" tIns="0" bIns="0">
             <a:spAutoFit/>
           </a:bodyPr>
           <a:lstStyle/>
@@ -24287,7 +23824,7 @@
           <a:noFill/>
         </p:spPr>
         <p:txBody>
-          <a:bodyPr wrap="square" lIns="0" tIns="0" rIns="0" bIns="0" anchor="ctr">
+          <a:bodyPr wrap="square" anchor="ctr" lIns="0" rIns="0" tIns="0" bIns="0">
             <a:spAutoFit/>
           </a:bodyPr>
           <a:lstStyle/>
@@ -24355,7 +23892,6 @@
           <a:lstStyle/>
           <a:p>
             <a:pPr algn="ctr"/>
-            <a:endParaRPr/>
           </a:p>
         </p:txBody>
       </p:sp>
@@ -24376,7 +23912,7 @@
           <a:noFill/>
         </p:spPr>
         <p:txBody>
-          <a:bodyPr wrap="square" lIns="0" tIns="0" rIns="0" bIns="0" anchor="ctr">
+          <a:bodyPr wrap="square" anchor="ctr" lIns="0" rIns="0" tIns="0" bIns="0">
             <a:spAutoFit/>
           </a:bodyPr>
           <a:lstStyle/>
@@ -24412,7 +23948,7 @@
           <a:noFill/>
         </p:spPr>
         <p:txBody>
-          <a:bodyPr wrap="square" lIns="0" tIns="0" rIns="0" bIns="0" anchor="ctr">
+          <a:bodyPr wrap="square" anchor="ctr" lIns="0" rIns="0" tIns="0" bIns="0">
             <a:spAutoFit/>
           </a:bodyPr>
           <a:lstStyle/>
@@ -24478,7 +24014,6 @@
           <a:lstStyle/>
           <a:p>
             <a:pPr algn="ctr"/>
-            <a:endParaRPr/>
           </a:p>
         </p:txBody>
       </p:sp>
@@ -24499,7 +24034,7 @@
           <a:noFill/>
         </p:spPr>
         <p:txBody>
-          <a:bodyPr wrap="square" lIns="0" tIns="0" rIns="0" bIns="0" anchor="ctr">
+          <a:bodyPr wrap="square" anchor="ctr" lIns="0" rIns="0" tIns="0" bIns="0">
             <a:spAutoFit/>
           </a:bodyPr>
           <a:lstStyle/>
@@ -24527,7 +24062,7 @@
 </file>
 
 <file path=ppt/slides/slide8.xml><?xml version="1.0" encoding="utf-8"?>
-<p:sld xmlns:a="http://schemas.openxmlformats.org/drawingml/2006/main" xmlns:r="http://schemas.openxmlformats.org/officeDocument/2006/relationships" xmlns:p="http://schemas.openxmlformats.org/presentationml/2006/main">
+<p:sld xmlns:a="http://schemas.openxmlformats.org/drawingml/2006/main" xmlns:p="http://schemas.openxmlformats.org/presentationml/2006/main" xmlns:r="http://schemas.openxmlformats.org/officeDocument/2006/relationships">
   <p:cSld>
     <p:bg>
       <p:bgPr>
@@ -24543,14 +24078,7 @@
         <p:cNvGrpSpPr/>
         <p:nvPr/>
       </p:nvGrpSpPr>
-      <p:grpSpPr>
-        <a:xfrm>
-          <a:off x="0" y="0"/>
-          <a:ext cx="0" cy="0"/>
-          <a:chOff x="0" y="0"/>
-          <a:chExt cx="0" cy="0"/>
-        </a:xfrm>
-      </p:grpSpPr>
+      <p:grpSpPr/>
       <p:sp>
         <p:nvSpPr>
           <p:cNvPr id="2" name="Rounded Rectangle 1"/>
@@ -24590,7 +24118,7 @@
           </a:fontRef>
         </p:style>
         <p:txBody>
-          <a:bodyPr wrap="none" lIns="45720" tIns="0" rIns="45720" bIns="0" rtlCol="0" anchor="ctr"/>
+          <a:bodyPr rtlCol="0" anchor="ctr" wrap="none" lIns="45720" rIns="45720" tIns="0" bIns="0"/>
           <a:lstStyle/>
           <a:p>
             <a:pPr algn="ctr"/>
@@ -24624,7 +24152,7 @@
           <a:noFill/>
         </p:spPr>
         <p:txBody>
-          <a:bodyPr wrap="square" lIns="0" tIns="0" rIns="0" bIns="0" anchor="ctr">
+          <a:bodyPr wrap="square" anchor="ctr" lIns="0" rIns="0" tIns="0" bIns="0">
             <a:spAutoFit/>
           </a:bodyPr>
           <a:lstStyle/>
@@ -24696,7 +24224,7 @@
           <a:noFill/>
         </p:spPr>
         <p:txBody>
-          <a:bodyPr wrap="square" lIns="0" tIns="0" rIns="0" bIns="0" anchor="t">
+          <a:bodyPr wrap="square" anchor="t" lIns="0" rIns="0" tIns="0" bIns="0">
             <a:spAutoFit/>
           </a:bodyPr>
           <a:lstStyle/>
@@ -24732,7 +24260,7 @@
           <a:noFill/>
         </p:spPr>
         <p:txBody>
-          <a:bodyPr wrap="square" lIns="0" tIns="0" rIns="0" bIns="0" anchor="t">
+          <a:bodyPr wrap="square" anchor="t" lIns="0" rIns="0" tIns="0" bIns="0">
             <a:spAutoFit/>
           </a:bodyPr>
           <a:lstStyle/>
@@ -24794,7 +24322,6 @@
           <a:lstStyle/>
           <a:p>
             <a:pPr algn="ctr"/>
-            <a:endParaRPr/>
           </a:p>
         </p:txBody>
       </p:sp>
@@ -24843,7 +24370,6 @@
           <a:lstStyle/>
           <a:p>
             <a:pPr algn="ctr"/>
-            <a:endParaRPr/>
           </a:p>
         </p:txBody>
       </p:sp>
@@ -24864,7 +24390,7 @@
           <a:noFill/>
         </p:spPr>
         <p:txBody>
-          <a:bodyPr wrap="square" lIns="0" tIns="0" rIns="0" bIns="0" anchor="t">
+          <a:bodyPr wrap="square" anchor="t" lIns="0" rIns="0" tIns="0" bIns="0">
             <a:spAutoFit/>
           </a:bodyPr>
           <a:lstStyle/>
@@ -24914,7 +24440,7 @@
           <a:noFill/>
         </p:spPr>
         <p:txBody>
-          <a:bodyPr wrap="square" lIns="0" tIns="0" rIns="0" bIns="0" anchor="t">
+          <a:bodyPr wrap="square" anchor="t" lIns="0" rIns="0" tIns="0" bIns="0">
             <a:spAutoFit/>
           </a:bodyPr>
           <a:lstStyle/>
@@ -24971,7 +24497,7 @@
           <a:noFill/>
         </p:spPr>
         <p:txBody>
-          <a:bodyPr wrap="square" lIns="0" tIns="0" rIns="0" bIns="0" anchor="t">
+          <a:bodyPr wrap="square" anchor="t" lIns="0" rIns="0" tIns="0" bIns="0">
             <a:spAutoFit/>
           </a:bodyPr>
           <a:lstStyle/>
@@ -25028,7 +24554,7 @@
           <a:noFill/>
         </p:spPr>
         <p:txBody>
-          <a:bodyPr wrap="square" lIns="0" tIns="0" rIns="0" bIns="0" anchor="t">
+          <a:bodyPr wrap="square" anchor="t" lIns="0" rIns="0" tIns="0" bIns="0">
             <a:spAutoFit/>
           </a:bodyPr>
           <a:lstStyle/>
@@ -25085,7 +24611,7 @@
           <a:noFill/>
         </p:spPr>
         <p:txBody>
-          <a:bodyPr wrap="square" lIns="0" tIns="0" rIns="0" bIns="0" anchor="t">
+          <a:bodyPr wrap="square" anchor="t" lIns="0" rIns="0" tIns="0" bIns="0">
             <a:spAutoFit/>
           </a:bodyPr>
           <a:lstStyle/>
@@ -25142,7 +24668,7 @@
           <a:noFill/>
         </p:spPr>
         <p:txBody>
-          <a:bodyPr wrap="square" lIns="0" tIns="0" rIns="0" bIns="0" anchor="t">
+          <a:bodyPr wrap="square" anchor="t" lIns="0" rIns="0" tIns="0" bIns="0">
             <a:spAutoFit/>
           </a:bodyPr>
           <a:lstStyle/>
@@ -25204,7 +24730,6 @@
           <a:lstStyle/>
           <a:p>
             <a:pPr algn="ctr"/>
-            <a:endParaRPr/>
           </a:p>
         </p:txBody>
       </p:sp>
@@ -25253,7 +24778,6 @@
           <a:lstStyle/>
           <a:p>
             <a:pPr algn="ctr"/>
-            <a:endParaRPr/>
           </a:p>
         </p:txBody>
       </p:sp>
@@ -25274,7 +24798,7 @@
           <a:noFill/>
         </p:spPr>
         <p:txBody>
-          <a:bodyPr wrap="square" lIns="0" tIns="0" rIns="0" bIns="0" anchor="t">
+          <a:bodyPr wrap="square" anchor="t" lIns="0" rIns="0" tIns="0" bIns="0">
             <a:spAutoFit/>
           </a:bodyPr>
           <a:lstStyle/>
@@ -25344,7 +24868,7 @@
           <a:noFill/>
         </p:spPr>
         <p:txBody>
-          <a:bodyPr wrap="square" lIns="0" tIns="0" rIns="0" bIns="0" anchor="t">
+          <a:bodyPr wrap="square" anchor="t" lIns="0" rIns="0" tIns="0" bIns="0">
             <a:spAutoFit/>
           </a:bodyPr>
           <a:lstStyle/>
@@ -25406,7 +24930,6 @@
           <a:lstStyle/>
           <a:p>
             <a:pPr algn="ctr"/>
-            <a:endParaRPr/>
           </a:p>
         </p:txBody>
       </p:sp>
@@ -25455,7 +24978,6 @@
           <a:lstStyle/>
           <a:p>
             <a:pPr algn="ctr"/>
-            <a:endParaRPr/>
           </a:p>
         </p:txBody>
       </p:sp>
@@ -25476,7 +24998,7 @@
           <a:noFill/>
         </p:spPr>
         <p:txBody>
-          <a:bodyPr wrap="square" lIns="0" tIns="0" rIns="0" bIns="0" anchor="t">
+          <a:bodyPr wrap="square" anchor="t" lIns="0" rIns="0" tIns="0" bIns="0">
             <a:spAutoFit/>
           </a:bodyPr>
           <a:lstStyle/>
@@ -25536,7 +25058,7 @@
           <a:noFill/>
         </p:spPr>
         <p:txBody>
-          <a:bodyPr wrap="square" lIns="0" tIns="0" rIns="0" bIns="0" anchor="t">
+          <a:bodyPr wrap="square" anchor="t" lIns="0" rIns="0" tIns="0" bIns="0">
             <a:spAutoFit/>
           </a:bodyPr>
           <a:lstStyle/>
@@ -25596,7 +25118,7 @@
           <a:noFill/>
         </p:spPr>
         <p:txBody>
-          <a:bodyPr wrap="square" lIns="0" tIns="0" rIns="0" bIns="0" anchor="t">
+          <a:bodyPr wrap="square" anchor="t" lIns="0" rIns="0" tIns="0" bIns="0">
             <a:spAutoFit/>
           </a:bodyPr>
           <a:lstStyle/>
@@ -25660,7 +25182,6 @@
           <a:lstStyle/>
           <a:p>
             <a:pPr algn="ctr"/>
-            <a:endParaRPr/>
           </a:p>
         </p:txBody>
       </p:sp>
@@ -25681,7 +25202,7 @@
           <a:noFill/>
         </p:spPr>
         <p:txBody>
-          <a:bodyPr wrap="square" lIns="0" tIns="0" rIns="0" bIns="0" anchor="ctr">
+          <a:bodyPr wrap="square" anchor="ctr" lIns="0" rIns="0" tIns="0" bIns="0">
             <a:spAutoFit/>
           </a:bodyPr>
           <a:lstStyle/>
@@ -25745,7 +25266,6 @@
           <a:lstStyle/>
           <a:p>
             <a:pPr algn="ctr"/>
-            <a:endParaRPr/>
           </a:p>
         </p:txBody>
       </p:sp>
@@ -25766,7 +25286,7 @@
           <a:noFill/>
         </p:spPr>
         <p:txBody>
-          <a:bodyPr wrap="square" lIns="0" tIns="0" rIns="0" bIns="0" anchor="ctr">
+          <a:bodyPr wrap="square" anchor="ctr" lIns="0" rIns="0" tIns="0" bIns="0">
             <a:spAutoFit/>
           </a:bodyPr>
           <a:lstStyle/>
@@ -25830,7 +25350,6 @@
           <a:lstStyle/>
           <a:p>
             <a:pPr algn="ctr"/>
-            <a:endParaRPr/>
           </a:p>
         </p:txBody>
       </p:sp>
@@ -25851,7 +25370,7 @@
           <a:noFill/>
         </p:spPr>
         <p:txBody>
-          <a:bodyPr wrap="square" lIns="0" tIns="0" rIns="0" bIns="0" anchor="ctr">
+          <a:bodyPr wrap="square" anchor="ctr" lIns="0" rIns="0" tIns="0" bIns="0">
             <a:spAutoFit/>
           </a:bodyPr>
           <a:lstStyle/>
@@ -25915,7 +25434,6 @@
           <a:lstStyle/>
           <a:p>
             <a:pPr algn="ctr"/>
-            <a:endParaRPr/>
           </a:p>
         </p:txBody>
       </p:sp>
@@ -25936,7 +25454,7 @@
           <a:noFill/>
         </p:spPr>
         <p:txBody>
-          <a:bodyPr wrap="square" lIns="0" tIns="0" rIns="0" bIns="0" anchor="ctr">
+          <a:bodyPr wrap="square" anchor="ctr" lIns="0" rIns="0" tIns="0" bIns="0">
             <a:spAutoFit/>
           </a:bodyPr>
           <a:lstStyle/>
@@ -25964,7 +25482,7 @@
 </file>
 
 <file path=ppt/slides/slide9.xml><?xml version="1.0" encoding="utf-8"?>
-<p:sld xmlns:a="http://schemas.openxmlformats.org/drawingml/2006/main" xmlns:r="http://schemas.openxmlformats.org/officeDocument/2006/relationships" xmlns:p="http://schemas.openxmlformats.org/presentationml/2006/main">
+<p:sld xmlns:a="http://schemas.openxmlformats.org/drawingml/2006/main" xmlns:p="http://schemas.openxmlformats.org/presentationml/2006/main" xmlns:r="http://schemas.openxmlformats.org/officeDocument/2006/relationships">
   <p:cSld>
     <p:bg>
       <p:bgPr>
@@ -25980,14 +25498,7 @@
         <p:cNvGrpSpPr/>
         <p:nvPr/>
       </p:nvGrpSpPr>
-      <p:grpSpPr>
-        <a:xfrm>
-          <a:off x="0" y="0"/>
-          <a:ext cx="0" cy="0"/>
-          <a:chOff x="0" y="0"/>
-          <a:chExt cx="0" cy="0"/>
-        </a:xfrm>
-      </p:grpSpPr>
+      <p:grpSpPr/>
       <p:sp>
         <p:nvSpPr>
           <p:cNvPr id="2" name="Rounded Rectangle 1"/>
@@ -26027,7 +25538,7 @@
           </a:fontRef>
         </p:style>
         <p:txBody>
-          <a:bodyPr wrap="none" lIns="45720" tIns="0" rIns="45720" bIns="0" rtlCol="0" anchor="ctr"/>
+          <a:bodyPr rtlCol="0" anchor="ctr" wrap="none" lIns="45720" rIns="45720" tIns="0" bIns="0"/>
           <a:lstStyle/>
           <a:p>
             <a:pPr algn="ctr"/>
@@ -26061,7 +25572,7 @@
           <a:noFill/>
         </p:spPr>
         <p:txBody>
-          <a:bodyPr wrap="square" lIns="0" tIns="0" rIns="0" bIns="0" anchor="ctr">
+          <a:bodyPr wrap="square" anchor="ctr" lIns="0" rIns="0" tIns="0" bIns="0">
             <a:spAutoFit/>
           </a:bodyPr>
           <a:lstStyle/>
@@ -26133,7 +25644,7 @@
           <a:noFill/>
         </p:spPr>
         <p:txBody>
-          <a:bodyPr wrap="square" lIns="0" tIns="0" rIns="0" bIns="0" anchor="t">
+          <a:bodyPr wrap="square" anchor="t" lIns="0" rIns="0" tIns="0" bIns="0">
             <a:spAutoFit/>
           </a:bodyPr>
           <a:lstStyle/>
@@ -26195,7 +25706,6 @@
           <a:lstStyle/>
           <a:p>
             <a:pPr algn="ctr"/>
-            <a:endParaRPr/>
           </a:p>
         </p:txBody>
       </p:sp>
@@ -26244,7 +25754,6 @@
           <a:lstStyle/>
           <a:p>
             <a:pPr algn="ctr"/>
-            <a:endParaRPr/>
           </a:p>
         </p:txBody>
       </p:sp>
@@ -26287,7 +25796,7 @@
           </a:fontRef>
         </p:style>
         <p:txBody>
-          <a:bodyPr wrap="none" lIns="45720" tIns="0" rIns="45720" bIns="0" rtlCol="0" anchor="ctr"/>
+          <a:bodyPr rtlCol="0" anchor="ctr" wrap="none" lIns="45720" rIns="45720" tIns="0" bIns="0"/>
           <a:lstStyle/>
           <a:p>
             <a:pPr algn="ctr"/>
@@ -26321,7 +25830,7 @@
           <a:noFill/>
         </p:spPr>
         <p:txBody>
-          <a:bodyPr wrap="square" lIns="0" tIns="0" rIns="0" bIns="0" anchor="t">
+          <a:bodyPr wrap="square" anchor="t" lIns="0" rIns="0" tIns="0" bIns="0">
             <a:spAutoFit/>
           </a:bodyPr>
           <a:lstStyle/>
@@ -26490,7 +25999,6 @@
           <a:lstStyle/>
           <a:p>
             <a:pPr algn="ctr"/>
-            <a:endParaRPr/>
           </a:p>
         </p:txBody>
       </p:sp>
@@ -26539,7 +26047,6 @@
           <a:lstStyle/>
           <a:p>
             <a:pPr algn="ctr"/>
-            <a:endParaRPr/>
           </a:p>
         </p:txBody>
       </p:sp>
@@ -26582,7 +26089,7 @@
           </a:fontRef>
         </p:style>
         <p:txBody>
-          <a:bodyPr wrap="none" lIns="45720" tIns="0" rIns="45720" bIns="0" rtlCol="0" anchor="ctr"/>
+          <a:bodyPr rtlCol="0" anchor="ctr" wrap="none" lIns="45720" rIns="45720" tIns="0" bIns="0"/>
           <a:lstStyle/>
           <a:p>
             <a:pPr algn="ctr"/>
@@ -26616,7 +26123,7 @@
           <a:noFill/>
         </p:spPr>
         <p:txBody>
-          <a:bodyPr wrap="square" lIns="0" tIns="0" rIns="0" bIns="0" anchor="t">
+          <a:bodyPr wrap="square" anchor="t" lIns="0" rIns="0" tIns="0" bIns="0">
             <a:spAutoFit/>
           </a:bodyPr>
           <a:lstStyle/>
@@ -26785,7 +26292,6 @@
           <a:lstStyle/>
           <a:p>
             <a:pPr algn="ctr"/>
-            <a:endParaRPr/>
           </a:p>
         </p:txBody>
       </p:sp>
@@ -26834,7 +26340,6 @@
           <a:lstStyle/>
           <a:p>
             <a:pPr algn="ctr"/>
-            <a:endParaRPr/>
           </a:p>
         </p:txBody>
       </p:sp>
@@ -26877,7 +26382,7 @@
           </a:fontRef>
         </p:style>
         <p:txBody>
-          <a:bodyPr wrap="none" lIns="45720" tIns="0" rIns="45720" bIns="0" rtlCol="0" anchor="ctr"/>
+          <a:bodyPr rtlCol="0" anchor="ctr" wrap="none" lIns="45720" rIns="45720" tIns="0" bIns="0"/>
           <a:lstStyle/>
           <a:p>
             <a:pPr algn="ctr"/>
@@ -26911,7 +26416,7 @@
           <a:noFill/>
         </p:spPr>
         <p:txBody>
-          <a:bodyPr wrap="square" lIns="0" tIns="0" rIns="0" bIns="0" anchor="t">
+          <a:bodyPr wrap="square" anchor="t" lIns="0" rIns="0" tIns="0" bIns="0">
             <a:spAutoFit/>
           </a:bodyPr>
           <a:lstStyle/>
